--- a/Proyectos/Proyecto8 - Funciones Adicionales de Power BI/Recursos/Interfaces+Power+BI/Fondos/Fondos Plantilla.pptx
+++ b/Proyectos/Proyecto8 - Funciones Adicionales de Power BI/Recursos/Interfaces+Power+BI/Fondos/Fondos Plantilla.pptx
@@ -2,30 +2,31 @@
 <file path=ppt/presentation.xml><?xml version="1.0" encoding="utf-8"?>
 <p:presentation xmlns:a="http://schemas.openxmlformats.org/drawingml/2006/main" xmlns:r="http://schemas.openxmlformats.org/officeDocument/2006/relationships" xmlns:p="http://schemas.openxmlformats.org/presentationml/2006/main" saveSubsetFonts="1">
   <p:sldMasterIdLst>
-    <p:sldMasterId id="2147483731" r:id="rId1"/>
+    <p:sldMasterId id="2147483743" r:id="rId1"/>
   </p:sldMasterIdLst>
   <p:sldIdLst>
-    <p:sldId id="271" r:id="rId2"/>
-    <p:sldId id="266" r:id="rId3"/>
-    <p:sldId id="267" r:id="rId4"/>
-    <p:sldId id="265" r:id="rId5"/>
-    <p:sldId id="257" r:id="rId6"/>
-    <p:sldId id="263" r:id="rId7"/>
-    <p:sldId id="268" r:id="rId8"/>
-    <p:sldId id="269" r:id="rId9"/>
-    <p:sldId id="270" r:id="rId10"/>
-    <p:sldId id="272" r:id="rId11"/>
-    <p:sldId id="260" r:id="rId12"/>
-    <p:sldId id="259" r:id="rId13"/>
-    <p:sldId id="261" r:id="rId14"/>
-    <p:sldId id="258" r:id="rId15"/>
-    <p:sldId id="264" r:id="rId16"/>
+    <p:sldId id="273" r:id="rId2"/>
+    <p:sldId id="271" r:id="rId3"/>
+    <p:sldId id="266" r:id="rId4"/>
+    <p:sldId id="267" r:id="rId5"/>
+    <p:sldId id="265" r:id="rId6"/>
+    <p:sldId id="257" r:id="rId7"/>
+    <p:sldId id="263" r:id="rId8"/>
+    <p:sldId id="268" r:id="rId9"/>
+    <p:sldId id="269" r:id="rId10"/>
+    <p:sldId id="270" r:id="rId11"/>
+    <p:sldId id="272" r:id="rId12"/>
+    <p:sldId id="260" r:id="rId13"/>
+    <p:sldId id="259" r:id="rId14"/>
+    <p:sldId id="261" r:id="rId15"/>
+    <p:sldId id="258" r:id="rId16"/>
+    <p:sldId id="264" r:id="rId17"/>
   </p:sldIdLst>
   <p:sldSz cx="12192000" cy="6858000"/>
   <p:notesSz cx="7315200" cy="9601200"/>
   <p:defaultTextStyle>
     <a:defPPr>
-      <a:defRPr lang="en-US"/>
+      <a:defRPr lang="es-AR"/>
     </a:defPPr>
     <a:lvl1pPr marL="0" algn="l" defTabSz="914400" rtl="0" eaLnBrk="1" latinLnBrk="0" hangingPunct="1">
       <a:defRPr sz="1800" kern="1200">
@@ -118,12 +119,17 @@
       </a:defRPr>
     </a:lvl9pPr>
   </p:defaultTextStyle>
+  <p:extLst>
+    <p:ext uri="{EFAFB233-063F-42B5-8137-9DF3F51BA10A}">
+      <p15:sldGuideLst xmlns:p15="http://schemas.microsoft.com/office/powerpoint/2012/main"/>
+    </p:ext>
+  </p:extLst>
 </p:presentation>
 </file>
 
 <file path=ppt/slideLayouts/slideLayout1.xml><?xml version="1.0" encoding="utf-8"?>
 <p:sldLayout xmlns:a="http://schemas.openxmlformats.org/drawingml/2006/main" xmlns:r="http://schemas.openxmlformats.org/officeDocument/2006/relationships" xmlns:p="http://schemas.openxmlformats.org/presentationml/2006/main" type="title" preserve="1">
-  <p:cSld name="Title Slide">
+  <p:cSld name="Diapositiva de título">
     <p:spTree>
       <p:nvGrpSpPr>
         <p:cNvPr id="1" name=""/>
@@ -140,7 +146,13 @@
       </p:grpSpPr>
       <p:sp>
         <p:nvSpPr>
-          <p:cNvPr id="2" name="Title 1"/>
+          <p:cNvPr id="2" name="Título 1">
+            <a:extLst>
+              <a:ext uri="{FF2B5EF4-FFF2-40B4-BE49-F238E27FC236}">
+                <a16:creationId xmlns:a16="http://schemas.microsoft.com/office/drawing/2014/main" id="{B41A4A21-89A1-040B-565E-5E6A8E0BC3AB}"/>
+              </a:ext>
+            </a:extLst>
+          </p:cNvPr>
           <p:cNvSpPr>
             <a:spLocks noGrp="1"/>
           </p:cNvSpPr>
@@ -163,16 +175,22 @@
           </a:lstStyle>
           <a:p>
             <a:r>
-              <a:rPr lang="en-US" smtClean="0"/>
-              <a:t>Click to edit Master title style</a:t>
+              <a:rPr lang="es-ES"/>
+              <a:t>Haga clic para modificar el estilo de título del patrón</a:t>
             </a:r>
-            <a:endParaRPr lang="en-US"/>
-          </a:p>
-        </p:txBody>
-      </p:sp>
-      <p:sp>
-        <p:nvSpPr>
-          <p:cNvPr id="3" name="Subtitle 2"/>
+            <a:endParaRPr lang="es-AR"/>
+          </a:p>
+        </p:txBody>
+      </p:sp>
+      <p:sp>
+        <p:nvSpPr>
+          <p:cNvPr id="3" name="Subtítulo 2">
+            <a:extLst>
+              <a:ext uri="{FF2B5EF4-FFF2-40B4-BE49-F238E27FC236}">
+                <a16:creationId xmlns:a16="http://schemas.microsoft.com/office/drawing/2014/main" id="{4B960946-EEC9-581F-8B31-8F54284C7660}"/>
+              </a:ext>
+            </a:extLst>
+          </p:cNvPr>
           <p:cNvSpPr>
             <a:spLocks noGrp="1"/>
           </p:cNvSpPr>
@@ -228,16 +246,22 @@
           </a:lstStyle>
           <a:p>
             <a:r>
-              <a:rPr lang="en-US" smtClean="0"/>
-              <a:t>Click to edit Master subtitle style</a:t>
+              <a:rPr lang="es-ES"/>
+              <a:t>Haga clic para modificar el estilo de subtítulo del patrón</a:t>
             </a:r>
-            <a:endParaRPr lang="en-US"/>
-          </a:p>
-        </p:txBody>
-      </p:sp>
-      <p:sp>
-        <p:nvSpPr>
-          <p:cNvPr id="4" name="Date Placeholder 3"/>
+            <a:endParaRPr lang="es-AR"/>
+          </a:p>
+        </p:txBody>
+      </p:sp>
+      <p:sp>
+        <p:nvSpPr>
+          <p:cNvPr id="4" name="Marcador de fecha 3">
+            <a:extLst>
+              <a:ext uri="{FF2B5EF4-FFF2-40B4-BE49-F238E27FC236}">
+                <a16:creationId xmlns:a16="http://schemas.microsoft.com/office/drawing/2014/main" id="{4C4CFF15-0755-F2A7-D659-6C2CB7B899C5}"/>
+              </a:ext>
+            </a:extLst>
+          </p:cNvPr>
           <p:cNvSpPr>
             <a:spLocks noGrp="1"/>
           </p:cNvSpPr>
@@ -252,7 +276,7 @@
           <a:p>
             <a:fld id="{B8EC28E4-E6E7-4EAE-BF5F-E5655227AD26}" type="datetimeFigureOut">
               <a:rPr lang="en-US" smtClean="0"/>
-              <a:t>4/8/2020</a:t>
+              <a:t>3/24/2026</a:t>
             </a:fld>
             <a:endParaRPr lang="en-US"/>
           </a:p>
@@ -260,7 +284,13 @@
       </p:sp>
       <p:sp>
         <p:nvSpPr>
-          <p:cNvPr id="5" name="Footer Placeholder 4"/>
+          <p:cNvPr id="5" name="Marcador de pie de página 4">
+            <a:extLst>
+              <a:ext uri="{FF2B5EF4-FFF2-40B4-BE49-F238E27FC236}">
+                <a16:creationId xmlns:a16="http://schemas.microsoft.com/office/drawing/2014/main" id="{DFC84F51-139B-3A85-057A-2DE512D61BA6}"/>
+              </a:ext>
+            </a:extLst>
+          </p:cNvPr>
           <p:cNvSpPr>
             <a:spLocks noGrp="1"/>
           </p:cNvSpPr>
@@ -279,7 +309,13 @@
       </p:sp>
       <p:sp>
         <p:nvSpPr>
-          <p:cNvPr id="6" name="Slide Number Placeholder 5"/>
+          <p:cNvPr id="6" name="Marcador de número de diapositiva 5">
+            <a:extLst>
+              <a:ext uri="{FF2B5EF4-FFF2-40B4-BE49-F238E27FC236}">
+                <a16:creationId xmlns:a16="http://schemas.microsoft.com/office/drawing/2014/main" id="{E4F92CBD-1B11-8D45-2E80-30DEF4BC29A5}"/>
+              </a:ext>
+            </a:extLst>
+          </p:cNvPr>
           <p:cNvSpPr>
             <a:spLocks noGrp="1"/>
           </p:cNvSpPr>
@@ -294,7 +330,7 @@
           <a:p>
             <a:fld id="{0B0D108F-AF76-43BD-8B58-422745E650E7}" type="slidenum">
               <a:rPr lang="en-US" smtClean="0"/>
-              <a:t>‹#›</a:t>
+              <a:t>‹Nº›</a:t>
             </a:fld>
             <a:endParaRPr lang="en-US"/>
           </a:p>
@@ -303,7 +339,7 @@
     </p:spTree>
     <p:extLst>
       <p:ext uri="{BB962C8B-B14F-4D97-AF65-F5344CB8AC3E}">
-        <p14:creationId xmlns:p14="http://schemas.microsoft.com/office/powerpoint/2010/main" val="3986052405"/>
+        <p14:creationId xmlns:p14="http://schemas.microsoft.com/office/powerpoint/2010/main" val="3692880898"/>
       </p:ext>
     </p:extLst>
   </p:cSld>
@@ -315,7 +351,7 @@
 
 <file path=ppt/slideLayouts/slideLayout10.xml><?xml version="1.0" encoding="utf-8"?>
 <p:sldLayout xmlns:a="http://schemas.openxmlformats.org/drawingml/2006/main" xmlns:r="http://schemas.openxmlformats.org/officeDocument/2006/relationships" xmlns:p="http://schemas.openxmlformats.org/presentationml/2006/main" type="vertTx" preserve="1">
-  <p:cSld name="Title and Vertical Text">
+  <p:cSld name="Título y texto vertical">
     <p:spTree>
       <p:nvGrpSpPr>
         <p:cNvPr id="1" name=""/>
@@ -332,7 +368,13 @@
       </p:grpSpPr>
       <p:sp>
         <p:nvSpPr>
-          <p:cNvPr id="2" name="Title 1"/>
+          <p:cNvPr id="2" name="Título 1">
+            <a:extLst>
+              <a:ext uri="{FF2B5EF4-FFF2-40B4-BE49-F238E27FC236}">
+                <a16:creationId xmlns:a16="http://schemas.microsoft.com/office/drawing/2014/main" id="{E3EDB495-2D5A-9693-207A-CA1213299A89}"/>
+              </a:ext>
+            </a:extLst>
+          </p:cNvPr>
           <p:cNvSpPr>
             <a:spLocks noGrp="1"/>
           </p:cNvSpPr>
@@ -346,16 +388,22 @@
           <a:lstStyle/>
           <a:p>
             <a:r>
-              <a:rPr lang="en-US" smtClean="0"/>
-              <a:t>Click to edit Master title style</a:t>
+              <a:rPr lang="es-ES"/>
+              <a:t>Haga clic para modificar el estilo de título del patrón</a:t>
             </a:r>
-            <a:endParaRPr lang="en-US"/>
-          </a:p>
-        </p:txBody>
-      </p:sp>
-      <p:sp>
-        <p:nvSpPr>
-          <p:cNvPr id="3" name="Vertical Text Placeholder 2"/>
+            <a:endParaRPr lang="es-AR"/>
+          </a:p>
+        </p:txBody>
+      </p:sp>
+      <p:sp>
+        <p:nvSpPr>
+          <p:cNvPr id="3" name="Marcador de texto vertical 2">
+            <a:extLst>
+              <a:ext uri="{FF2B5EF4-FFF2-40B4-BE49-F238E27FC236}">
+                <a16:creationId xmlns:a16="http://schemas.microsoft.com/office/drawing/2014/main" id="{3282089C-64F8-3507-5090-28A9296531C1}"/>
+              </a:ext>
+            </a:extLst>
+          </p:cNvPr>
           <p:cNvSpPr>
             <a:spLocks noGrp="1"/>
           </p:cNvSpPr>
@@ -370,44 +418,50 @@
           <a:p>
             <a:pPr lvl="0"/>
             <a:r>
-              <a:rPr lang="en-US" smtClean="0"/>
-              <a:t>Edit Master text styles</a:t>
+              <a:rPr lang="es-ES"/>
+              <a:t>Haga clic para modificar los estilos de texto del patrón</a:t>
             </a:r>
           </a:p>
           <a:p>
             <a:pPr lvl="1"/>
             <a:r>
-              <a:rPr lang="en-US" smtClean="0"/>
-              <a:t>Second level</a:t>
+              <a:rPr lang="es-ES"/>
+              <a:t>Segundo nivel</a:t>
             </a:r>
           </a:p>
           <a:p>
             <a:pPr lvl="2"/>
             <a:r>
-              <a:rPr lang="en-US" smtClean="0"/>
-              <a:t>Third level</a:t>
+              <a:rPr lang="es-ES"/>
+              <a:t>Tercer nivel</a:t>
             </a:r>
           </a:p>
           <a:p>
             <a:pPr lvl="3"/>
             <a:r>
-              <a:rPr lang="en-US" smtClean="0"/>
-              <a:t>Fourth level</a:t>
+              <a:rPr lang="es-ES"/>
+              <a:t>Cuarto nivel</a:t>
             </a:r>
           </a:p>
           <a:p>
             <a:pPr lvl="4"/>
             <a:r>
-              <a:rPr lang="en-US" smtClean="0"/>
-              <a:t>Fifth level</a:t>
+              <a:rPr lang="es-ES"/>
+              <a:t>Quinto nivel</a:t>
             </a:r>
-            <a:endParaRPr lang="en-US"/>
-          </a:p>
-        </p:txBody>
-      </p:sp>
-      <p:sp>
-        <p:nvSpPr>
-          <p:cNvPr id="4" name="Date Placeholder 3"/>
+            <a:endParaRPr lang="es-AR"/>
+          </a:p>
+        </p:txBody>
+      </p:sp>
+      <p:sp>
+        <p:nvSpPr>
+          <p:cNvPr id="4" name="Marcador de fecha 3">
+            <a:extLst>
+              <a:ext uri="{FF2B5EF4-FFF2-40B4-BE49-F238E27FC236}">
+                <a16:creationId xmlns:a16="http://schemas.microsoft.com/office/drawing/2014/main" id="{713A7A0E-46A6-658D-545C-EAE7EB55F35E}"/>
+              </a:ext>
+            </a:extLst>
+          </p:cNvPr>
           <p:cNvSpPr>
             <a:spLocks noGrp="1"/>
           </p:cNvSpPr>
@@ -422,7 +476,7 @@
           <a:p>
             <a:fld id="{B8EC28E4-E6E7-4EAE-BF5F-E5655227AD26}" type="datetimeFigureOut">
               <a:rPr lang="en-US" smtClean="0"/>
-              <a:t>4/8/2020</a:t>
+              <a:t>3/24/2026</a:t>
             </a:fld>
             <a:endParaRPr lang="en-US"/>
           </a:p>
@@ -430,7 +484,13 @@
       </p:sp>
       <p:sp>
         <p:nvSpPr>
-          <p:cNvPr id="5" name="Footer Placeholder 4"/>
+          <p:cNvPr id="5" name="Marcador de pie de página 4">
+            <a:extLst>
+              <a:ext uri="{FF2B5EF4-FFF2-40B4-BE49-F238E27FC236}">
+                <a16:creationId xmlns:a16="http://schemas.microsoft.com/office/drawing/2014/main" id="{E8299F51-6B0B-0D88-94AB-557B3B9D920A}"/>
+              </a:ext>
+            </a:extLst>
+          </p:cNvPr>
           <p:cNvSpPr>
             <a:spLocks noGrp="1"/>
           </p:cNvSpPr>
@@ -449,7 +509,13 @@
       </p:sp>
       <p:sp>
         <p:nvSpPr>
-          <p:cNvPr id="6" name="Slide Number Placeholder 5"/>
+          <p:cNvPr id="6" name="Marcador de número de diapositiva 5">
+            <a:extLst>
+              <a:ext uri="{FF2B5EF4-FFF2-40B4-BE49-F238E27FC236}">
+                <a16:creationId xmlns:a16="http://schemas.microsoft.com/office/drawing/2014/main" id="{548F29E0-E52F-2BA5-3C4D-DA5064616E44}"/>
+              </a:ext>
+            </a:extLst>
+          </p:cNvPr>
           <p:cNvSpPr>
             <a:spLocks noGrp="1"/>
           </p:cNvSpPr>
@@ -464,7 +530,7 @@
           <a:p>
             <a:fld id="{0B0D108F-AF76-43BD-8B58-422745E650E7}" type="slidenum">
               <a:rPr lang="en-US" smtClean="0"/>
-              <a:t>‹#›</a:t>
+              <a:t>‹Nº›</a:t>
             </a:fld>
             <a:endParaRPr lang="en-US"/>
           </a:p>
@@ -473,7 +539,7 @@
     </p:spTree>
     <p:extLst>
       <p:ext uri="{BB962C8B-B14F-4D97-AF65-F5344CB8AC3E}">
-        <p14:creationId xmlns:p14="http://schemas.microsoft.com/office/powerpoint/2010/main" val="4032974685"/>
+        <p14:creationId xmlns:p14="http://schemas.microsoft.com/office/powerpoint/2010/main" val="2831730967"/>
       </p:ext>
     </p:extLst>
   </p:cSld>
@@ -485,7 +551,7 @@
 
 <file path=ppt/slideLayouts/slideLayout11.xml><?xml version="1.0" encoding="utf-8"?>
 <p:sldLayout xmlns:a="http://schemas.openxmlformats.org/drawingml/2006/main" xmlns:r="http://schemas.openxmlformats.org/officeDocument/2006/relationships" xmlns:p="http://schemas.openxmlformats.org/presentationml/2006/main" type="vertTitleAndTx" preserve="1">
-  <p:cSld name="Vertical Title and Text">
+  <p:cSld name="Título vertical y texto">
     <p:spTree>
       <p:nvGrpSpPr>
         <p:cNvPr id="1" name=""/>
@@ -502,7 +568,13 @@
       </p:grpSpPr>
       <p:sp>
         <p:nvSpPr>
-          <p:cNvPr id="2" name="Vertical Title 1"/>
+          <p:cNvPr id="2" name="Título vertical 1">
+            <a:extLst>
+              <a:ext uri="{FF2B5EF4-FFF2-40B4-BE49-F238E27FC236}">
+                <a16:creationId xmlns:a16="http://schemas.microsoft.com/office/drawing/2014/main" id="{7EF95D7E-89A8-597C-793A-E900C1FEF0DC}"/>
+              </a:ext>
+            </a:extLst>
+          </p:cNvPr>
           <p:cNvSpPr>
             <a:spLocks noGrp="1"/>
           </p:cNvSpPr>
@@ -521,16 +593,22 @@
           <a:lstStyle/>
           <a:p>
             <a:r>
-              <a:rPr lang="en-US" smtClean="0"/>
-              <a:t>Click to edit Master title style</a:t>
+              <a:rPr lang="es-ES"/>
+              <a:t>Haga clic para modificar el estilo de título del patrón</a:t>
             </a:r>
-            <a:endParaRPr lang="en-US"/>
-          </a:p>
-        </p:txBody>
-      </p:sp>
-      <p:sp>
-        <p:nvSpPr>
-          <p:cNvPr id="3" name="Vertical Text Placeholder 2"/>
+            <a:endParaRPr lang="es-AR"/>
+          </a:p>
+        </p:txBody>
+      </p:sp>
+      <p:sp>
+        <p:nvSpPr>
+          <p:cNvPr id="3" name="Marcador de texto vertical 2">
+            <a:extLst>
+              <a:ext uri="{FF2B5EF4-FFF2-40B4-BE49-F238E27FC236}">
+                <a16:creationId xmlns:a16="http://schemas.microsoft.com/office/drawing/2014/main" id="{78F9F4EC-89BF-00F9-5DDC-2C3385F788DD}"/>
+              </a:ext>
+            </a:extLst>
+          </p:cNvPr>
           <p:cNvSpPr>
             <a:spLocks noGrp="1"/>
           </p:cNvSpPr>
@@ -550,44 +628,50 @@
           <a:p>
             <a:pPr lvl="0"/>
             <a:r>
-              <a:rPr lang="en-US" smtClean="0"/>
-              <a:t>Edit Master text styles</a:t>
+              <a:rPr lang="es-ES"/>
+              <a:t>Haga clic para modificar los estilos de texto del patrón</a:t>
             </a:r>
           </a:p>
           <a:p>
             <a:pPr lvl="1"/>
             <a:r>
-              <a:rPr lang="en-US" smtClean="0"/>
-              <a:t>Second level</a:t>
+              <a:rPr lang="es-ES"/>
+              <a:t>Segundo nivel</a:t>
             </a:r>
           </a:p>
           <a:p>
             <a:pPr lvl="2"/>
             <a:r>
-              <a:rPr lang="en-US" smtClean="0"/>
-              <a:t>Third level</a:t>
+              <a:rPr lang="es-ES"/>
+              <a:t>Tercer nivel</a:t>
             </a:r>
           </a:p>
           <a:p>
             <a:pPr lvl="3"/>
             <a:r>
-              <a:rPr lang="en-US" smtClean="0"/>
-              <a:t>Fourth level</a:t>
+              <a:rPr lang="es-ES"/>
+              <a:t>Cuarto nivel</a:t>
             </a:r>
           </a:p>
           <a:p>
             <a:pPr lvl="4"/>
             <a:r>
-              <a:rPr lang="en-US" smtClean="0"/>
-              <a:t>Fifth level</a:t>
+              <a:rPr lang="es-ES"/>
+              <a:t>Quinto nivel</a:t>
             </a:r>
-            <a:endParaRPr lang="en-US"/>
-          </a:p>
-        </p:txBody>
-      </p:sp>
-      <p:sp>
-        <p:nvSpPr>
-          <p:cNvPr id="4" name="Date Placeholder 3"/>
+            <a:endParaRPr lang="es-AR"/>
+          </a:p>
+        </p:txBody>
+      </p:sp>
+      <p:sp>
+        <p:nvSpPr>
+          <p:cNvPr id="4" name="Marcador de fecha 3">
+            <a:extLst>
+              <a:ext uri="{FF2B5EF4-FFF2-40B4-BE49-F238E27FC236}">
+                <a16:creationId xmlns:a16="http://schemas.microsoft.com/office/drawing/2014/main" id="{3686B018-A2B0-0FDE-8712-472B77D5CB20}"/>
+              </a:ext>
+            </a:extLst>
+          </p:cNvPr>
           <p:cNvSpPr>
             <a:spLocks noGrp="1"/>
           </p:cNvSpPr>
@@ -602,7 +686,7 @@
           <a:p>
             <a:fld id="{B8EC28E4-E6E7-4EAE-BF5F-E5655227AD26}" type="datetimeFigureOut">
               <a:rPr lang="en-US" smtClean="0"/>
-              <a:t>4/8/2020</a:t>
+              <a:t>3/24/2026</a:t>
             </a:fld>
             <a:endParaRPr lang="en-US"/>
           </a:p>
@@ -610,7 +694,13 @@
       </p:sp>
       <p:sp>
         <p:nvSpPr>
-          <p:cNvPr id="5" name="Footer Placeholder 4"/>
+          <p:cNvPr id="5" name="Marcador de pie de página 4">
+            <a:extLst>
+              <a:ext uri="{FF2B5EF4-FFF2-40B4-BE49-F238E27FC236}">
+                <a16:creationId xmlns:a16="http://schemas.microsoft.com/office/drawing/2014/main" id="{3753BFDA-18C0-68A3-E33B-C6AE4CCB46AD}"/>
+              </a:ext>
+            </a:extLst>
+          </p:cNvPr>
           <p:cNvSpPr>
             <a:spLocks noGrp="1"/>
           </p:cNvSpPr>
@@ -629,7 +719,13 @@
       </p:sp>
       <p:sp>
         <p:nvSpPr>
-          <p:cNvPr id="6" name="Slide Number Placeholder 5"/>
+          <p:cNvPr id="6" name="Marcador de número de diapositiva 5">
+            <a:extLst>
+              <a:ext uri="{FF2B5EF4-FFF2-40B4-BE49-F238E27FC236}">
+                <a16:creationId xmlns:a16="http://schemas.microsoft.com/office/drawing/2014/main" id="{DD232ED6-93D9-D4D1-3272-FAC92B435EBE}"/>
+              </a:ext>
+            </a:extLst>
+          </p:cNvPr>
           <p:cNvSpPr>
             <a:spLocks noGrp="1"/>
           </p:cNvSpPr>
@@ -644,7 +740,7 @@
           <a:p>
             <a:fld id="{0B0D108F-AF76-43BD-8B58-422745E650E7}" type="slidenum">
               <a:rPr lang="en-US" smtClean="0"/>
-              <a:t>‹#›</a:t>
+              <a:t>‹Nº›</a:t>
             </a:fld>
             <a:endParaRPr lang="en-US"/>
           </a:p>
@@ -653,7 +749,7 @@
     </p:spTree>
     <p:extLst>
       <p:ext uri="{BB962C8B-B14F-4D97-AF65-F5344CB8AC3E}">
-        <p14:creationId xmlns:p14="http://schemas.microsoft.com/office/powerpoint/2010/main" val="3490334991"/>
+        <p14:creationId xmlns:p14="http://schemas.microsoft.com/office/powerpoint/2010/main" val="2234098154"/>
       </p:ext>
     </p:extLst>
   </p:cSld>
@@ -665,7 +761,7 @@
 
 <file path=ppt/slideLayouts/slideLayout2.xml><?xml version="1.0" encoding="utf-8"?>
 <p:sldLayout xmlns:a="http://schemas.openxmlformats.org/drawingml/2006/main" xmlns:r="http://schemas.openxmlformats.org/officeDocument/2006/relationships" xmlns:p="http://schemas.openxmlformats.org/presentationml/2006/main" type="obj" preserve="1">
-  <p:cSld name="Title and Content">
+  <p:cSld name="Título y objetos">
     <p:spTree>
       <p:nvGrpSpPr>
         <p:cNvPr id="1" name=""/>
@@ -682,7 +778,13 @@
       </p:grpSpPr>
       <p:sp>
         <p:nvSpPr>
-          <p:cNvPr id="2" name="Title 1"/>
+          <p:cNvPr id="2" name="Título 1">
+            <a:extLst>
+              <a:ext uri="{FF2B5EF4-FFF2-40B4-BE49-F238E27FC236}">
+                <a16:creationId xmlns:a16="http://schemas.microsoft.com/office/drawing/2014/main" id="{2AACFA7A-6C8F-26B8-B0DA-120FC4F027DB}"/>
+              </a:ext>
+            </a:extLst>
+          </p:cNvPr>
           <p:cNvSpPr>
             <a:spLocks noGrp="1"/>
           </p:cNvSpPr>
@@ -696,16 +798,22 @@
           <a:lstStyle/>
           <a:p>
             <a:r>
-              <a:rPr lang="en-US" smtClean="0"/>
-              <a:t>Click to edit Master title style</a:t>
+              <a:rPr lang="es-ES"/>
+              <a:t>Haga clic para modificar el estilo de título del patrón</a:t>
             </a:r>
-            <a:endParaRPr lang="en-US"/>
-          </a:p>
-        </p:txBody>
-      </p:sp>
-      <p:sp>
-        <p:nvSpPr>
-          <p:cNvPr id="3" name="Content Placeholder 2"/>
+            <a:endParaRPr lang="es-AR"/>
+          </a:p>
+        </p:txBody>
+      </p:sp>
+      <p:sp>
+        <p:nvSpPr>
+          <p:cNvPr id="3" name="Marcador de contenido 2">
+            <a:extLst>
+              <a:ext uri="{FF2B5EF4-FFF2-40B4-BE49-F238E27FC236}">
+                <a16:creationId xmlns:a16="http://schemas.microsoft.com/office/drawing/2014/main" id="{237256E6-E731-3534-52F8-E1A0B7A23CB8}"/>
+              </a:ext>
+            </a:extLst>
+          </p:cNvPr>
           <p:cNvSpPr>
             <a:spLocks noGrp="1"/>
           </p:cNvSpPr>
@@ -720,44 +828,50 @@
           <a:p>
             <a:pPr lvl="0"/>
             <a:r>
-              <a:rPr lang="en-US" smtClean="0"/>
-              <a:t>Edit Master text styles</a:t>
+              <a:rPr lang="es-ES"/>
+              <a:t>Haga clic para modificar los estilos de texto del patrón</a:t>
             </a:r>
           </a:p>
           <a:p>
             <a:pPr lvl="1"/>
             <a:r>
-              <a:rPr lang="en-US" smtClean="0"/>
-              <a:t>Second level</a:t>
+              <a:rPr lang="es-ES"/>
+              <a:t>Segundo nivel</a:t>
             </a:r>
           </a:p>
           <a:p>
             <a:pPr lvl="2"/>
             <a:r>
-              <a:rPr lang="en-US" smtClean="0"/>
-              <a:t>Third level</a:t>
+              <a:rPr lang="es-ES"/>
+              <a:t>Tercer nivel</a:t>
             </a:r>
           </a:p>
           <a:p>
             <a:pPr lvl="3"/>
             <a:r>
-              <a:rPr lang="en-US" smtClean="0"/>
-              <a:t>Fourth level</a:t>
+              <a:rPr lang="es-ES"/>
+              <a:t>Cuarto nivel</a:t>
             </a:r>
           </a:p>
           <a:p>
             <a:pPr lvl="4"/>
             <a:r>
-              <a:rPr lang="en-US" smtClean="0"/>
-              <a:t>Fifth level</a:t>
+              <a:rPr lang="es-ES"/>
+              <a:t>Quinto nivel</a:t>
             </a:r>
-            <a:endParaRPr lang="en-US"/>
-          </a:p>
-        </p:txBody>
-      </p:sp>
-      <p:sp>
-        <p:nvSpPr>
-          <p:cNvPr id="4" name="Date Placeholder 3"/>
+            <a:endParaRPr lang="es-AR"/>
+          </a:p>
+        </p:txBody>
+      </p:sp>
+      <p:sp>
+        <p:nvSpPr>
+          <p:cNvPr id="4" name="Marcador de fecha 3">
+            <a:extLst>
+              <a:ext uri="{FF2B5EF4-FFF2-40B4-BE49-F238E27FC236}">
+                <a16:creationId xmlns:a16="http://schemas.microsoft.com/office/drawing/2014/main" id="{9174CA77-DCAC-B471-7558-289F74446257}"/>
+              </a:ext>
+            </a:extLst>
+          </p:cNvPr>
           <p:cNvSpPr>
             <a:spLocks noGrp="1"/>
           </p:cNvSpPr>
@@ -772,7 +886,7 @@
           <a:p>
             <a:fld id="{B8EC28E4-E6E7-4EAE-BF5F-E5655227AD26}" type="datetimeFigureOut">
               <a:rPr lang="en-US" smtClean="0"/>
-              <a:t>4/8/2020</a:t>
+              <a:t>3/24/2026</a:t>
             </a:fld>
             <a:endParaRPr lang="en-US"/>
           </a:p>
@@ -780,7 +894,13 @@
       </p:sp>
       <p:sp>
         <p:nvSpPr>
-          <p:cNvPr id="5" name="Footer Placeholder 4"/>
+          <p:cNvPr id="5" name="Marcador de pie de página 4">
+            <a:extLst>
+              <a:ext uri="{FF2B5EF4-FFF2-40B4-BE49-F238E27FC236}">
+                <a16:creationId xmlns:a16="http://schemas.microsoft.com/office/drawing/2014/main" id="{712A5599-17AD-C6A5-B04A-E4442963BDB6}"/>
+              </a:ext>
+            </a:extLst>
+          </p:cNvPr>
           <p:cNvSpPr>
             <a:spLocks noGrp="1"/>
           </p:cNvSpPr>
@@ -799,7 +919,13 @@
       </p:sp>
       <p:sp>
         <p:nvSpPr>
-          <p:cNvPr id="6" name="Slide Number Placeholder 5"/>
+          <p:cNvPr id="6" name="Marcador de número de diapositiva 5">
+            <a:extLst>
+              <a:ext uri="{FF2B5EF4-FFF2-40B4-BE49-F238E27FC236}">
+                <a16:creationId xmlns:a16="http://schemas.microsoft.com/office/drawing/2014/main" id="{1BB6E7EE-B688-B552-9513-F5D7E1C5B78F}"/>
+              </a:ext>
+            </a:extLst>
+          </p:cNvPr>
           <p:cNvSpPr>
             <a:spLocks noGrp="1"/>
           </p:cNvSpPr>
@@ -814,7 +940,7 @@
           <a:p>
             <a:fld id="{0B0D108F-AF76-43BD-8B58-422745E650E7}" type="slidenum">
               <a:rPr lang="en-US" smtClean="0"/>
-              <a:t>‹#›</a:t>
+              <a:t>‹Nº›</a:t>
             </a:fld>
             <a:endParaRPr lang="en-US"/>
           </a:p>
@@ -823,7 +949,7 @@
     </p:spTree>
     <p:extLst>
       <p:ext uri="{BB962C8B-B14F-4D97-AF65-F5344CB8AC3E}">
-        <p14:creationId xmlns:p14="http://schemas.microsoft.com/office/powerpoint/2010/main" val="1463261407"/>
+        <p14:creationId xmlns:p14="http://schemas.microsoft.com/office/powerpoint/2010/main" val="1690269630"/>
       </p:ext>
     </p:extLst>
   </p:cSld>
@@ -835,7 +961,7 @@
 
 <file path=ppt/slideLayouts/slideLayout3.xml><?xml version="1.0" encoding="utf-8"?>
 <p:sldLayout xmlns:a="http://schemas.openxmlformats.org/drawingml/2006/main" xmlns:r="http://schemas.openxmlformats.org/officeDocument/2006/relationships" xmlns:p="http://schemas.openxmlformats.org/presentationml/2006/main" type="secHead" preserve="1">
-  <p:cSld name="Section Header">
+  <p:cSld name="Encabezado de sección">
     <p:spTree>
       <p:nvGrpSpPr>
         <p:cNvPr id="1" name=""/>
@@ -852,7 +978,13 @@
       </p:grpSpPr>
       <p:sp>
         <p:nvSpPr>
-          <p:cNvPr id="2" name="Title 1"/>
+          <p:cNvPr id="2" name="Título 1">
+            <a:extLst>
+              <a:ext uri="{FF2B5EF4-FFF2-40B4-BE49-F238E27FC236}">
+                <a16:creationId xmlns:a16="http://schemas.microsoft.com/office/drawing/2014/main" id="{4FA927AF-CA65-B128-5D4E-7E81D5E0B93B}"/>
+              </a:ext>
+            </a:extLst>
+          </p:cNvPr>
           <p:cNvSpPr>
             <a:spLocks noGrp="1"/>
           </p:cNvSpPr>
@@ -875,16 +1007,22 @@
           </a:lstStyle>
           <a:p>
             <a:r>
-              <a:rPr lang="en-US" smtClean="0"/>
-              <a:t>Click to edit Master title style</a:t>
+              <a:rPr lang="es-ES"/>
+              <a:t>Haga clic para modificar el estilo de título del patrón</a:t>
             </a:r>
-            <a:endParaRPr lang="en-US"/>
-          </a:p>
-        </p:txBody>
-      </p:sp>
-      <p:sp>
-        <p:nvSpPr>
-          <p:cNvPr id="3" name="Text Placeholder 2"/>
+            <a:endParaRPr lang="es-AR"/>
+          </a:p>
+        </p:txBody>
+      </p:sp>
+      <p:sp>
+        <p:nvSpPr>
+          <p:cNvPr id="3" name="Marcador de texto 2">
+            <a:extLst>
+              <a:ext uri="{FF2B5EF4-FFF2-40B4-BE49-F238E27FC236}">
+                <a16:creationId xmlns:a16="http://schemas.microsoft.com/office/drawing/2014/main" id="{0E244F09-ACE4-7D4D-DDF1-ACE051086133}"/>
+              </a:ext>
+            </a:extLst>
+          </p:cNvPr>
           <p:cNvSpPr>
             <a:spLocks noGrp="1"/>
           </p:cNvSpPr>
@@ -906,7 +1044,7 @@
               <a:defRPr sz="2400">
                 <a:solidFill>
                   <a:schemeClr val="tx1">
-                    <a:tint val="75000"/>
+                    <a:tint val="82000"/>
                   </a:schemeClr>
                 </a:solidFill>
               </a:defRPr>
@@ -916,7 +1054,7 @@
               <a:defRPr sz="2000">
                 <a:solidFill>
                   <a:schemeClr val="tx1">
-                    <a:tint val="75000"/>
+                    <a:tint val="82000"/>
                   </a:schemeClr>
                 </a:solidFill>
               </a:defRPr>
@@ -926,7 +1064,7 @@
               <a:defRPr sz="1800">
                 <a:solidFill>
                   <a:schemeClr val="tx1">
-                    <a:tint val="75000"/>
+                    <a:tint val="82000"/>
                   </a:schemeClr>
                 </a:solidFill>
               </a:defRPr>
@@ -936,7 +1074,7 @@
               <a:defRPr sz="1600">
                 <a:solidFill>
                   <a:schemeClr val="tx1">
-                    <a:tint val="75000"/>
+                    <a:tint val="82000"/>
                   </a:schemeClr>
                 </a:solidFill>
               </a:defRPr>
@@ -946,7 +1084,7 @@
               <a:defRPr sz="1600">
                 <a:solidFill>
                   <a:schemeClr val="tx1">
-                    <a:tint val="75000"/>
+                    <a:tint val="82000"/>
                   </a:schemeClr>
                 </a:solidFill>
               </a:defRPr>
@@ -956,7 +1094,7 @@
               <a:defRPr sz="1600">
                 <a:solidFill>
                   <a:schemeClr val="tx1">
-                    <a:tint val="75000"/>
+                    <a:tint val="82000"/>
                   </a:schemeClr>
                 </a:solidFill>
               </a:defRPr>
@@ -966,7 +1104,7 @@
               <a:defRPr sz="1600">
                 <a:solidFill>
                   <a:schemeClr val="tx1">
-                    <a:tint val="75000"/>
+                    <a:tint val="82000"/>
                   </a:schemeClr>
                 </a:solidFill>
               </a:defRPr>
@@ -976,7 +1114,7 @@
               <a:defRPr sz="1600">
                 <a:solidFill>
                   <a:schemeClr val="tx1">
-                    <a:tint val="75000"/>
+                    <a:tint val="82000"/>
                   </a:schemeClr>
                 </a:solidFill>
               </a:defRPr>
@@ -986,7 +1124,7 @@
               <a:defRPr sz="1600">
                 <a:solidFill>
                   <a:schemeClr val="tx1">
-                    <a:tint val="75000"/>
+                    <a:tint val="82000"/>
                   </a:schemeClr>
                 </a:solidFill>
               </a:defRPr>
@@ -995,15 +1133,21 @@
           <a:p>
             <a:pPr lvl="0"/>
             <a:r>
-              <a:rPr lang="en-US" smtClean="0"/>
-              <a:t>Edit Master text styles</a:t>
+              <a:rPr lang="es-ES"/>
+              <a:t>Haga clic para modificar los estilos de texto del patrón</a:t>
             </a:r>
           </a:p>
         </p:txBody>
       </p:sp>
       <p:sp>
         <p:nvSpPr>
-          <p:cNvPr id="4" name="Date Placeholder 3"/>
+          <p:cNvPr id="4" name="Marcador de fecha 3">
+            <a:extLst>
+              <a:ext uri="{FF2B5EF4-FFF2-40B4-BE49-F238E27FC236}">
+                <a16:creationId xmlns:a16="http://schemas.microsoft.com/office/drawing/2014/main" id="{1C19D615-A45A-52A1-89B7-942727FF75F4}"/>
+              </a:ext>
+            </a:extLst>
+          </p:cNvPr>
           <p:cNvSpPr>
             <a:spLocks noGrp="1"/>
           </p:cNvSpPr>
@@ -1018,7 +1162,7 @@
           <a:p>
             <a:fld id="{B8EC28E4-E6E7-4EAE-BF5F-E5655227AD26}" type="datetimeFigureOut">
               <a:rPr lang="en-US" smtClean="0"/>
-              <a:t>4/8/2020</a:t>
+              <a:t>3/24/2026</a:t>
             </a:fld>
             <a:endParaRPr lang="en-US"/>
           </a:p>
@@ -1026,7 +1170,13 @@
       </p:sp>
       <p:sp>
         <p:nvSpPr>
-          <p:cNvPr id="5" name="Footer Placeholder 4"/>
+          <p:cNvPr id="5" name="Marcador de pie de página 4">
+            <a:extLst>
+              <a:ext uri="{FF2B5EF4-FFF2-40B4-BE49-F238E27FC236}">
+                <a16:creationId xmlns:a16="http://schemas.microsoft.com/office/drawing/2014/main" id="{D98E3F6E-D20C-CF55-7590-3C53A1A6CC54}"/>
+              </a:ext>
+            </a:extLst>
+          </p:cNvPr>
           <p:cNvSpPr>
             <a:spLocks noGrp="1"/>
           </p:cNvSpPr>
@@ -1045,7 +1195,13 @@
       </p:sp>
       <p:sp>
         <p:nvSpPr>
-          <p:cNvPr id="6" name="Slide Number Placeholder 5"/>
+          <p:cNvPr id="6" name="Marcador de número de diapositiva 5">
+            <a:extLst>
+              <a:ext uri="{FF2B5EF4-FFF2-40B4-BE49-F238E27FC236}">
+                <a16:creationId xmlns:a16="http://schemas.microsoft.com/office/drawing/2014/main" id="{F3D4CC1D-791D-03EC-5716-4BF611C4F259}"/>
+              </a:ext>
+            </a:extLst>
+          </p:cNvPr>
           <p:cNvSpPr>
             <a:spLocks noGrp="1"/>
           </p:cNvSpPr>
@@ -1060,7 +1216,7 @@
           <a:p>
             <a:fld id="{0B0D108F-AF76-43BD-8B58-422745E650E7}" type="slidenum">
               <a:rPr lang="en-US" smtClean="0"/>
-              <a:t>‹#›</a:t>
+              <a:t>‹Nº›</a:t>
             </a:fld>
             <a:endParaRPr lang="en-US"/>
           </a:p>
@@ -1069,7 +1225,7 @@
     </p:spTree>
     <p:extLst>
       <p:ext uri="{BB962C8B-B14F-4D97-AF65-F5344CB8AC3E}">
-        <p14:creationId xmlns:p14="http://schemas.microsoft.com/office/powerpoint/2010/main" val="636933761"/>
+        <p14:creationId xmlns:p14="http://schemas.microsoft.com/office/powerpoint/2010/main" val="1239061878"/>
       </p:ext>
     </p:extLst>
   </p:cSld>
@@ -1081,7 +1237,7 @@
 
 <file path=ppt/slideLayouts/slideLayout4.xml><?xml version="1.0" encoding="utf-8"?>
 <p:sldLayout xmlns:a="http://schemas.openxmlformats.org/drawingml/2006/main" xmlns:r="http://schemas.openxmlformats.org/officeDocument/2006/relationships" xmlns:p="http://schemas.openxmlformats.org/presentationml/2006/main" type="twoObj" preserve="1">
-  <p:cSld name="Two Content">
+  <p:cSld name="Dos objetos">
     <p:spTree>
       <p:nvGrpSpPr>
         <p:cNvPr id="1" name=""/>
@@ -1098,7 +1254,13 @@
       </p:grpSpPr>
       <p:sp>
         <p:nvSpPr>
-          <p:cNvPr id="2" name="Title 1"/>
+          <p:cNvPr id="2" name="Título 1">
+            <a:extLst>
+              <a:ext uri="{FF2B5EF4-FFF2-40B4-BE49-F238E27FC236}">
+                <a16:creationId xmlns:a16="http://schemas.microsoft.com/office/drawing/2014/main" id="{A323D636-C867-EFA4-8C00-E8670F0A1AE9}"/>
+              </a:ext>
+            </a:extLst>
+          </p:cNvPr>
           <p:cNvSpPr>
             <a:spLocks noGrp="1"/>
           </p:cNvSpPr>
@@ -1112,16 +1274,22 @@
           <a:lstStyle/>
           <a:p>
             <a:r>
-              <a:rPr lang="en-US" smtClean="0"/>
-              <a:t>Click to edit Master title style</a:t>
+              <a:rPr lang="es-ES"/>
+              <a:t>Haga clic para modificar el estilo de título del patrón</a:t>
             </a:r>
-            <a:endParaRPr lang="en-US"/>
-          </a:p>
-        </p:txBody>
-      </p:sp>
-      <p:sp>
-        <p:nvSpPr>
-          <p:cNvPr id="3" name="Content Placeholder 2"/>
+            <a:endParaRPr lang="es-AR"/>
+          </a:p>
+        </p:txBody>
+      </p:sp>
+      <p:sp>
+        <p:nvSpPr>
+          <p:cNvPr id="3" name="Marcador de contenido 2">
+            <a:extLst>
+              <a:ext uri="{FF2B5EF4-FFF2-40B4-BE49-F238E27FC236}">
+                <a16:creationId xmlns:a16="http://schemas.microsoft.com/office/drawing/2014/main" id="{1A52B5E1-67CD-F702-9F11-EB2706BFA32C}"/>
+              </a:ext>
+            </a:extLst>
+          </p:cNvPr>
           <p:cNvSpPr>
             <a:spLocks noGrp="1"/>
           </p:cNvSpPr>
@@ -1141,44 +1309,50 @@
           <a:p>
             <a:pPr lvl="0"/>
             <a:r>
-              <a:rPr lang="en-US" smtClean="0"/>
-              <a:t>Edit Master text styles</a:t>
+              <a:rPr lang="es-ES"/>
+              <a:t>Haga clic para modificar los estilos de texto del patrón</a:t>
             </a:r>
           </a:p>
           <a:p>
             <a:pPr lvl="1"/>
             <a:r>
-              <a:rPr lang="en-US" smtClean="0"/>
-              <a:t>Second level</a:t>
+              <a:rPr lang="es-ES"/>
+              <a:t>Segundo nivel</a:t>
             </a:r>
           </a:p>
           <a:p>
             <a:pPr lvl="2"/>
             <a:r>
-              <a:rPr lang="en-US" smtClean="0"/>
-              <a:t>Third level</a:t>
+              <a:rPr lang="es-ES"/>
+              <a:t>Tercer nivel</a:t>
             </a:r>
           </a:p>
           <a:p>
             <a:pPr lvl="3"/>
             <a:r>
-              <a:rPr lang="en-US" smtClean="0"/>
-              <a:t>Fourth level</a:t>
+              <a:rPr lang="es-ES"/>
+              <a:t>Cuarto nivel</a:t>
             </a:r>
           </a:p>
           <a:p>
             <a:pPr lvl="4"/>
             <a:r>
-              <a:rPr lang="en-US" smtClean="0"/>
-              <a:t>Fifth level</a:t>
+              <a:rPr lang="es-ES"/>
+              <a:t>Quinto nivel</a:t>
             </a:r>
-            <a:endParaRPr lang="en-US"/>
-          </a:p>
-        </p:txBody>
-      </p:sp>
-      <p:sp>
-        <p:nvSpPr>
-          <p:cNvPr id="4" name="Content Placeholder 3"/>
+            <a:endParaRPr lang="es-AR"/>
+          </a:p>
+        </p:txBody>
+      </p:sp>
+      <p:sp>
+        <p:nvSpPr>
+          <p:cNvPr id="4" name="Marcador de contenido 3">
+            <a:extLst>
+              <a:ext uri="{FF2B5EF4-FFF2-40B4-BE49-F238E27FC236}">
+                <a16:creationId xmlns:a16="http://schemas.microsoft.com/office/drawing/2014/main" id="{F137CEE5-67D3-E21C-A22C-5305ED6AA4FC}"/>
+              </a:ext>
+            </a:extLst>
+          </p:cNvPr>
           <p:cNvSpPr>
             <a:spLocks noGrp="1"/>
           </p:cNvSpPr>
@@ -1198,44 +1372,50 @@
           <a:p>
             <a:pPr lvl="0"/>
             <a:r>
-              <a:rPr lang="en-US" smtClean="0"/>
-              <a:t>Edit Master text styles</a:t>
+              <a:rPr lang="es-ES"/>
+              <a:t>Haga clic para modificar los estilos de texto del patrón</a:t>
             </a:r>
           </a:p>
           <a:p>
             <a:pPr lvl="1"/>
             <a:r>
-              <a:rPr lang="en-US" smtClean="0"/>
-              <a:t>Second level</a:t>
+              <a:rPr lang="es-ES"/>
+              <a:t>Segundo nivel</a:t>
             </a:r>
           </a:p>
           <a:p>
             <a:pPr lvl="2"/>
             <a:r>
-              <a:rPr lang="en-US" smtClean="0"/>
-              <a:t>Third level</a:t>
+              <a:rPr lang="es-ES"/>
+              <a:t>Tercer nivel</a:t>
             </a:r>
           </a:p>
           <a:p>
             <a:pPr lvl="3"/>
             <a:r>
-              <a:rPr lang="en-US" smtClean="0"/>
-              <a:t>Fourth level</a:t>
+              <a:rPr lang="es-ES"/>
+              <a:t>Cuarto nivel</a:t>
             </a:r>
           </a:p>
           <a:p>
             <a:pPr lvl="4"/>
             <a:r>
-              <a:rPr lang="en-US" smtClean="0"/>
-              <a:t>Fifth level</a:t>
+              <a:rPr lang="es-ES"/>
+              <a:t>Quinto nivel</a:t>
             </a:r>
-            <a:endParaRPr lang="en-US"/>
-          </a:p>
-        </p:txBody>
-      </p:sp>
-      <p:sp>
-        <p:nvSpPr>
-          <p:cNvPr id="5" name="Date Placeholder 4"/>
+            <a:endParaRPr lang="es-AR"/>
+          </a:p>
+        </p:txBody>
+      </p:sp>
+      <p:sp>
+        <p:nvSpPr>
+          <p:cNvPr id="5" name="Marcador de fecha 4">
+            <a:extLst>
+              <a:ext uri="{FF2B5EF4-FFF2-40B4-BE49-F238E27FC236}">
+                <a16:creationId xmlns:a16="http://schemas.microsoft.com/office/drawing/2014/main" id="{D333D57B-6B23-0C6E-8FCA-79B93E1E48A6}"/>
+              </a:ext>
+            </a:extLst>
+          </p:cNvPr>
           <p:cNvSpPr>
             <a:spLocks noGrp="1"/>
           </p:cNvSpPr>
@@ -1250,7 +1430,7 @@
           <a:p>
             <a:fld id="{B8EC28E4-E6E7-4EAE-BF5F-E5655227AD26}" type="datetimeFigureOut">
               <a:rPr lang="en-US" smtClean="0"/>
-              <a:t>4/8/2020</a:t>
+              <a:t>3/24/2026</a:t>
             </a:fld>
             <a:endParaRPr lang="en-US"/>
           </a:p>
@@ -1258,7 +1438,13 @@
       </p:sp>
       <p:sp>
         <p:nvSpPr>
-          <p:cNvPr id="6" name="Footer Placeholder 5"/>
+          <p:cNvPr id="6" name="Marcador de pie de página 5">
+            <a:extLst>
+              <a:ext uri="{FF2B5EF4-FFF2-40B4-BE49-F238E27FC236}">
+                <a16:creationId xmlns:a16="http://schemas.microsoft.com/office/drawing/2014/main" id="{0075F986-E714-6BB2-F504-461828BC8B4D}"/>
+              </a:ext>
+            </a:extLst>
+          </p:cNvPr>
           <p:cNvSpPr>
             <a:spLocks noGrp="1"/>
           </p:cNvSpPr>
@@ -1277,7 +1463,13 @@
       </p:sp>
       <p:sp>
         <p:nvSpPr>
-          <p:cNvPr id="7" name="Slide Number Placeholder 6"/>
+          <p:cNvPr id="7" name="Marcador de número de diapositiva 6">
+            <a:extLst>
+              <a:ext uri="{FF2B5EF4-FFF2-40B4-BE49-F238E27FC236}">
+                <a16:creationId xmlns:a16="http://schemas.microsoft.com/office/drawing/2014/main" id="{3FF57DD3-E64D-91FA-5AE2-093AEE428DBA}"/>
+              </a:ext>
+            </a:extLst>
+          </p:cNvPr>
           <p:cNvSpPr>
             <a:spLocks noGrp="1"/>
           </p:cNvSpPr>
@@ -1292,7 +1484,7 @@
           <a:p>
             <a:fld id="{0B0D108F-AF76-43BD-8B58-422745E650E7}" type="slidenum">
               <a:rPr lang="en-US" smtClean="0"/>
-              <a:t>‹#›</a:t>
+              <a:t>‹Nº›</a:t>
             </a:fld>
             <a:endParaRPr lang="en-US"/>
           </a:p>
@@ -1301,7 +1493,7 @@
     </p:spTree>
     <p:extLst>
       <p:ext uri="{BB962C8B-B14F-4D97-AF65-F5344CB8AC3E}">
-        <p14:creationId xmlns:p14="http://schemas.microsoft.com/office/powerpoint/2010/main" val="1135365649"/>
+        <p14:creationId xmlns:p14="http://schemas.microsoft.com/office/powerpoint/2010/main" val="1473162626"/>
       </p:ext>
     </p:extLst>
   </p:cSld>
@@ -1313,7 +1505,7 @@
 
 <file path=ppt/slideLayouts/slideLayout5.xml><?xml version="1.0" encoding="utf-8"?>
 <p:sldLayout xmlns:a="http://schemas.openxmlformats.org/drawingml/2006/main" xmlns:r="http://schemas.openxmlformats.org/officeDocument/2006/relationships" xmlns:p="http://schemas.openxmlformats.org/presentationml/2006/main" type="twoTxTwoObj" preserve="1">
-  <p:cSld name="Comparison">
+  <p:cSld name="Comparación">
     <p:spTree>
       <p:nvGrpSpPr>
         <p:cNvPr id="1" name=""/>
@@ -1330,7 +1522,13 @@
       </p:grpSpPr>
       <p:sp>
         <p:nvSpPr>
-          <p:cNvPr id="2" name="Title 1"/>
+          <p:cNvPr id="2" name="Título 1">
+            <a:extLst>
+              <a:ext uri="{FF2B5EF4-FFF2-40B4-BE49-F238E27FC236}">
+                <a16:creationId xmlns:a16="http://schemas.microsoft.com/office/drawing/2014/main" id="{5BB6C8FB-1B78-35EB-B93D-2DB1F57547C2}"/>
+              </a:ext>
+            </a:extLst>
+          </p:cNvPr>
           <p:cNvSpPr>
             <a:spLocks noGrp="1"/>
           </p:cNvSpPr>
@@ -1349,16 +1547,22 @@
           <a:lstStyle/>
           <a:p>
             <a:r>
-              <a:rPr lang="en-US" smtClean="0"/>
-              <a:t>Click to edit Master title style</a:t>
+              <a:rPr lang="es-ES"/>
+              <a:t>Haga clic para modificar el estilo de título del patrón</a:t>
             </a:r>
-            <a:endParaRPr lang="en-US"/>
-          </a:p>
-        </p:txBody>
-      </p:sp>
-      <p:sp>
-        <p:nvSpPr>
-          <p:cNvPr id="3" name="Text Placeholder 2"/>
+            <a:endParaRPr lang="es-AR"/>
+          </a:p>
+        </p:txBody>
+      </p:sp>
+      <p:sp>
+        <p:nvSpPr>
+          <p:cNvPr id="3" name="Marcador de texto 2">
+            <a:extLst>
+              <a:ext uri="{FF2B5EF4-FFF2-40B4-BE49-F238E27FC236}">
+                <a16:creationId xmlns:a16="http://schemas.microsoft.com/office/drawing/2014/main" id="{5F7AE503-4E6A-4C3F-9C24-8BAAEAF677B8}"/>
+              </a:ext>
+            </a:extLst>
+          </p:cNvPr>
           <p:cNvSpPr>
             <a:spLocks noGrp="1"/>
           </p:cNvSpPr>
@@ -1415,15 +1619,21 @@
           <a:p>
             <a:pPr lvl="0"/>
             <a:r>
-              <a:rPr lang="en-US" smtClean="0"/>
-              <a:t>Edit Master text styles</a:t>
+              <a:rPr lang="es-ES"/>
+              <a:t>Haga clic para modificar los estilos de texto del patrón</a:t>
             </a:r>
           </a:p>
         </p:txBody>
       </p:sp>
       <p:sp>
         <p:nvSpPr>
-          <p:cNvPr id="4" name="Content Placeholder 3"/>
+          <p:cNvPr id="4" name="Marcador de contenido 3">
+            <a:extLst>
+              <a:ext uri="{FF2B5EF4-FFF2-40B4-BE49-F238E27FC236}">
+                <a16:creationId xmlns:a16="http://schemas.microsoft.com/office/drawing/2014/main" id="{782058AD-D90C-34CC-C411-746780643111}"/>
+              </a:ext>
+            </a:extLst>
+          </p:cNvPr>
           <p:cNvSpPr>
             <a:spLocks noGrp="1"/>
           </p:cNvSpPr>
@@ -1443,44 +1653,50 @@
           <a:p>
             <a:pPr lvl="0"/>
             <a:r>
-              <a:rPr lang="en-US" smtClean="0"/>
-              <a:t>Edit Master text styles</a:t>
+              <a:rPr lang="es-ES"/>
+              <a:t>Haga clic para modificar los estilos de texto del patrón</a:t>
             </a:r>
           </a:p>
           <a:p>
             <a:pPr lvl="1"/>
             <a:r>
-              <a:rPr lang="en-US" smtClean="0"/>
-              <a:t>Second level</a:t>
+              <a:rPr lang="es-ES"/>
+              <a:t>Segundo nivel</a:t>
             </a:r>
           </a:p>
           <a:p>
             <a:pPr lvl="2"/>
             <a:r>
-              <a:rPr lang="en-US" smtClean="0"/>
-              <a:t>Third level</a:t>
+              <a:rPr lang="es-ES"/>
+              <a:t>Tercer nivel</a:t>
             </a:r>
           </a:p>
           <a:p>
             <a:pPr lvl="3"/>
             <a:r>
-              <a:rPr lang="en-US" smtClean="0"/>
-              <a:t>Fourth level</a:t>
+              <a:rPr lang="es-ES"/>
+              <a:t>Cuarto nivel</a:t>
             </a:r>
           </a:p>
           <a:p>
             <a:pPr lvl="4"/>
             <a:r>
-              <a:rPr lang="en-US" smtClean="0"/>
-              <a:t>Fifth level</a:t>
+              <a:rPr lang="es-ES"/>
+              <a:t>Quinto nivel</a:t>
             </a:r>
-            <a:endParaRPr lang="en-US"/>
-          </a:p>
-        </p:txBody>
-      </p:sp>
-      <p:sp>
-        <p:nvSpPr>
-          <p:cNvPr id="5" name="Text Placeholder 4"/>
+            <a:endParaRPr lang="es-AR"/>
+          </a:p>
+        </p:txBody>
+      </p:sp>
+      <p:sp>
+        <p:nvSpPr>
+          <p:cNvPr id="5" name="Marcador de texto 4">
+            <a:extLst>
+              <a:ext uri="{FF2B5EF4-FFF2-40B4-BE49-F238E27FC236}">
+                <a16:creationId xmlns:a16="http://schemas.microsoft.com/office/drawing/2014/main" id="{89F2ADDC-8DE2-6720-55F8-9B3DB3C5568F}"/>
+              </a:ext>
+            </a:extLst>
+          </p:cNvPr>
           <p:cNvSpPr>
             <a:spLocks noGrp="1"/>
           </p:cNvSpPr>
@@ -1537,15 +1753,21 @@
           <a:p>
             <a:pPr lvl="0"/>
             <a:r>
-              <a:rPr lang="en-US" smtClean="0"/>
-              <a:t>Edit Master text styles</a:t>
+              <a:rPr lang="es-ES"/>
+              <a:t>Haga clic para modificar los estilos de texto del patrón</a:t>
             </a:r>
           </a:p>
         </p:txBody>
       </p:sp>
       <p:sp>
         <p:nvSpPr>
-          <p:cNvPr id="6" name="Content Placeholder 5"/>
+          <p:cNvPr id="6" name="Marcador de contenido 5">
+            <a:extLst>
+              <a:ext uri="{FF2B5EF4-FFF2-40B4-BE49-F238E27FC236}">
+                <a16:creationId xmlns:a16="http://schemas.microsoft.com/office/drawing/2014/main" id="{AB40B1F1-BFDF-4D3D-1E10-0ACE600D578D}"/>
+              </a:ext>
+            </a:extLst>
+          </p:cNvPr>
           <p:cNvSpPr>
             <a:spLocks noGrp="1"/>
           </p:cNvSpPr>
@@ -1565,44 +1787,50 @@
           <a:p>
             <a:pPr lvl="0"/>
             <a:r>
-              <a:rPr lang="en-US" smtClean="0"/>
-              <a:t>Edit Master text styles</a:t>
+              <a:rPr lang="es-ES"/>
+              <a:t>Haga clic para modificar los estilos de texto del patrón</a:t>
             </a:r>
           </a:p>
           <a:p>
             <a:pPr lvl="1"/>
             <a:r>
-              <a:rPr lang="en-US" smtClean="0"/>
-              <a:t>Second level</a:t>
+              <a:rPr lang="es-ES"/>
+              <a:t>Segundo nivel</a:t>
             </a:r>
           </a:p>
           <a:p>
             <a:pPr lvl="2"/>
             <a:r>
-              <a:rPr lang="en-US" smtClean="0"/>
-              <a:t>Third level</a:t>
+              <a:rPr lang="es-ES"/>
+              <a:t>Tercer nivel</a:t>
             </a:r>
           </a:p>
           <a:p>
             <a:pPr lvl="3"/>
             <a:r>
-              <a:rPr lang="en-US" smtClean="0"/>
-              <a:t>Fourth level</a:t>
+              <a:rPr lang="es-ES"/>
+              <a:t>Cuarto nivel</a:t>
             </a:r>
           </a:p>
           <a:p>
             <a:pPr lvl="4"/>
             <a:r>
-              <a:rPr lang="en-US" smtClean="0"/>
-              <a:t>Fifth level</a:t>
+              <a:rPr lang="es-ES"/>
+              <a:t>Quinto nivel</a:t>
             </a:r>
-            <a:endParaRPr lang="en-US"/>
-          </a:p>
-        </p:txBody>
-      </p:sp>
-      <p:sp>
-        <p:nvSpPr>
-          <p:cNvPr id="7" name="Date Placeholder 6"/>
+            <a:endParaRPr lang="es-AR"/>
+          </a:p>
+        </p:txBody>
+      </p:sp>
+      <p:sp>
+        <p:nvSpPr>
+          <p:cNvPr id="7" name="Marcador de fecha 6">
+            <a:extLst>
+              <a:ext uri="{FF2B5EF4-FFF2-40B4-BE49-F238E27FC236}">
+                <a16:creationId xmlns:a16="http://schemas.microsoft.com/office/drawing/2014/main" id="{31B3EFB1-3E0A-51EE-CC62-D6DBABBAD2BC}"/>
+              </a:ext>
+            </a:extLst>
+          </p:cNvPr>
           <p:cNvSpPr>
             <a:spLocks noGrp="1"/>
           </p:cNvSpPr>
@@ -1617,7 +1845,7 @@
           <a:p>
             <a:fld id="{B8EC28E4-E6E7-4EAE-BF5F-E5655227AD26}" type="datetimeFigureOut">
               <a:rPr lang="en-US" smtClean="0"/>
-              <a:t>4/8/2020</a:t>
+              <a:t>3/24/2026</a:t>
             </a:fld>
             <a:endParaRPr lang="en-US"/>
           </a:p>
@@ -1625,7 +1853,13 @@
       </p:sp>
       <p:sp>
         <p:nvSpPr>
-          <p:cNvPr id="8" name="Footer Placeholder 7"/>
+          <p:cNvPr id="8" name="Marcador de pie de página 7">
+            <a:extLst>
+              <a:ext uri="{FF2B5EF4-FFF2-40B4-BE49-F238E27FC236}">
+                <a16:creationId xmlns:a16="http://schemas.microsoft.com/office/drawing/2014/main" id="{76215564-56B0-549B-CFF3-06AAB6A67EFE}"/>
+              </a:ext>
+            </a:extLst>
+          </p:cNvPr>
           <p:cNvSpPr>
             <a:spLocks noGrp="1"/>
           </p:cNvSpPr>
@@ -1644,7 +1878,13 @@
       </p:sp>
       <p:sp>
         <p:nvSpPr>
-          <p:cNvPr id="9" name="Slide Number Placeholder 8"/>
+          <p:cNvPr id="9" name="Marcador de número de diapositiva 8">
+            <a:extLst>
+              <a:ext uri="{FF2B5EF4-FFF2-40B4-BE49-F238E27FC236}">
+                <a16:creationId xmlns:a16="http://schemas.microsoft.com/office/drawing/2014/main" id="{97A66A39-B143-5171-2BA1-DE681EA2479A}"/>
+              </a:ext>
+            </a:extLst>
+          </p:cNvPr>
           <p:cNvSpPr>
             <a:spLocks noGrp="1"/>
           </p:cNvSpPr>
@@ -1659,7 +1899,7 @@
           <a:p>
             <a:fld id="{0B0D108F-AF76-43BD-8B58-422745E650E7}" type="slidenum">
               <a:rPr lang="en-US" smtClean="0"/>
-              <a:t>‹#›</a:t>
+              <a:t>‹Nº›</a:t>
             </a:fld>
             <a:endParaRPr lang="en-US"/>
           </a:p>
@@ -1668,7 +1908,7 @@
     </p:spTree>
     <p:extLst>
       <p:ext uri="{BB962C8B-B14F-4D97-AF65-F5344CB8AC3E}">
-        <p14:creationId xmlns:p14="http://schemas.microsoft.com/office/powerpoint/2010/main" val="1743860073"/>
+        <p14:creationId xmlns:p14="http://schemas.microsoft.com/office/powerpoint/2010/main" val="1491043564"/>
       </p:ext>
     </p:extLst>
   </p:cSld>
@@ -1680,7 +1920,7 @@
 
 <file path=ppt/slideLayouts/slideLayout6.xml><?xml version="1.0" encoding="utf-8"?>
 <p:sldLayout xmlns:a="http://schemas.openxmlformats.org/drawingml/2006/main" xmlns:r="http://schemas.openxmlformats.org/officeDocument/2006/relationships" xmlns:p="http://schemas.openxmlformats.org/presentationml/2006/main" type="titleOnly" preserve="1">
-  <p:cSld name="Title Only">
+  <p:cSld name="Solo el título">
     <p:spTree>
       <p:nvGrpSpPr>
         <p:cNvPr id="1" name=""/>
@@ -1697,7 +1937,13 @@
       </p:grpSpPr>
       <p:sp>
         <p:nvSpPr>
-          <p:cNvPr id="2" name="Title 1"/>
+          <p:cNvPr id="2" name="Título 1">
+            <a:extLst>
+              <a:ext uri="{FF2B5EF4-FFF2-40B4-BE49-F238E27FC236}">
+                <a16:creationId xmlns:a16="http://schemas.microsoft.com/office/drawing/2014/main" id="{32F88D80-3E13-D7ED-BFDD-4BBEDB09A793}"/>
+              </a:ext>
+            </a:extLst>
+          </p:cNvPr>
           <p:cNvSpPr>
             <a:spLocks noGrp="1"/>
           </p:cNvSpPr>
@@ -1711,16 +1957,22 @@
           <a:lstStyle/>
           <a:p>
             <a:r>
-              <a:rPr lang="en-US" smtClean="0"/>
-              <a:t>Click to edit Master title style</a:t>
+              <a:rPr lang="es-ES"/>
+              <a:t>Haga clic para modificar el estilo de título del patrón</a:t>
             </a:r>
-            <a:endParaRPr lang="en-US"/>
-          </a:p>
-        </p:txBody>
-      </p:sp>
-      <p:sp>
-        <p:nvSpPr>
-          <p:cNvPr id="3" name="Date Placeholder 2"/>
+            <a:endParaRPr lang="es-AR"/>
+          </a:p>
+        </p:txBody>
+      </p:sp>
+      <p:sp>
+        <p:nvSpPr>
+          <p:cNvPr id="3" name="Marcador de fecha 2">
+            <a:extLst>
+              <a:ext uri="{FF2B5EF4-FFF2-40B4-BE49-F238E27FC236}">
+                <a16:creationId xmlns:a16="http://schemas.microsoft.com/office/drawing/2014/main" id="{6CBEAFE0-9A73-A40F-C14F-893455DE7FBE}"/>
+              </a:ext>
+            </a:extLst>
+          </p:cNvPr>
           <p:cNvSpPr>
             <a:spLocks noGrp="1"/>
           </p:cNvSpPr>
@@ -1735,7 +1987,7 @@
           <a:p>
             <a:fld id="{B8EC28E4-E6E7-4EAE-BF5F-E5655227AD26}" type="datetimeFigureOut">
               <a:rPr lang="en-US" smtClean="0"/>
-              <a:t>4/8/2020</a:t>
+              <a:t>3/24/2026</a:t>
             </a:fld>
             <a:endParaRPr lang="en-US"/>
           </a:p>
@@ -1743,7 +1995,13 @@
       </p:sp>
       <p:sp>
         <p:nvSpPr>
-          <p:cNvPr id="4" name="Footer Placeholder 3"/>
+          <p:cNvPr id="4" name="Marcador de pie de página 3">
+            <a:extLst>
+              <a:ext uri="{FF2B5EF4-FFF2-40B4-BE49-F238E27FC236}">
+                <a16:creationId xmlns:a16="http://schemas.microsoft.com/office/drawing/2014/main" id="{9A523AAA-D05F-F568-2C09-E897B1CB23AD}"/>
+              </a:ext>
+            </a:extLst>
+          </p:cNvPr>
           <p:cNvSpPr>
             <a:spLocks noGrp="1"/>
           </p:cNvSpPr>
@@ -1762,7 +2020,13 @@
       </p:sp>
       <p:sp>
         <p:nvSpPr>
-          <p:cNvPr id="5" name="Slide Number Placeholder 4"/>
+          <p:cNvPr id="5" name="Marcador de número de diapositiva 4">
+            <a:extLst>
+              <a:ext uri="{FF2B5EF4-FFF2-40B4-BE49-F238E27FC236}">
+                <a16:creationId xmlns:a16="http://schemas.microsoft.com/office/drawing/2014/main" id="{7C56A75F-128A-3A46-341D-74222F6B668D}"/>
+              </a:ext>
+            </a:extLst>
+          </p:cNvPr>
           <p:cNvSpPr>
             <a:spLocks noGrp="1"/>
           </p:cNvSpPr>
@@ -1777,7 +2041,7 @@
           <a:p>
             <a:fld id="{0B0D108F-AF76-43BD-8B58-422745E650E7}" type="slidenum">
               <a:rPr lang="en-US" smtClean="0"/>
-              <a:t>‹#›</a:t>
+              <a:t>‹Nº›</a:t>
             </a:fld>
             <a:endParaRPr lang="en-US"/>
           </a:p>
@@ -1786,7 +2050,7 @@
     </p:spTree>
     <p:extLst>
       <p:ext uri="{BB962C8B-B14F-4D97-AF65-F5344CB8AC3E}">
-        <p14:creationId xmlns:p14="http://schemas.microsoft.com/office/powerpoint/2010/main" val="2615678001"/>
+        <p14:creationId xmlns:p14="http://schemas.microsoft.com/office/powerpoint/2010/main" val="2138936394"/>
       </p:ext>
     </p:extLst>
   </p:cSld>
@@ -1798,7 +2062,7 @@
 
 <file path=ppt/slideLayouts/slideLayout7.xml><?xml version="1.0" encoding="utf-8"?>
 <p:sldLayout xmlns:a="http://schemas.openxmlformats.org/drawingml/2006/main" xmlns:r="http://schemas.openxmlformats.org/officeDocument/2006/relationships" xmlns:p="http://schemas.openxmlformats.org/presentationml/2006/main" type="blank" preserve="1">
-  <p:cSld name="Blank">
+  <p:cSld name="En blanco">
     <p:spTree>
       <p:nvGrpSpPr>
         <p:cNvPr id="1" name=""/>
@@ -1815,7 +2079,13 @@
       </p:grpSpPr>
       <p:sp>
         <p:nvSpPr>
-          <p:cNvPr id="2" name="Date Placeholder 1"/>
+          <p:cNvPr id="2" name="Marcador de fecha 1">
+            <a:extLst>
+              <a:ext uri="{FF2B5EF4-FFF2-40B4-BE49-F238E27FC236}">
+                <a16:creationId xmlns:a16="http://schemas.microsoft.com/office/drawing/2014/main" id="{B45749AD-037E-4FF9-EE48-AB033E9544AD}"/>
+              </a:ext>
+            </a:extLst>
+          </p:cNvPr>
           <p:cNvSpPr>
             <a:spLocks noGrp="1"/>
           </p:cNvSpPr>
@@ -1830,7 +2100,7 @@
           <a:p>
             <a:fld id="{B8EC28E4-E6E7-4EAE-BF5F-E5655227AD26}" type="datetimeFigureOut">
               <a:rPr lang="en-US" smtClean="0"/>
-              <a:t>4/8/2020</a:t>
+              <a:t>3/24/2026</a:t>
             </a:fld>
             <a:endParaRPr lang="en-US"/>
           </a:p>
@@ -1838,7 +2108,13 @@
       </p:sp>
       <p:sp>
         <p:nvSpPr>
-          <p:cNvPr id="3" name="Footer Placeholder 2"/>
+          <p:cNvPr id="3" name="Marcador de pie de página 2">
+            <a:extLst>
+              <a:ext uri="{FF2B5EF4-FFF2-40B4-BE49-F238E27FC236}">
+                <a16:creationId xmlns:a16="http://schemas.microsoft.com/office/drawing/2014/main" id="{FE79C88F-754E-C8D0-BB1B-62CFB7C36AEC}"/>
+              </a:ext>
+            </a:extLst>
+          </p:cNvPr>
           <p:cNvSpPr>
             <a:spLocks noGrp="1"/>
           </p:cNvSpPr>
@@ -1857,7 +2133,13 @@
       </p:sp>
       <p:sp>
         <p:nvSpPr>
-          <p:cNvPr id="4" name="Slide Number Placeholder 3"/>
+          <p:cNvPr id="4" name="Marcador de número de diapositiva 3">
+            <a:extLst>
+              <a:ext uri="{FF2B5EF4-FFF2-40B4-BE49-F238E27FC236}">
+                <a16:creationId xmlns:a16="http://schemas.microsoft.com/office/drawing/2014/main" id="{4B5E5B13-5751-14B1-C75E-23FA2FDAA13B}"/>
+              </a:ext>
+            </a:extLst>
+          </p:cNvPr>
           <p:cNvSpPr>
             <a:spLocks noGrp="1"/>
           </p:cNvSpPr>
@@ -1872,7 +2154,7 @@
           <a:p>
             <a:fld id="{0B0D108F-AF76-43BD-8B58-422745E650E7}" type="slidenum">
               <a:rPr lang="en-US" smtClean="0"/>
-              <a:t>‹#›</a:t>
+              <a:t>‹Nº›</a:t>
             </a:fld>
             <a:endParaRPr lang="en-US"/>
           </a:p>
@@ -1881,7 +2163,7 @@
     </p:spTree>
     <p:extLst>
       <p:ext uri="{BB962C8B-B14F-4D97-AF65-F5344CB8AC3E}">
-        <p14:creationId xmlns:p14="http://schemas.microsoft.com/office/powerpoint/2010/main" val="2325720551"/>
+        <p14:creationId xmlns:p14="http://schemas.microsoft.com/office/powerpoint/2010/main" val="68363858"/>
       </p:ext>
     </p:extLst>
   </p:cSld>
@@ -1893,7 +2175,7 @@
 
 <file path=ppt/slideLayouts/slideLayout8.xml><?xml version="1.0" encoding="utf-8"?>
 <p:sldLayout xmlns:a="http://schemas.openxmlformats.org/drawingml/2006/main" xmlns:r="http://schemas.openxmlformats.org/officeDocument/2006/relationships" xmlns:p="http://schemas.openxmlformats.org/presentationml/2006/main" type="objTx" preserve="1">
-  <p:cSld name="Content with Caption">
+  <p:cSld name="Contenido con título">
     <p:spTree>
       <p:nvGrpSpPr>
         <p:cNvPr id="1" name=""/>
@@ -1910,7 +2192,13 @@
       </p:grpSpPr>
       <p:sp>
         <p:nvSpPr>
-          <p:cNvPr id="2" name="Title 1"/>
+          <p:cNvPr id="2" name="Título 1">
+            <a:extLst>
+              <a:ext uri="{FF2B5EF4-FFF2-40B4-BE49-F238E27FC236}">
+                <a16:creationId xmlns:a16="http://schemas.microsoft.com/office/drawing/2014/main" id="{148616C6-3E2A-C8D9-A257-7B32B887F374}"/>
+              </a:ext>
+            </a:extLst>
+          </p:cNvPr>
           <p:cNvSpPr>
             <a:spLocks noGrp="1"/>
           </p:cNvSpPr>
@@ -1933,16 +2221,22 @@
           </a:lstStyle>
           <a:p>
             <a:r>
-              <a:rPr lang="en-US" smtClean="0"/>
-              <a:t>Click to edit Master title style</a:t>
+              <a:rPr lang="es-ES"/>
+              <a:t>Haga clic para modificar el estilo de título del patrón</a:t>
             </a:r>
-            <a:endParaRPr lang="en-US"/>
-          </a:p>
-        </p:txBody>
-      </p:sp>
-      <p:sp>
-        <p:nvSpPr>
-          <p:cNvPr id="3" name="Content Placeholder 2"/>
+            <a:endParaRPr lang="es-AR"/>
+          </a:p>
+        </p:txBody>
+      </p:sp>
+      <p:sp>
+        <p:nvSpPr>
+          <p:cNvPr id="3" name="Marcador de contenido 2">
+            <a:extLst>
+              <a:ext uri="{FF2B5EF4-FFF2-40B4-BE49-F238E27FC236}">
+                <a16:creationId xmlns:a16="http://schemas.microsoft.com/office/drawing/2014/main" id="{540F1757-B14A-64C5-1E30-5DF3AEEECE7C}"/>
+              </a:ext>
+            </a:extLst>
+          </p:cNvPr>
           <p:cNvSpPr>
             <a:spLocks noGrp="1"/>
           </p:cNvSpPr>
@@ -1990,44 +2284,50 @@
           <a:p>
             <a:pPr lvl="0"/>
             <a:r>
-              <a:rPr lang="en-US" smtClean="0"/>
-              <a:t>Edit Master text styles</a:t>
+              <a:rPr lang="es-ES"/>
+              <a:t>Haga clic para modificar los estilos de texto del patrón</a:t>
             </a:r>
           </a:p>
           <a:p>
             <a:pPr lvl="1"/>
             <a:r>
-              <a:rPr lang="en-US" smtClean="0"/>
-              <a:t>Second level</a:t>
+              <a:rPr lang="es-ES"/>
+              <a:t>Segundo nivel</a:t>
             </a:r>
           </a:p>
           <a:p>
             <a:pPr lvl="2"/>
             <a:r>
-              <a:rPr lang="en-US" smtClean="0"/>
-              <a:t>Third level</a:t>
+              <a:rPr lang="es-ES"/>
+              <a:t>Tercer nivel</a:t>
             </a:r>
           </a:p>
           <a:p>
             <a:pPr lvl="3"/>
             <a:r>
-              <a:rPr lang="en-US" smtClean="0"/>
-              <a:t>Fourth level</a:t>
+              <a:rPr lang="es-ES"/>
+              <a:t>Cuarto nivel</a:t>
             </a:r>
           </a:p>
           <a:p>
             <a:pPr lvl="4"/>
             <a:r>
-              <a:rPr lang="en-US" smtClean="0"/>
-              <a:t>Fifth level</a:t>
+              <a:rPr lang="es-ES"/>
+              <a:t>Quinto nivel</a:t>
             </a:r>
-            <a:endParaRPr lang="en-US"/>
-          </a:p>
-        </p:txBody>
-      </p:sp>
-      <p:sp>
-        <p:nvSpPr>
-          <p:cNvPr id="4" name="Text Placeholder 3"/>
+            <a:endParaRPr lang="es-AR"/>
+          </a:p>
+        </p:txBody>
+      </p:sp>
+      <p:sp>
+        <p:nvSpPr>
+          <p:cNvPr id="4" name="Marcador de texto 3">
+            <a:extLst>
+              <a:ext uri="{FF2B5EF4-FFF2-40B4-BE49-F238E27FC236}">
+                <a16:creationId xmlns:a16="http://schemas.microsoft.com/office/drawing/2014/main" id="{42021C20-D2EC-DA43-8EA4-DF207738604F}"/>
+              </a:ext>
+            </a:extLst>
+          </p:cNvPr>
           <p:cNvSpPr>
             <a:spLocks noGrp="1"/>
           </p:cNvSpPr>
@@ -2084,15 +2384,21 @@
           <a:p>
             <a:pPr lvl="0"/>
             <a:r>
-              <a:rPr lang="en-US" smtClean="0"/>
-              <a:t>Edit Master text styles</a:t>
+              <a:rPr lang="es-ES"/>
+              <a:t>Haga clic para modificar los estilos de texto del patrón</a:t>
             </a:r>
           </a:p>
         </p:txBody>
       </p:sp>
       <p:sp>
         <p:nvSpPr>
-          <p:cNvPr id="5" name="Date Placeholder 4"/>
+          <p:cNvPr id="5" name="Marcador de fecha 4">
+            <a:extLst>
+              <a:ext uri="{FF2B5EF4-FFF2-40B4-BE49-F238E27FC236}">
+                <a16:creationId xmlns:a16="http://schemas.microsoft.com/office/drawing/2014/main" id="{C006D8F7-6166-B097-E3EB-44B69B7515F6}"/>
+              </a:ext>
+            </a:extLst>
+          </p:cNvPr>
           <p:cNvSpPr>
             <a:spLocks noGrp="1"/>
           </p:cNvSpPr>
@@ -2107,7 +2413,7 @@
           <a:p>
             <a:fld id="{B8EC28E4-E6E7-4EAE-BF5F-E5655227AD26}" type="datetimeFigureOut">
               <a:rPr lang="en-US" smtClean="0"/>
-              <a:t>4/8/2020</a:t>
+              <a:t>3/24/2026</a:t>
             </a:fld>
             <a:endParaRPr lang="en-US"/>
           </a:p>
@@ -2115,7 +2421,13 @@
       </p:sp>
       <p:sp>
         <p:nvSpPr>
-          <p:cNvPr id="6" name="Footer Placeholder 5"/>
+          <p:cNvPr id="6" name="Marcador de pie de página 5">
+            <a:extLst>
+              <a:ext uri="{FF2B5EF4-FFF2-40B4-BE49-F238E27FC236}">
+                <a16:creationId xmlns:a16="http://schemas.microsoft.com/office/drawing/2014/main" id="{D78B1EC3-3B44-EDC6-79D8-F589CF087186}"/>
+              </a:ext>
+            </a:extLst>
+          </p:cNvPr>
           <p:cNvSpPr>
             <a:spLocks noGrp="1"/>
           </p:cNvSpPr>
@@ -2134,7 +2446,13 @@
       </p:sp>
       <p:sp>
         <p:nvSpPr>
-          <p:cNvPr id="7" name="Slide Number Placeholder 6"/>
+          <p:cNvPr id="7" name="Marcador de número de diapositiva 6">
+            <a:extLst>
+              <a:ext uri="{FF2B5EF4-FFF2-40B4-BE49-F238E27FC236}">
+                <a16:creationId xmlns:a16="http://schemas.microsoft.com/office/drawing/2014/main" id="{37B24806-9067-1BB3-4B3F-D51026430211}"/>
+              </a:ext>
+            </a:extLst>
+          </p:cNvPr>
           <p:cNvSpPr>
             <a:spLocks noGrp="1"/>
           </p:cNvSpPr>
@@ -2149,7 +2467,7 @@
           <a:p>
             <a:fld id="{0B0D108F-AF76-43BD-8B58-422745E650E7}" type="slidenum">
               <a:rPr lang="en-US" smtClean="0"/>
-              <a:t>‹#›</a:t>
+              <a:t>‹Nº›</a:t>
             </a:fld>
             <a:endParaRPr lang="en-US"/>
           </a:p>
@@ -2158,7 +2476,7 @@
     </p:spTree>
     <p:extLst>
       <p:ext uri="{BB962C8B-B14F-4D97-AF65-F5344CB8AC3E}">
-        <p14:creationId xmlns:p14="http://schemas.microsoft.com/office/powerpoint/2010/main" val="3945825656"/>
+        <p14:creationId xmlns:p14="http://schemas.microsoft.com/office/powerpoint/2010/main" val="3505548254"/>
       </p:ext>
     </p:extLst>
   </p:cSld>
@@ -2170,7 +2488,7 @@
 
 <file path=ppt/slideLayouts/slideLayout9.xml><?xml version="1.0" encoding="utf-8"?>
 <p:sldLayout xmlns:a="http://schemas.openxmlformats.org/drawingml/2006/main" xmlns:r="http://schemas.openxmlformats.org/officeDocument/2006/relationships" xmlns:p="http://schemas.openxmlformats.org/presentationml/2006/main" type="picTx" preserve="1">
-  <p:cSld name="Picture with Caption">
+  <p:cSld name="Imagen con título">
     <p:spTree>
       <p:nvGrpSpPr>
         <p:cNvPr id="1" name=""/>
@@ -2187,7 +2505,13 @@
       </p:grpSpPr>
       <p:sp>
         <p:nvSpPr>
-          <p:cNvPr id="2" name="Title 1"/>
+          <p:cNvPr id="2" name="Título 1">
+            <a:extLst>
+              <a:ext uri="{FF2B5EF4-FFF2-40B4-BE49-F238E27FC236}">
+                <a16:creationId xmlns:a16="http://schemas.microsoft.com/office/drawing/2014/main" id="{FF6AB097-1986-773A-72BB-BD06E1BF9998}"/>
+              </a:ext>
+            </a:extLst>
+          </p:cNvPr>
           <p:cNvSpPr>
             <a:spLocks noGrp="1"/>
           </p:cNvSpPr>
@@ -2210,16 +2534,22 @@
           </a:lstStyle>
           <a:p>
             <a:r>
-              <a:rPr lang="en-US" smtClean="0"/>
-              <a:t>Click to edit Master title style</a:t>
+              <a:rPr lang="es-ES"/>
+              <a:t>Haga clic para modificar el estilo de título del patrón</a:t>
             </a:r>
-            <a:endParaRPr lang="en-US"/>
-          </a:p>
-        </p:txBody>
-      </p:sp>
-      <p:sp>
-        <p:nvSpPr>
-          <p:cNvPr id="3" name="Picture Placeholder 2"/>
+            <a:endParaRPr lang="es-AR"/>
+          </a:p>
+        </p:txBody>
+      </p:sp>
+      <p:sp>
+        <p:nvSpPr>
+          <p:cNvPr id="3" name="Marcador de posición de imagen 2">
+            <a:extLst>
+              <a:ext uri="{FF2B5EF4-FFF2-40B4-BE49-F238E27FC236}">
+                <a16:creationId xmlns:a16="http://schemas.microsoft.com/office/drawing/2014/main" id="{6FA87EC1-D328-0579-99E5-FAD8B245659A}"/>
+              </a:ext>
+            </a:extLst>
+          </p:cNvPr>
           <p:cNvSpPr>
             <a:spLocks noGrp="1"/>
           </p:cNvSpPr>
@@ -2274,13 +2604,19 @@
             </a:lvl9pPr>
           </a:lstStyle>
           <a:p>
-            <a:endParaRPr lang="en-US"/>
-          </a:p>
-        </p:txBody>
-      </p:sp>
-      <p:sp>
-        <p:nvSpPr>
-          <p:cNvPr id="4" name="Text Placeholder 3"/>
+            <a:endParaRPr lang="es-AR"/>
+          </a:p>
+        </p:txBody>
+      </p:sp>
+      <p:sp>
+        <p:nvSpPr>
+          <p:cNvPr id="4" name="Marcador de texto 3">
+            <a:extLst>
+              <a:ext uri="{FF2B5EF4-FFF2-40B4-BE49-F238E27FC236}">
+                <a16:creationId xmlns:a16="http://schemas.microsoft.com/office/drawing/2014/main" id="{304730F4-46BF-3AA9-1FB4-05C0A01E37F7}"/>
+              </a:ext>
+            </a:extLst>
+          </p:cNvPr>
           <p:cNvSpPr>
             <a:spLocks noGrp="1"/>
           </p:cNvSpPr>
@@ -2337,15 +2673,21 @@
           <a:p>
             <a:pPr lvl="0"/>
             <a:r>
-              <a:rPr lang="en-US" smtClean="0"/>
-              <a:t>Edit Master text styles</a:t>
+              <a:rPr lang="es-ES"/>
+              <a:t>Haga clic para modificar los estilos de texto del patrón</a:t>
             </a:r>
           </a:p>
         </p:txBody>
       </p:sp>
       <p:sp>
         <p:nvSpPr>
-          <p:cNvPr id="5" name="Date Placeholder 4"/>
+          <p:cNvPr id="5" name="Marcador de fecha 4">
+            <a:extLst>
+              <a:ext uri="{FF2B5EF4-FFF2-40B4-BE49-F238E27FC236}">
+                <a16:creationId xmlns:a16="http://schemas.microsoft.com/office/drawing/2014/main" id="{36672909-3E8A-D00A-1649-7FE3B9218A7A}"/>
+              </a:ext>
+            </a:extLst>
+          </p:cNvPr>
           <p:cNvSpPr>
             <a:spLocks noGrp="1"/>
           </p:cNvSpPr>
@@ -2360,7 +2702,7 @@
           <a:p>
             <a:fld id="{B8EC28E4-E6E7-4EAE-BF5F-E5655227AD26}" type="datetimeFigureOut">
               <a:rPr lang="en-US" smtClean="0"/>
-              <a:t>4/8/2020</a:t>
+              <a:t>3/24/2026</a:t>
             </a:fld>
             <a:endParaRPr lang="en-US"/>
           </a:p>
@@ -2368,7 +2710,13 @@
       </p:sp>
       <p:sp>
         <p:nvSpPr>
-          <p:cNvPr id="6" name="Footer Placeholder 5"/>
+          <p:cNvPr id="6" name="Marcador de pie de página 5">
+            <a:extLst>
+              <a:ext uri="{FF2B5EF4-FFF2-40B4-BE49-F238E27FC236}">
+                <a16:creationId xmlns:a16="http://schemas.microsoft.com/office/drawing/2014/main" id="{C82B3DC9-AAA4-E850-3BD8-92D1F8E8A11E}"/>
+              </a:ext>
+            </a:extLst>
+          </p:cNvPr>
           <p:cNvSpPr>
             <a:spLocks noGrp="1"/>
           </p:cNvSpPr>
@@ -2387,7 +2735,13 @@
       </p:sp>
       <p:sp>
         <p:nvSpPr>
-          <p:cNvPr id="7" name="Slide Number Placeholder 6"/>
+          <p:cNvPr id="7" name="Marcador de número de diapositiva 6">
+            <a:extLst>
+              <a:ext uri="{FF2B5EF4-FFF2-40B4-BE49-F238E27FC236}">
+                <a16:creationId xmlns:a16="http://schemas.microsoft.com/office/drawing/2014/main" id="{AF28F260-C8D4-6666-C5D9-00F4ACEF3F58}"/>
+              </a:ext>
+            </a:extLst>
+          </p:cNvPr>
           <p:cNvSpPr>
             <a:spLocks noGrp="1"/>
           </p:cNvSpPr>
@@ -2402,7 +2756,7 @@
           <a:p>
             <a:fld id="{0B0D108F-AF76-43BD-8B58-422745E650E7}" type="slidenum">
               <a:rPr lang="en-US" smtClean="0"/>
-              <a:t>‹#›</a:t>
+              <a:t>‹Nº›</a:t>
             </a:fld>
             <a:endParaRPr lang="en-US"/>
           </a:p>
@@ -2411,7 +2765,7 @@
     </p:spTree>
     <p:extLst>
       <p:ext uri="{BB962C8B-B14F-4D97-AF65-F5344CB8AC3E}">
-        <p14:creationId xmlns:p14="http://schemas.microsoft.com/office/powerpoint/2010/main" val="3207669687"/>
+        <p14:creationId xmlns:p14="http://schemas.microsoft.com/office/powerpoint/2010/main" val="465997378"/>
       </p:ext>
     </p:extLst>
   </p:cSld>
@@ -2445,7 +2799,13 @@
       </p:grpSpPr>
       <p:sp>
         <p:nvSpPr>
-          <p:cNvPr id="2" name="Title Placeholder 1"/>
+          <p:cNvPr id="2" name="Marcador de título 1">
+            <a:extLst>
+              <a:ext uri="{FF2B5EF4-FFF2-40B4-BE49-F238E27FC236}">
+                <a16:creationId xmlns:a16="http://schemas.microsoft.com/office/drawing/2014/main" id="{D1BD5C1B-DC31-CE74-641D-DC7387ABC80A}"/>
+              </a:ext>
+            </a:extLst>
+          </p:cNvPr>
           <p:cNvSpPr>
             <a:spLocks noGrp="1"/>
           </p:cNvSpPr>
@@ -2469,16 +2829,22 @@
           <a:lstStyle/>
           <a:p>
             <a:r>
-              <a:rPr lang="en-US" smtClean="0"/>
-              <a:t>Click to edit Master title style</a:t>
+              <a:rPr lang="es-ES"/>
+              <a:t>Haga clic para modificar el estilo de título del patrón</a:t>
             </a:r>
-            <a:endParaRPr lang="en-US"/>
-          </a:p>
-        </p:txBody>
-      </p:sp>
-      <p:sp>
-        <p:nvSpPr>
-          <p:cNvPr id="3" name="Text Placeholder 2"/>
+            <a:endParaRPr lang="es-AR"/>
+          </a:p>
+        </p:txBody>
+      </p:sp>
+      <p:sp>
+        <p:nvSpPr>
+          <p:cNvPr id="3" name="Marcador de texto 2">
+            <a:extLst>
+              <a:ext uri="{FF2B5EF4-FFF2-40B4-BE49-F238E27FC236}">
+                <a16:creationId xmlns:a16="http://schemas.microsoft.com/office/drawing/2014/main" id="{2BBC9144-A2F0-644F-C099-D869B604763C}"/>
+              </a:ext>
+            </a:extLst>
+          </p:cNvPr>
           <p:cNvSpPr>
             <a:spLocks noGrp="1"/>
           </p:cNvSpPr>
@@ -2503,44 +2869,50 @@
           <a:p>
             <a:pPr lvl="0"/>
             <a:r>
-              <a:rPr lang="en-US" smtClean="0"/>
-              <a:t>Edit Master text styles</a:t>
+              <a:rPr lang="es-ES"/>
+              <a:t>Haga clic para modificar los estilos de texto del patrón</a:t>
             </a:r>
           </a:p>
           <a:p>
             <a:pPr lvl="1"/>
             <a:r>
-              <a:rPr lang="en-US" smtClean="0"/>
-              <a:t>Second level</a:t>
+              <a:rPr lang="es-ES"/>
+              <a:t>Segundo nivel</a:t>
             </a:r>
           </a:p>
           <a:p>
             <a:pPr lvl="2"/>
             <a:r>
-              <a:rPr lang="en-US" smtClean="0"/>
-              <a:t>Third level</a:t>
+              <a:rPr lang="es-ES"/>
+              <a:t>Tercer nivel</a:t>
             </a:r>
           </a:p>
           <a:p>
             <a:pPr lvl="3"/>
             <a:r>
-              <a:rPr lang="en-US" smtClean="0"/>
-              <a:t>Fourth level</a:t>
+              <a:rPr lang="es-ES"/>
+              <a:t>Cuarto nivel</a:t>
             </a:r>
           </a:p>
           <a:p>
             <a:pPr lvl="4"/>
             <a:r>
-              <a:rPr lang="en-US" smtClean="0"/>
-              <a:t>Fifth level</a:t>
+              <a:rPr lang="es-ES"/>
+              <a:t>Quinto nivel</a:t>
             </a:r>
-            <a:endParaRPr lang="en-US"/>
-          </a:p>
-        </p:txBody>
-      </p:sp>
-      <p:sp>
-        <p:nvSpPr>
-          <p:cNvPr id="4" name="Date Placeholder 3"/>
+            <a:endParaRPr lang="es-AR"/>
+          </a:p>
+        </p:txBody>
+      </p:sp>
+      <p:sp>
+        <p:nvSpPr>
+          <p:cNvPr id="4" name="Marcador de fecha 3">
+            <a:extLst>
+              <a:ext uri="{FF2B5EF4-FFF2-40B4-BE49-F238E27FC236}">
+                <a16:creationId xmlns:a16="http://schemas.microsoft.com/office/drawing/2014/main" id="{1B83345A-B2DF-E75B-72DC-0AF1435DDE9E}"/>
+              </a:ext>
+            </a:extLst>
+          </p:cNvPr>
           <p:cNvSpPr>
             <a:spLocks noGrp="1"/>
           </p:cNvSpPr>
@@ -2564,7 +2936,7 @@
               <a:defRPr sz="1200">
                 <a:solidFill>
                   <a:schemeClr val="tx1">
-                    <a:tint val="75000"/>
+                    <a:tint val="82000"/>
                   </a:schemeClr>
                 </a:solidFill>
               </a:defRPr>
@@ -2573,7 +2945,7 @@
           <a:p>
             <a:fld id="{B8EC28E4-E6E7-4EAE-BF5F-E5655227AD26}" type="datetimeFigureOut">
               <a:rPr lang="en-US" smtClean="0"/>
-              <a:t>4/8/2020</a:t>
+              <a:t>3/24/2026</a:t>
             </a:fld>
             <a:endParaRPr lang="en-US"/>
           </a:p>
@@ -2581,7 +2953,13 @@
       </p:sp>
       <p:sp>
         <p:nvSpPr>
-          <p:cNvPr id="5" name="Footer Placeholder 4"/>
+          <p:cNvPr id="5" name="Marcador de pie de página 4">
+            <a:extLst>
+              <a:ext uri="{FF2B5EF4-FFF2-40B4-BE49-F238E27FC236}">
+                <a16:creationId xmlns:a16="http://schemas.microsoft.com/office/drawing/2014/main" id="{17DFC9C5-52C8-8749-2795-3EE5A8090721}"/>
+              </a:ext>
+            </a:extLst>
+          </p:cNvPr>
           <p:cNvSpPr>
             <a:spLocks noGrp="1"/>
           </p:cNvSpPr>
@@ -2605,7 +2983,7 @@
               <a:defRPr sz="1200">
                 <a:solidFill>
                   <a:schemeClr val="tx1">
-                    <a:tint val="75000"/>
+                    <a:tint val="82000"/>
                   </a:schemeClr>
                 </a:solidFill>
               </a:defRPr>
@@ -2618,7 +2996,13 @@
       </p:sp>
       <p:sp>
         <p:nvSpPr>
-          <p:cNvPr id="6" name="Slide Number Placeholder 5"/>
+          <p:cNvPr id="6" name="Marcador de número de diapositiva 5">
+            <a:extLst>
+              <a:ext uri="{FF2B5EF4-FFF2-40B4-BE49-F238E27FC236}">
+                <a16:creationId xmlns:a16="http://schemas.microsoft.com/office/drawing/2014/main" id="{0BED2F46-C764-699B-2C23-41C26CB2BC25}"/>
+              </a:ext>
+            </a:extLst>
+          </p:cNvPr>
           <p:cNvSpPr>
             <a:spLocks noGrp="1"/>
           </p:cNvSpPr>
@@ -2642,7 +3026,7 @@
               <a:defRPr sz="1200">
                 <a:solidFill>
                   <a:schemeClr val="tx1">
-                    <a:tint val="75000"/>
+                    <a:tint val="82000"/>
                   </a:schemeClr>
                 </a:solidFill>
               </a:defRPr>
@@ -2651,7 +3035,7 @@
           <a:p>
             <a:fld id="{0B0D108F-AF76-43BD-8B58-422745E650E7}" type="slidenum">
               <a:rPr lang="en-US" smtClean="0"/>
-              <a:t>‹#›</a:t>
+              <a:t>‹Nº›</a:t>
             </a:fld>
             <a:endParaRPr lang="en-US"/>
           </a:p>
@@ -2660,23 +3044,23 @@
     </p:spTree>
     <p:extLst>
       <p:ext uri="{BB962C8B-B14F-4D97-AF65-F5344CB8AC3E}">
-        <p14:creationId xmlns:p14="http://schemas.microsoft.com/office/powerpoint/2010/main" val="2026752574"/>
+        <p14:creationId xmlns:p14="http://schemas.microsoft.com/office/powerpoint/2010/main" val="1469116994"/>
       </p:ext>
     </p:extLst>
   </p:cSld>
   <p:clrMap bg1="lt1" tx1="dk1" bg2="lt2" tx2="dk2" accent1="accent1" accent2="accent2" accent3="accent3" accent4="accent4" accent5="accent5" accent6="accent6" hlink="hlink" folHlink="folHlink"/>
   <p:sldLayoutIdLst>
-    <p:sldLayoutId id="2147483732" r:id="rId1"/>
-    <p:sldLayoutId id="2147483733" r:id="rId2"/>
-    <p:sldLayoutId id="2147483734" r:id="rId3"/>
-    <p:sldLayoutId id="2147483735" r:id="rId4"/>
-    <p:sldLayoutId id="2147483736" r:id="rId5"/>
-    <p:sldLayoutId id="2147483737" r:id="rId6"/>
-    <p:sldLayoutId id="2147483738" r:id="rId7"/>
-    <p:sldLayoutId id="2147483739" r:id="rId8"/>
-    <p:sldLayoutId id="2147483740" r:id="rId9"/>
-    <p:sldLayoutId id="2147483741" r:id="rId10"/>
-    <p:sldLayoutId id="2147483742" r:id="rId11"/>
+    <p:sldLayoutId id="2147483744" r:id="rId1"/>
+    <p:sldLayoutId id="2147483745" r:id="rId2"/>
+    <p:sldLayoutId id="2147483746" r:id="rId3"/>
+    <p:sldLayoutId id="2147483747" r:id="rId4"/>
+    <p:sldLayoutId id="2147483748" r:id="rId5"/>
+    <p:sldLayoutId id="2147483749" r:id="rId6"/>
+    <p:sldLayoutId id="2147483750" r:id="rId7"/>
+    <p:sldLayoutId id="2147483751" r:id="rId8"/>
+    <p:sldLayoutId id="2147483752" r:id="rId9"/>
+    <p:sldLayoutId id="2147483753" r:id="rId10"/>
+    <p:sldLayoutId id="2147483754" r:id="rId11"/>
   </p:sldLayoutIdLst>
   <p:txStyles>
     <p:titleStyle>
@@ -2864,7 +3248,7 @@
     </p:bodyStyle>
     <p:otherStyle>
       <a:defPPr>
-        <a:defRPr lang="en-US"/>
+        <a:defRPr lang="es-AR"/>
       </a:defPPr>
       <a:lvl1pPr marL="0" algn="l" defTabSz="914400" rtl="0" eaLnBrk="1" latinLnBrk="0" hangingPunct="1">
         <a:defRPr sz="1800" kern="1200">
@@ -2966,19 +3350,9 @@
   <p:cSld>
     <p:bg>
       <p:bgPr>
-        <a:gradFill>
-          <a:gsLst>
-            <a:gs pos="100000">
-              <a:schemeClr val="bg1">
-                <a:lumMod val="95000"/>
-              </a:schemeClr>
-            </a:gs>
-            <a:gs pos="0">
-              <a:schemeClr val="bg1"/>
-            </a:gs>
-          </a:gsLst>
-          <a:lin ang="5400000" scaled="0"/>
-        </a:gradFill>
+        <a:solidFill>
+          <a:schemeClr val="accent1"/>
+        </a:solidFill>
         <a:effectLst/>
       </p:bgPr>
     </p:bg>
@@ -2998,54 +3372,81 @@
       </p:grpSpPr>
       <p:sp>
         <p:nvSpPr>
-          <p:cNvPr id="4" name="Rectangle 3"/>
+          <p:cNvPr id="6" name="Rectángulo 5">
+            <a:extLst>
+              <a:ext uri="{FF2B5EF4-FFF2-40B4-BE49-F238E27FC236}">
+                <a16:creationId xmlns:a16="http://schemas.microsoft.com/office/drawing/2014/main" id="{5FBFBAD6-55E0-ADFA-60F9-87AE31982612}"/>
+              </a:ext>
+            </a:extLst>
+          </p:cNvPr>
           <p:cNvSpPr/>
           <p:nvPr/>
         </p:nvSpPr>
         <p:spPr>
           <a:xfrm>
-            <a:off x="0" y="0"/>
-            <a:ext cx="12192000" cy="1208690"/>
+            <a:off x="193638" y="268941"/>
+            <a:ext cx="11629016" cy="1237130"/>
           </a:xfrm>
           <a:prstGeom prst="rect">
             <a:avLst/>
           </a:prstGeom>
-          <a:gradFill flip="none" rotWithShape="1">
-            <a:gsLst>
-              <a:gs pos="0">
-                <a:schemeClr val="accent1">
-                  <a:lumMod val="50000"/>
-                  <a:shade val="30000"/>
-                  <a:satMod val="115000"/>
-                </a:schemeClr>
-              </a:gs>
-              <a:gs pos="50000">
-                <a:schemeClr val="accent1">
-                  <a:lumMod val="50000"/>
-                  <a:shade val="67500"/>
-                  <a:satMod val="115000"/>
-                </a:schemeClr>
-              </a:gs>
-              <a:gs pos="100000">
-                <a:schemeClr val="accent1">
-                  <a:lumMod val="50000"/>
-                  <a:shade val="100000"/>
-                  <a:satMod val="115000"/>
-                </a:schemeClr>
-              </a:gs>
-            </a:gsLst>
-            <a:lin ang="5400000" scaled="1"/>
-            <a:tileRect/>
-          </a:gradFill>
+          <a:solidFill>
+            <a:schemeClr val="accent1"/>
+          </a:solidFill>
+          <a:ln>
+            <a:gradFill>
+              <a:gsLst>
+                <a:gs pos="91738">
+                  <a:srgbClr val="8CCEED"/>
+                </a:gs>
+                <a:gs pos="0">
+                  <a:schemeClr val="accent1">
+                    <a:lumMod val="5000"/>
+                    <a:lumOff val="95000"/>
+                  </a:schemeClr>
+                </a:gs>
+                <a:gs pos="74000">
+                  <a:schemeClr val="accent1">
+                    <a:lumMod val="45000"/>
+                    <a:lumOff val="55000"/>
+                  </a:schemeClr>
+                </a:gs>
+                <a:gs pos="15613">
+                  <a:srgbClr val="D6EDF9"/>
+                </a:gs>
+                <a:gs pos="34850">
+                  <a:srgbClr val="B6DFF4"/>
+                </a:gs>
+                <a:gs pos="55056">
+                  <a:srgbClr val="94D1EE"/>
+                </a:gs>
+                <a:gs pos="83000">
+                  <a:schemeClr val="accent1">
+                    <a:lumMod val="45000"/>
+                    <a:lumOff val="55000"/>
+                  </a:schemeClr>
+                </a:gs>
+                <a:gs pos="100000">
+                  <a:schemeClr val="accent1">
+                    <a:lumMod val="30000"/>
+                    <a:lumOff val="70000"/>
+                  </a:schemeClr>
+                </a:gs>
+              </a:gsLst>
+              <a:lin ang="5400000" scaled="1"/>
+            </a:gradFill>
+          </a:ln>
         </p:spPr>
         <p:style>
-          <a:lnRef idx="1">
-            <a:schemeClr val="accent1"/>
+          <a:lnRef idx="2">
+            <a:schemeClr val="accent1">
+              <a:shade val="15000"/>
+            </a:schemeClr>
           </a:lnRef>
-          <a:fillRef idx="3">
+          <a:fillRef idx="1">
             <a:schemeClr val="accent1"/>
           </a:fillRef>
-          <a:effectRef idx="2">
+          <a:effectRef idx="0">
             <a:schemeClr val="accent1"/>
           </a:effectRef>
           <a:fontRef idx="minor">
@@ -3057,27 +3458,20 @@
           <a:lstStyle/>
           <a:p>
             <a:pPr algn="ctr"/>
-            <a:endParaRPr lang="en-US"/>
+            <a:endParaRPr lang="es-AR"/>
           </a:p>
         </p:txBody>
       </p:sp>
     </p:spTree>
     <p:extLst>
       <p:ext uri="{BB962C8B-B14F-4D97-AF65-F5344CB8AC3E}">
-        <p14:creationId xmlns:p14="http://schemas.microsoft.com/office/powerpoint/2010/main" val="1970515704"/>
+        <p14:creationId xmlns:p14="http://schemas.microsoft.com/office/powerpoint/2010/main" val="2152748620"/>
       </p:ext>
     </p:extLst>
   </p:cSld>
   <p:clrMapOvr>
     <a:masterClrMapping/>
   </p:clrMapOvr>
-  <p:timing>
-    <p:tnLst>
-      <p:par>
-        <p:cTn id="1" dur="indefinite" restart="never" nodeType="tmRoot"/>
-      </p:par>
-    </p:tnLst>
-  </p:timing>
 </p:sld>
 </file>
 
@@ -3190,146 +3584,6 @@
       </p:sp>
       <p:sp>
         <p:nvSpPr>
-          <p:cNvPr id="12" name="Right Triangle 11"/>
-          <p:cNvSpPr/>
-          <p:nvPr/>
-        </p:nvSpPr>
-        <p:spPr>
-          <a:xfrm rot="10602810">
-            <a:off x="-2798872" y="-4396874"/>
-            <a:ext cx="18104378" cy="11379632"/>
-          </a:xfrm>
-          <a:prstGeom prst="rtTriangle">
-            <a:avLst/>
-          </a:prstGeom>
-          <a:gradFill flip="none" rotWithShape="1">
-            <a:gsLst>
-              <a:gs pos="0">
-                <a:schemeClr val="bg1">
-                  <a:lumMod val="95000"/>
-                  <a:shade val="30000"/>
-                  <a:satMod val="115000"/>
-                </a:schemeClr>
-              </a:gs>
-              <a:gs pos="50000">
-                <a:schemeClr val="bg1">
-                  <a:lumMod val="95000"/>
-                  <a:shade val="67500"/>
-                  <a:satMod val="115000"/>
-                </a:schemeClr>
-              </a:gs>
-              <a:gs pos="100000">
-                <a:schemeClr val="bg1">
-                  <a:lumMod val="95000"/>
-                  <a:shade val="100000"/>
-                  <a:satMod val="115000"/>
-                </a:schemeClr>
-              </a:gs>
-            </a:gsLst>
-            <a:lin ang="2700000" scaled="1"/>
-            <a:tileRect/>
-          </a:gradFill>
-          <a:ln>
-            <a:noFill/>
-          </a:ln>
-        </p:spPr>
-        <p:style>
-          <a:lnRef idx="2">
-            <a:schemeClr val="accent1">
-              <a:shade val="50000"/>
-            </a:schemeClr>
-          </a:lnRef>
-          <a:fillRef idx="1">
-            <a:schemeClr val="accent1"/>
-          </a:fillRef>
-          <a:effectRef idx="0">
-            <a:schemeClr val="accent1"/>
-          </a:effectRef>
-          <a:fontRef idx="minor">
-            <a:schemeClr val="lt1"/>
-          </a:fontRef>
-        </p:style>
-        <p:txBody>
-          <a:bodyPr rtlCol="0" anchor="ctr"/>
-          <a:lstStyle/>
-          <a:p>
-            <a:pPr algn="ctr"/>
-            <a:endParaRPr lang="en-US"/>
-          </a:p>
-        </p:txBody>
-      </p:sp>
-      <p:sp>
-        <p:nvSpPr>
-          <p:cNvPr id="11" name="Right Triangle 10"/>
-          <p:cNvSpPr/>
-          <p:nvPr/>
-        </p:nvSpPr>
-        <p:spPr>
-          <a:xfrm rot="10800000">
-            <a:off x="-2951272" y="-4549274"/>
-            <a:ext cx="18104378" cy="11379632"/>
-          </a:xfrm>
-          <a:prstGeom prst="rtTriangle">
-            <a:avLst/>
-          </a:prstGeom>
-          <a:gradFill flip="none" rotWithShape="1">
-            <a:gsLst>
-              <a:gs pos="0">
-                <a:schemeClr val="accent1">
-                  <a:lumMod val="50000"/>
-                  <a:shade val="30000"/>
-                  <a:satMod val="115000"/>
-                </a:schemeClr>
-              </a:gs>
-              <a:gs pos="50000">
-                <a:schemeClr val="accent1">
-                  <a:lumMod val="50000"/>
-                  <a:shade val="67500"/>
-                  <a:satMod val="115000"/>
-                </a:schemeClr>
-              </a:gs>
-              <a:gs pos="100000">
-                <a:schemeClr val="accent1">
-                  <a:lumMod val="50000"/>
-                  <a:shade val="100000"/>
-                  <a:satMod val="115000"/>
-                </a:schemeClr>
-              </a:gs>
-            </a:gsLst>
-            <a:lin ang="16200000" scaled="1"/>
-            <a:tileRect/>
-          </a:gradFill>
-          <a:ln>
-            <a:noFill/>
-          </a:ln>
-        </p:spPr>
-        <p:style>
-          <a:lnRef idx="2">
-            <a:schemeClr val="accent1">
-              <a:shade val="50000"/>
-            </a:schemeClr>
-          </a:lnRef>
-          <a:fillRef idx="1">
-            <a:schemeClr val="accent1"/>
-          </a:fillRef>
-          <a:effectRef idx="0">
-            <a:schemeClr val="accent1"/>
-          </a:effectRef>
-          <a:fontRef idx="minor">
-            <a:schemeClr val="lt1"/>
-          </a:fontRef>
-        </p:style>
-        <p:txBody>
-          <a:bodyPr rtlCol="0" anchor="ctr"/>
-          <a:lstStyle/>
-          <a:p>
-            <a:pPr algn="ctr"/>
-            <a:endParaRPr lang="en-US"/>
-          </a:p>
-        </p:txBody>
-      </p:sp>
-      <p:sp>
-        <p:nvSpPr>
           <p:cNvPr id="5" name="Rounded Rectangle 4"/>
           <p:cNvSpPr/>
           <p:nvPr/>
@@ -3671,20 +3925,13 @@
     </p:spTree>
     <p:extLst>
       <p:ext uri="{BB962C8B-B14F-4D97-AF65-F5344CB8AC3E}">
-        <p14:creationId xmlns:p14="http://schemas.microsoft.com/office/powerpoint/2010/main" val="3734860744"/>
+        <p14:creationId xmlns:p14="http://schemas.microsoft.com/office/powerpoint/2010/main" val="2472428678"/>
       </p:ext>
     </p:extLst>
   </p:cSld>
   <p:clrMapOvr>
     <a:masterClrMapping/>
   </p:clrMapOvr>
-  <p:timing>
-    <p:tnLst>
-      <p:par>
-        <p:cTn id="1" dur="indefinite" restart="never" nodeType="tmRoot"/>
-      </p:par>
-    </p:tnLst>
-  </p:timing>
 </p:sld>
 </file>
 
@@ -3695,14 +3942,16 @@
       <p:bgPr>
         <a:gradFill>
           <a:gsLst>
-            <a:gs pos="0">
-              <a:schemeClr val="bg1">
-                <a:lumMod val="85000"/>
+            <a:gs pos="100000">
+              <a:schemeClr val="accent1">
+                <a:lumMod val="20000"/>
+                <a:lumOff val="80000"/>
               </a:schemeClr>
             </a:gs>
-            <a:gs pos="100000">
-              <a:schemeClr val="bg1">
-                <a:lumMod val="65000"/>
+            <a:gs pos="0">
+              <a:schemeClr val="accent1">
+                <a:lumMod val="20000"/>
+                <a:lumOff val="80000"/>
               </a:schemeClr>
             </a:gs>
           </a:gsLst>
@@ -3727,43 +3976,46 @@
       </p:grpSpPr>
       <p:sp>
         <p:nvSpPr>
-          <p:cNvPr id="4" name="Rectangle 3"/>
+          <p:cNvPr id="2" name="Right Triangle 1"/>
           <p:cNvSpPr/>
           <p:nvPr/>
         </p:nvSpPr>
         <p:spPr>
-          <a:xfrm>
-            <a:off x="0" y="0"/>
-            <a:ext cx="2546555" cy="6858000"/>
-          </a:xfrm>
-          <a:prstGeom prst="rect">
+          <a:xfrm rot="9644380">
+            <a:off x="-3413628" y="-2023368"/>
+            <a:ext cx="18104378" cy="11379632"/>
+          </a:xfrm>
+          <a:prstGeom prst="rtTriangle">
             <a:avLst/>
           </a:prstGeom>
-          <a:gradFill>
+          <a:gradFill flip="none" rotWithShape="1">
             <a:gsLst>
               <a:gs pos="0">
-                <a:schemeClr val="accent6">
-                  <a:lumMod val="50000"/>
+                <a:schemeClr val="accent5">
+                  <a:lumMod val="89000"/>
                 </a:schemeClr>
               </a:gs>
-              <a:gs pos="100000">
-                <a:schemeClr val="accent6">
+              <a:gs pos="23000">
+                <a:schemeClr val="accent5">
+                  <a:lumMod val="89000"/>
+                </a:schemeClr>
+              </a:gs>
+              <a:gs pos="69000">
+                <a:schemeClr val="accent5">
                   <a:lumMod val="75000"/>
                 </a:schemeClr>
               </a:gs>
+              <a:gs pos="97000">
+                <a:schemeClr val="accent5">
+                  <a:lumMod val="70000"/>
+                </a:schemeClr>
+              </a:gs>
             </a:gsLst>
-            <a:lin ang="5400000" scaled="0"/>
+            <a:path path="circle">
+              <a:fillToRect l="50000" t="50000" r="50000" b="50000"/>
+            </a:path>
+            <a:tileRect/>
           </a:gradFill>
-          <a:ln>
-            <a:noFill/>
-          </a:ln>
-          <a:effectLst>
-            <a:outerShdw blurRad="50800" dist="38100" dir="5400000" algn="t" rotWithShape="0">
-              <a:prstClr val="black">
-                <a:alpha val="40000"/>
-              </a:prstClr>
-            </a:outerShdw>
-          </a:effectLst>
         </p:spPr>
         <p:style>
           <a:lnRef idx="2">
@@ -3792,43 +4044,473 @@
       </p:sp>
       <p:sp>
         <p:nvSpPr>
+          <p:cNvPr id="12" name="Right Triangle 11"/>
+          <p:cNvSpPr/>
+          <p:nvPr/>
+        </p:nvSpPr>
+        <p:spPr>
+          <a:xfrm rot="10602810">
+            <a:off x="-2798872" y="-4396874"/>
+            <a:ext cx="18104378" cy="11379632"/>
+          </a:xfrm>
+          <a:prstGeom prst="rtTriangle">
+            <a:avLst/>
+          </a:prstGeom>
+          <a:gradFill flip="none" rotWithShape="1">
+            <a:gsLst>
+              <a:gs pos="0">
+                <a:schemeClr val="bg1">
+                  <a:lumMod val="95000"/>
+                  <a:shade val="30000"/>
+                  <a:satMod val="115000"/>
+                </a:schemeClr>
+              </a:gs>
+              <a:gs pos="50000">
+                <a:schemeClr val="bg1">
+                  <a:lumMod val="95000"/>
+                  <a:shade val="67500"/>
+                  <a:satMod val="115000"/>
+                </a:schemeClr>
+              </a:gs>
+              <a:gs pos="100000">
+                <a:schemeClr val="bg1">
+                  <a:lumMod val="95000"/>
+                  <a:shade val="100000"/>
+                  <a:satMod val="115000"/>
+                </a:schemeClr>
+              </a:gs>
+            </a:gsLst>
+            <a:lin ang="2700000" scaled="1"/>
+            <a:tileRect/>
+          </a:gradFill>
+          <a:ln>
+            <a:noFill/>
+          </a:ln>
+        </p:spPr>
+        <p:style>
+          <a:lnRef idx="2">
+            <a:schemeClr val="accent1">
+              <a:shade val="50000"/>
+            </a:schemeClr>
+          </a:lnRef>
+          <a:fillRef idx="1">
+            <a:schemeClr val="accent1"/>
+          </a:fillRef>
+          <a:effectRef idx="0">
+            <a:schemeClr val="accent1"/>
+          </a:effectRef>
+          <a:fontRef idx="minor">
+            <a:schemeClr val="lt1"/>
+          </a:fontRef>
+        </p:style>
+        <p:txBody>
+          <a:bodyPr rtlCol="0" anchor="ctr"/>
+          <a:lstStyle/>
+          <a:p>
+            <a:pPr algn="ctr"/>
+            <a:endParaRPr lang="en-US"/>
+          </a:p>
+        </p:txBody>
+      </p:sp>
+      <p:sp>
+        <p:nvSpPr>
+          <p:cNvPr id="11" name="Right Triangle 10"/>
+          <p:cNvSpPr/>
+          <p:nvPr/>
+        </p:nvSpPr>
+        <p:spPr>
+          <a:xfrm rot="10800000">
+            <a:off x="-2951272" y="-4549274"/>
+            <a:ext cx="18104378" cy="11379632"/>
+          </a:xfrm>
+          <a:prstGeom prst="rtTriangle">
+            <a:avLst/>
+          </a:prstGeom>
+          <a:gradFill flip="none" rotWithShape="1">
+            <a:gsLst>
+              <a:gs pos="0">
+                <a:schemeClr val="accent1">
+                  <a:lumMod val="50000"/>
+                  <a:shade val="30000"/>
+                  <a:satMod val="115000"/>
+                </a:schemeClr>
+              </a:gs>
+              <a:gs pos="50000">
+                <a:schemeClr val="accent1">
+                  <a:lumMod val="50000"/>
+                  <a:shade val="67500"/>
+                  <a:satMod val="115000"/>
+                </a:schemeClr>
+              </a:gs>
+              <a:gs pos="100000">
+                <a:schemeClr val="accent1">
+                  <a:lumMod val="50000"/>
+                  <a:shade val="100000"/>
+                  <a:satMod val="115000"/>
+                </a:schemeClr>
+              </a:gs>
+            </a:gsLst>
+            <a:lin ang="16200000" scaled="1"/>
+            <a:tileRect/>
+          </a:gradFill>
+          <a:ln>
+            <a:noFill/>
+          </a:ln>
+        </p:spPr>
+        <p:style>
+          <a:lnRef idx="2">
+            <a:schemeClr val="accent1">
+              <a:shade val="50000"/>
+            </a:schemeClr>
+          </a:lnRef>
+          <a:fillRef idx="1">
+            <a:schemeClr val="accent1"/>
+          </a:fillRef>
+          <a:effectRef idx="0">
+            <a:schemeClr val="accent1"/>
+          </a:effectRef>
+          <a:fontRef idx="minor">
+            <a:schemeClr val="lt1"/>
+          </a:fontRef>
+        </p:style>
+        <p:txBody>
+          <a:bodyPr rtlCol="0" anchor="ctr"/>
+          <a:lstStyle/>
+          <a:p>
+            <a:pPr algn="ctr"/>
+            <a:endParaRPr lang="en-US"/>
+          </a:p>
+        </p:txBody>
+      </p:sp>
+      <p:sp>
+        <p:nvSpPr>
           <p:cNvPr id="5" name="Rounded Rectangle 4"/>
           <p:cNvSpPr/>
           <p:nvPr/>
         </p:nvSpPr>
         <p:spPr>
           <a:xfrm>
-            <a:off x="2389238" y="344129"/>
-            <a:ext cx="9566787" cy="6213987"/>
+            <a:off x="314633" y="1140542"/>
+            <a:ext cx="11572568" cy="5417574"/>
           </a:xfrm>
           <a:prstGeom prst="roundRect">
             <a:avLst>
               <a:gd name="adj" fmla="val 1787"/>
             </a:avLst>
           </a:prstGeom>
-          <a:ln>
+          <a:solidFill>
+            <a:schemeClr val="bg1">
+              <a:alpha val="90000"/>
+            </a:schemeClr>
+          </a:solidFill>
+          <a:ln w="19050">
+            <a:solidFill>
+              <a:schemeClr val="bg1">
+                <a:lumMod val="65000"/>
+              </a:schemeClr>
+            </a:solidFill>
+          </a:ln>
+        </p:spPr>
+        <p:style>
+          <a:lnRef idx="2">
+            <a:schemeClr val="accent1">
+              <a:shade val="50000"/>
+            </a:schemeClr>
+          </a:lnRef>
+          <a:fillRef idx="1">
+            <a:schemeClr val="accent1"/>
+          </a:fillRef>
+          <a:effectRef idx="0">
+            <a:schemeClr val="accent1"/>
+          </a:effectRef>
+          <a:fontRef idx="minor">
+            <a:schemeClr val="lt1"/>
+          </a:fontRef>
+        </p:style>
+        <p:txBody>
+          <a:bodyPr rtlCol="0" anchor="ctr"/>
+          <a:lstStyle/>
+          <a:p>
+            <a:pPr algn="ctr"/>
+            <a:endParaRPr lang="en-US"/>
+          </a:p>
+        </p:txBody>
+      </p:sp>
+      <p:sp>
+        <p:nvSpPr>
+          <p:cNvPr id="7" name="Rounded Rectangle 6"/>
+          <p:cNvSpPr/>
+          <p:nvPr/>
+        </p:nvSpPr>
+        <p:spPr>
+          <a:xfrm>
+            <a:off x="604684" y="1562792"/>
+            <a:ext cx="3475703" cy="1272875"/>
+          </a:xfrm>
+          <a:prstGeom prst="roundRect">
+            <a:avLst>
+              <a:gd name="adj" fmla="val 0"/>
+            </a:avLst>
+          </a:prstGeom>
+          <a:gradFill flip="none" rotWithShape="1">
+            <a:gsLst>
+              <a:gs pos="0">
+                <a:srgbClr val="4780FF">
+                  <a:shade val="30000"/>
+                  <a:satMod val="115000"/>
+                </a:srgbClr>
+              </a:gs>
+              <a:gs pos="50000">
+                <a:srgbClr val="4780FF">
+                  <a:shade val="67500"/>
+                  <a:satMod val="115000"/>
+                </a:srgbClr>
+              </a:gs>
+              <a:gs pos="100000">
+                <a:srgbClr val="4780FF">
+                  <a:shade val="100000"/>
+                  <a:satMod val="115000"/>
+                </a:srgbClr>
+              </a:gs>
+            </a:gsLst>
+            <a:lin ang="18900000" scaled="1"/>
+            <a:tileRect/>
+          </a:gradFill>
+          <a:ln w="9525">
             <a:noFill/>
           </a:ln>
           <a:effectLst>
-            <a:outerShdw blurRad="44450" dist="27940" dir="5400000" algn="ctr">
-              <a:srgbClr val="000000">
-                <a:alpha val="32000"/>
-              </a:srgbClr>
+            <a:outerShdw blurRad="63500" sx="102000" sy="102000" algn="ctr" rotWithShape="0">
+              <a:prstClr val="black">
+                <a:alpha val="15000"/>
+              </a:prstClr>
             </a:outerShdw>
           </a:effectLst>
         </p:spPr>
         <p:style>
           <a:lnRef idx="2">
-            <a:schemeClr val="accent6"/>
+            <a:schemeClr val="accent1">
+              <a:shade val="50000"/>
+            </a:schemeClr>
           </a:lnRef>
           <a:fillRef idx="1">
-            <a:schemeClr val="lt1"/>
+            <a:schemeClr val="accent1"/>
           </a:fillRef>
           <a:effectRef idx="0">
-            <a:schemeClr val="accent6"/>
+            <a:schemeClr val="accent1"/>
           </a:effectRef>
           <a:fontRef idx="minor">
-            <a:schemeClr val="dk1"/>
+            <a:schemeClr val="lt1"/>
+          </a:fontRef>
+        </p:style>
+        <p:txBody>
+          <a:bodyPr rtlCol="0" anchor="ctr"/>
+          <a:lstStyle/>
+          <a:p>
+            <a:pPr algn="ctr"/>
+            <a:endParaRPr lang="en-US"/>
+          </a:p>
+        </p:txBody>
+      </p:sp>
+      <p:sp>
+        <p:nvSpPr>
+          <p:cNvPr id="8" name="Rounded Rectangle 7"/>
+          <p:cNvSpPr/>
+          <p:nvPr/>
+        </p:nvSpPr>
+        <p:spPr>
+          <a:xfrm>
+            <a:off x="4348316" y="1562792"/>
+            <a:ext cx="3475703" cy="1272874"/>
+          </a:xfrm>
+          <a:prstGeom prst="roundRect">
+            <a:avLst>
+              <a:gd name="adj" fmla="val 0"/>
+            </a:avLst>
+          </a:prstGeom>
+          <a:gradFill flip="none" rotWithShape="1">
+            <a:gsLst>
+              <a:gs pos="0">
+                <a:srgbClr val="0070C0">
+                  <a:shade val="30000"/>
+                  <a:satMod val="115000"/>
+                </a:srgbClr>
+              </a:gs>
+              <a:gs pos="50000">
+                <a:srgbClr val="0070C0">
+                  <a:shade val="67500"/>
+                  <a:satMod val="115000"/>
+                </a:srgbClr>
+              </a:gs>
+              <a:gs pos="100000">
+                <a:srgbClr val="0070C0">
+                  <a:shade val="100000"/>
+                  <a:satMod val="115000"/>
+                </a:srgbClr>
+              </a:gs>
+            </a:gsLst>
+            <a:lin ang="18900000" scaled="1"/>
+            <a:tileRect/>
+          </a:gradFill>
+          <a:ln w="9525">
+            <a:noFill/>
+          </a:ln>
+          <a:effectLst>
+            <a:outerShdw blurRad="63500" sx="102000" sy="102000" algn="ctr" rotWithShape="0">
+              <a:prstClr val="black">
+                <a:alpha val="15000"/>
+              </a:prstClr>
+            </a:outerShdw>
+          </a:effectLst>
+        </p:spPr>
+        <p:style>
+          <a:lnRef idx="2">
+            <a:schemeClr val="accent1">
+              <a:shade val="50000"/>
+            </a:schemeClr>
+          </a:lnRef>
+          <a:fillRef idx="1">
+            <a:schemeClr val="accent1"/>
+          </a:fillRef>
+          <a:effectRef idx="0">
+            <a:schemeClr val="accent1"/>
+          </a:effectRef>
+          <a:fontRef idx="minor">
+            <a:schemeClr val="lt1"/>
+          </a:fontRef>
+        </p:style>
+        <p:txBody>
+          <a:bodyPr rtlCol="0" anchor="ctr"/>
+          <a:lstStyle/>
+          <a:p>
+            <a:pPr algn="ctr"/>
+            <a:endParaRPr lang="en-US"/>
+          </a:p>
+        </p:txBody>
+      </p:sp>
+      <p:sp>
+        <p:nvSpPr>
+          <p:cNvPr id="9" name="Rounded Rectangle 8"/>
+          <p:cNvSpPr/>
+          <p:nvPr/>
+        </p:nvSpPr>
+        <p:spPr>
+          <a:xfrm>
+            <a:off x="8091949" y="1562792"/>
+            <a:ext cx="3475703" cy="1272875"/>
+          </a:xfrm>
+          <a:prstGeom prst="roundRect">
+            <a:avLst>
+              <a:gd name="adj" fmla="val 0"/>
+            </a:avLst>
+          </a:prstGeom>
+          <a:gradFill flip="none" rotWithShape="1">
+            <a:gsLst>
+              <a:gs pos="0">
+                <a:schemeClr val="accent5">
+                  <a:lumMod val="75000"/>
+                  <a:shade val="30000"/>
+                  <a:satMod val="115000"/>
+                </a:schemeClr>
+              </a:gs>
+              <a:gs pos="50000">
+                <a:schemeClr val="accent5">
+                  <a:lumMod val="75000"/>
+                  <a:shade val="67500"/>
+                  <a:satMod val="115000"/>
+                </a:schemeClr>
+              </a:gs>
+              <a:gs pos="100000">
+                <a:schemeClr val="accent5">
+                  <a:lumMod val="75000"/>
+                  <a:shade val="100000"/>
+                  <a:satMod val="115000"/>
+                </a:schemeClr>
+              </a:gs>
+            </a:gsLst>
+            <a:lin ang="18900000" scaled="1"/>
+            <a:tileRect/>
+          </a:gradFill>
+          <a:ln w="9525">
+            <a:noFill/>
+          </a:ln>
+          <a:effectLst>
+            <a:outerShdw blurRad="63500" sx="102000" sy="102000" algn="ctr" rotWithShape="0">
+              <a:prstClr val="black">
+                <a:alpha val="15000"/>
+              </a:prstClr>
+            </a:outerShdw>
+          </a:effectLst>
+        </p:spPr>
+        <p:style>
+          <a:lnRef idx="2">
+            <a:schemeClr val="accent1">
+              <a:shade val="50000"/>
+            </a:schemeClr>
+          </a:lnRef>
+          <a:fillRef idx="1">
+            <a:schemeClr val="accent1"/>
+          </a:fillRef>
+          <a:effectRef idx="0">
+            <a:schemeClr val="accent1"/>
+          </a:effectRef>
+          <a:fontRef idx="minor">
+            <a:schemeClr val="lt1"/>
+          </a:fontRef>
+        </p:style>
+        <p:txBody>
+          <a:bodyPr rtlCol="0" anchor="ctr"/>
+          <a:lstStyle/>
+          <a:p>
+            <a:pPr algn="ctr"/>
+            <a:endParaRPr lang="en-US"/>
+          </a:p>
+        </p:txBody>
+      </p:sp>
+      <p:sp>
+        <p:nvSpPr>
+          <p:cNvPr id="10" name="Rounded Rectangle 9"/>
+          <p:cNvSpPr/>
+          <p:nvPr/>
+        </p:nvSpPr>
+        <p:spPr>
+          <a:xfrm>
+            <a:off x="604684" y="3087329"/>
+            <a:ext cx="10962968" cy="3073809"/>
+          </a:xfrm>
+          <a:prstGeom prst="roundRect">
+            <a:avLst>
+              <a:gd name="adj" fmla="val 0"/>
+            </a:avLst>
+          </a:prstGeom>
+          <a:solidFill>
+            <a:schemeClr val="bg1"/>
+          </a:solidFill>
+          <a:ln w="9525">
+            <a:noFill/>
+          </a:ln>
+          <a:effectLst>
+            <a:outerShdw blurRad="50800" dist="38100" dir="5400000" sx="101000" sy="101000" algn="t" rotWithShape="0">
+              <a:prstClr val="black">
+                <a:alpha val="10000"/>
+              </a:prstClr>
+            </a:outerShdw>
+          </a:effectLst>
+        </p:spPr>
+        <p:style>
+          <a:lnRef idx="2">
+            <a:schemeClr val="accent1">
+              <a:shade val="50000"/>
+            </a:schemeClr>
+          </a:lnRef>
+          <a:fillRef idx="1">
+            <a:schemeClr val="accent1"/>
+          </a:fillRef>
+          <a:effectRef idx="0">
+            <a:schemeClr val="accent1"/>
+          </a:effectRef>
+          <a:fontRef idx="minor">
+            <a:schemeClr val="lt1"/>
           </a:fontRef>
         </p:style>
         <p:txBody>
@@ -3843,20 +4525,13 @@
     </p:spTree>
     <p:extLst>
       <p:ext uri="{BB962C8B-B14F-4D97-AF65-F5344CB8AC3E}">
-        <p14:creationId xmlns:p14="http://schemas.microsoft.com/office/powerpoint/2010/main" val="3536020758"/>
+        <p14:creationId xmlns:p14="http://schemas.microsoft.com/office/powerpoint/2010/main" val="3734860744"/>
       </p:ext>
     </p:extLst>
   </p:cSld>
   <p:clrMapOvr>
     <a:masterClrMapping/>
   </p:clrMapOvr>
-  <p:timing>
-    <p:tnLst>
-      <p:par>
-        <p:cTn id="1" dur="indefinite" restart="never" nodeType="tmRoot"/>
-      </p:par>
-    </p:tnLst>
-  </p:timing>
 </p:sld>
 </file>
 
@@ -4012,298 +4687,16 @@
           </a:p>
         </p:txBody>
       </p:sp>
-      <p:sp>
-        <p:nvSpPr>
-          <p:cNvPr id="12" name="Rounded Rectangle 11"/>
-          <p:cNvSpPr/>
-          <p:nvPr/>
-        </p:nvSpPr>
-        <p:spPr>
-          <a:xfrm>
-            <a:off x="2681166" y="4461965"/>
-            <a:ext cx="2800227" cy="1696824"/>
-          </a:xfrm>
-          <a:prstGeom prst="roundRect">
-            <a:avLst>
-              <a:gd name="adj" fmla="val 5380"/>
-            </a:avLst>
-          </a:prstGeom>
-          <a:solidFill>
-            <a:schemeClr val="bg1"/>
-          </a:solidFill>
-          <a:ln w="9525">
-            <a:noFill/>
-          </a:ln>
-          <a:effectLst>
-            <a:outerShdw blurRad="63500" sx="102000" sy="102000" algn="ctr" rotWithShape="0">
-              <a:prstClr val="black">
-                <a:alpha val="15000"/>
-              </a:prstClr>
-            </a:outerShdw>
-          </a:effectLst>
-        </p:spPr>
-        <p:style>
-          <a:lnRef idx="2">
-            <a:schemeClr val="accent1">
-              <a:shade val="50000"/>
-            </a:schemeClr>
-          </a:lnRef>
-          <a:fillRef idx="1">
-            <a:schemeClr val="accent1"/>
-          </a:fillRef>
-          <a:effectRef idx="0">
-            <a:schemeClr val="accent1"/>
-          </a:effectRef>
-          <a:fontRef idx="minor">
-            <a:schemeClr val="lt1"/>
-          </a:fontRef>
-        </p:style>
-        <p:txBody>
-          <a:bodyPr rtlCol="0" anchor="ctr"/>
-          <a:lstStyle/>
-          <a:p>
-            <a:pPr algn="ctr"/>
-            <a:endParaRPr lang="en-US"/>
-          </a:p>
-        </p:txBody>
-      </p:sp>
-      <p:sp>
-        <p:nvSpPr>
-          <p:cNvPr id="13" name="Rounded Rectangle 12"/>
-          <p:cNvSpPr/>
-          <p:nvPr/>
-        </p:nvSpPr>
-        <p:spPr>
-          <a:xfrm>
-            <a:off x="5770015" y="4461965"/>
-            <a:ext cx="2800227" cy="1696824"/>
-          </a:xfrm>
-          <a:prstGeom prst="roundRect">
-            <a:avLst>
-              <a:gd name="adj" fmla="val 5380"/>
-            </a:avLst>
-          </a:prstGeom>
-          <a:solidFill>
-            <a:schemeClr val="bg1"/>
-          </a:solidFill>
-          <a:ln w="9525">
-            <a:noFill/>
-          </a:ln>
-          <a:effectLst>
-            <a:outerShdw blurRad="63500" sx="102000" sy="102000" algn="ctr" rotWithShape="0">
-              <a:prstClr val="black">
-                <a:alpha val="15000"/>
-              </a:prstClr>
-            </a:outerShdw>
-          </a:effectLst>
-        </p:spPr>
-        <p:style>
-          <a:lnRef idx="2">
-            <a:schemeClr val="accent1">
-              <a:shade val="50000"/>
-            </a:schemeClr>
-          </a:lnRef>
-          <a:fillRef idx="1">
-            <a:schemeClr val="accent1"/>
-          </a:fillRef>
-          <a:effectRef idx="0">
-            <a:schemeClr val="accent1"/>
-          </a:effectRef>
-          <a:fontRef idx="minor">
-            <a:schemeClr val="lt1"/>
-          </a:fontRef>
-        </p:style>
-        <p:txBody>
-          <a:bodyPr rtlCol="0" anchor="ctr"/>
-          <a:lstStyle/>
-          <a:p>
-            <a:pPr algn="ctr"/>
-            <a:endParaRPr lang="en-US"/>
-          </a:p>
-        </p:txBody>
-      </p:sp>
-      <p:sp>
-        <p:nvSpPr>
-          <p:cNvPr id="14" name="Rounded Rectangle 13"/>
-          <p:cNvSpPr/>
-          <p:nvPr/>
-        </p:nvSpPr>
-        <p:spPr>
-          <a:xfrm>
-            <a:off x="8858864" y="4461965"/>
-            <a:ext cx="2800227" cy="1696824"/>
-          </a:xfrm>
-          <a:prstGeom prst="roundRect">
-            <a:avLst>
-              <a:gd name="adj" fmla="val 5380"/>
-            </a:avLst>
-          </a:prstGeom>
-          <a:solidFill>
-            <a:schemeClr val="bg1"/>
-          </a:solidFill>
-          <a:ln w="9525">
-            <a:noFill/>
-          </a:ln>
-          <a:effectLst>
-            <a:outerShdw blurRad="63500" sx="102000" sy="102000" algn="ctr" rotWithShape="0">
-              <a:prstClr val="black">
-                <a:alpha val="15000"/>
-              </a:prstClr>
-            </a:outerShdw>
-          </a:effectLst>
-        </p:spPr>
-        <p:style>
-          <a:lnRef idx="2">
-            <a:schemeClr val="accent1">
-              <a:shade val="50000"/>
-            </a:schemeClr>
-          </a:lnRef>
-          <a:fillRef idx="1">
-            <a:schemeClr val="accent1"/>
-          </a:fillRef>
-          <a:effectRef idx="0">
-            <a:schemeClr val="accent1"/>
-          </a:effectRef>
-          <a:fontRef idx="minor">
-            <a:schemeClr val="lt1"/>
-          </a:fontRef>
-        </p:style>
-        <p:txBody>
-          <a:bodyPr rtlCol="0" anchor="ctr"/>
-          <a:lstStyle/>
-          <a:p>
-            <a:pPr algn="ctr"/>
-            <a:endParaRPr lang="en-US"/>
-          </a:p>
-        </p:txBody>
-      </p:sp>
-      <p:sp>
-        <p:nvSpPr>
-          <p:cNvPr id="15" name="Rounded Rectangle 14"/>
-          <p:cNvSpPr/>
-          <p:nvPr/>
-        </p:nvSpPr>
-        <p:spPr>
-          <a:xfrm>
-            <a:off x="2681166" y="2236433"/>
-            <a:ext cx="4297378" cy="1957245"/>
-          </a:xfrm>
-          <a:prstGeom prst="roundRect">
-            <a:avLst>
-              <a:gd name="adj" fmla="val 5380"/>
-            </a:avLst>
-          </a:prstGeom>
-          <a:solidFill>
-            <a:schemeClr val="bg1"/>
-          </a:solidFill>
-          <a:ln w="9525">
-            <a:noFill/>
-          </a:ln>
-          <a:effectLst>
-            <a:outerShdw blurRad="63500" sx="102000" sy="102000" algn="ctr" rotWithShape="0">
-              <a:prstClr val="black">
-                <a:alpha val="15000"/>
-              </a:prstClr>
-            </a:outerShdw>
-          </a:effectLst>
-        </p:spPr>
-        <p:style>
-          <a:lnRef idx="2">
-            <a:schemeClr val="accent1">
-              <a:shade val="50000"/>
-            </a:schemeClr>
-          </a:lnRef>
-          <a:fillRef idx="1">
-            <a:schemeClr val="accent1"/>
-          </a:fillRef>
-          <a:effectRef idx="0">
-            <a:schemeClr val="accent1"/>
-          </a:effectRef>
-          <a:fontRef idx="minor">
-            <a:schemeClr val="lt1"/>
-          </a:fontRef>
-        </p:style>
-        <p:txBody>
-          <a:bodyPr rtlCol="0" anchor="ctr"/>
-          <a:lstStyle/>
-          <a:p>
-            <a:pPr algn="ctr"/>
-            <a:endParaRPr lang="en-US"/>
-          </a:p>
-        </p:txBody>
-      </p:sp>
-      <p:sp>
-        <p:nvSpPr>
-          <p:cNvPr id="16" name="Rounded Rectangle 15"/>
-          <p:cNvSpPr/>
-          <p:nvPr/>
-        </p:nvSpPr>
-        <p:spPr>
-          <a:xfrm>
-            <a:off x="7273636" y="2236433"/>
-            <a:ext cx="4385455" cy="1957245"/>
-          </a:xfrm>
-          <a:prstGeom prst="roundRect">
-            <a:avLst>
-              <a:gd name="adj" fmla="val 5380"/>
-            </a:avLst>
-          </a:prstGeom>
-          <a:solidFill>
-            <a:schemeClr val="bg1"/>
-          </a:solidFill>
-          <a:ln w="9525">
-            <a:noFill/>
-          </a:ln>
-          <a:effectLst>
-            <a:outerShdw blurRad="63500" sx="102000" sy="102000" algn="ctr" rotWithShape="0">
-              <a:prstClr val="black">
-                <a:alpha val="15000"/>
-              </a:prstClr>
-            </a:outerShdw>
-          </a:effectLst>
-        </p:spPr>
-        <p:style>
-          <a:lnRef idx="2">
-            <a:schemeClr val="accent1">
-              <a:shade val="50000"/>
-            </a:schemeClr>
-          </a:lnRef>
-          <a:fillRef idx="1">
-            <a:schemeClr val="accent1"/>
-          </a:fillRef>
-          <a:effectRef idx="0">
-            <a:schemeClr val="accent1"/>
-          </a:effectRef>
-          <a:fontRef idx="minor">
-            <a:schemeClr val="lt1"/>
-          </a:fontRef>
-        </p:style>
-        <p:txBody>
-          <a:bodyPr rtlCol="0" anchor="ctr"/>
-          <a:lstStyle/>
-          <a:p>
-            <a:pPr algn="ctr"/>
-            <a:endParaRPr lang="en-US"/>
-          </a:p>
-        </p:txBody>
-      </p:sp>
     </p:spTree>
     <p:extLst>
       <p:ext uri="{BB962C8B-B14F-4D97-AF65-F5344CB8AC3E}">
-        <p14:creationId xmlns:p14="http://schemas.microsoft.com/office/powerpoint/2010/main" val="1508829368"/>
+        <p14:creationId xmlns:p14="http://schemas.microsoft.com/office/powerpoint/2010/main" val="3536020758"/>
       </p:ext>
     </p:extLst>
   </p:cSld>
   <p:clrMapOvr>
     <a:masterClrMapping/>
   </p:clrMapOvr>
-  <p:timing>
-    <p:tnLst>
-      <p:par>
-        <p:cTn id="1" dur="indefinite" restart="never" nodeType="tmRoot"/>
-      </p:par>
-    </p:tnLst>
-  </p:timing>
 </p:sld>
 </file>
 
@@ -4425,6 +4818,446 @@
               <a:gd name="adj" fmla="val 1787"/>
             </a:avLst>
           </a:prstGeom>
+          <a:ln>
+            <a:noFill/>
+          </a:ln>
+          <a:effectLst>
+            <a:outerShdw blurRad="44450" dist="27940" dir="5400000" algn="ctr">
+              <a:srgbClr val="000000">
+                <a:alpha val="32000"/>
+              </a:srgbClr>
+            </a:outerShdw>
+          </a:effectLst>
+        </p:spPr>
+        <p:style>
+          <a:lnRef idx="2">
+            <a:schemeClr val="accent6"/>
+          </a:lnRef>
+          <a:fillRef idx="1">
+            <a:schemeClr val="lt1"/>
+          </a:fillRef>
+          <a:effectRef idx="0">
+            <a:schemeClr val="accent6"/>
+          </a:effectRef>
+          <a:fontRef idx="minor">
+            <a:schemeClr val="dk1"/>
+          </a:fontRef>
+        </p:style>
+        <p:txBody>
+          <a:bodyPr rtlCol="0" anchor="ctr"/>
+          <a:lstStyle/>
+          <a:p>
+            <a:pPr algn="ctr"/>
+            <a:endParaRPr lang="en-US"/>
+          </a:p>
+        </p:txBody>
+      </p:sp>
+      <p:sp>
+        <p:nvSpPr>
+          <p:cNvPr id="12" name="Rounded Rectangle 11"/>
+          <p:cNvSpPr/>
+          <p:nvPr/>
+        </p:nvSpPr>
+        <p:spPr>
+          <a:xfrm>
+            <a:off x="2681166" y="4461965"/>
+            <a:ext cx="2800227" cy="1696824"/>
+          </a:xfrm>
+          <a:prstGeom prst="roundRect">
+            <a:avLst>
+              <a:gd name="adj" fmla="val 5380"/>
+            </a:avLst>
+          </a:prstGeom>
+          <a:solidFill>
+            <a:schemeClr val="bg1"/>
+          </a:solidFill>
+          <a:ln w="9525">
+            <a:noFill/>
+          </a:ln>
+          <a:effectLst>
+            <a:outerShdw blurRad="63500" sx="102000" sy="102000" algn="ctr" rotWithShape="0">
+              <a:prstClr val="black">
+                <a:alpha val="15000"/>
+              </a:prstClr>
+            </a:outerShdw>
+          </a:effectLst>
+        </p:spPr>
+        <p:style>
+          <a:lnRef idx="2">
+            <a:schemeClr val="accent1">
+              <a:shade val="50000"/>
+            </a:schemeClr>
+          </a:lnRef>
+          <a:fillRef idx="1">
+            <a:schemeClr val="accent1"/>
+          </a:fillRef>
+          <a:effectRef idx="0">
+            <a:schemeClr val="accent1"/>
+          </a:effectRef>
+          <a:fontRef idx="minor">
+            <a:schemeClr val="lt1"/>
+          </a:fontRef>
+        </p:style>
+        <p:txBody>
+          <a:bodyPr rtlCol="0" anchor="ctr"/>
+          <a:lstStyle/>
+          <a:p>
+            <a:pPr algn="ctr"/>
+            <a:endParaRPr lang="en-US"/>
+          </a:p>
+        </p:txBody>
+      </p:sp>
+      <p:sp>
+        <p:nvSpPr>
+          <p:cNvPr id="13" name="Rounded Rectangle 12"/>
+          <p:cNvSpPr/>
+          <p:nvPr/>
+        </p:nvSpPr>
+        <p:spPr>
+          <a:xfrm>
+            <a:off x="5770015" y="4461965"/>
+            <a:ext cx="2800227" cy="1696824"/>
+          </a:xfrm>
+          <a:prstGeom prst="roundRect">
+            <a:avLst>
+              <a:gd name="adj" fmla="val 5380"/>
+            </a:avLst>
+          </a:prstGeom>
+          <a:solidFill>
+            <a:schemeClr val="bg1"/>
+          </a:solidFill>
+          <a:ln w="9525">
+            <a:noFill/>
+          </a:ln>
+          <a:effectLst>
+            <a:outerShdw blurRad="63500" sx="102000" sy="102000" algn="ctr" rotWithShape="0">
+              <a:prstClr val="black">
+                <a:alpha val="15000"/>
+              </a:prstClr>
+            </a:outerShdw>
+          </a:effectLst>
+        </p:spPr>
+        <p:style>
+          <a:lnRef idx="2">
+            <a:schemeClr val="accent1">
+              <a:shade val="50000"/>
+            </a:schemeClr>
+          </a:lnRef>
+          <a:fillRef idx="1">
+            <a:schemeClr val="accent1"/>
+          </a:fillRef>
+          <a:effectRef idx="0">
+            <a:schemeClr val="accent1"/>
+          </a:effectRef>
+          <a:fontRef idx="minor">
+            <a:schemeClr val="lt1"/>
+          </a:fontRef>
+        </p:style>
+        <p:txBody>
+          <a:bodyPr rtlCol="0" anchor="ctr"/>
+          <a:lstStyle/>
+          <a:p>
+            <a:pPr algn="ctr"/>
+            <a:endParaRPr lang="en-US"/>
+          </a:p>
+        </p:txBody>
+      </p:sp>
+      <p:sp>
+        <p:nvSpPr>
+          <p:cNvPr id="14" name="Rounded Rectangle 13"/>
+          <p:cNvSpPr/>
+          <p:nvPr/>
+        </p:nvSpPr>
+        <p:spPr>
+          <a:xfrm>
+            <a:off x="8858864" y="4461965"/>
+            <a:ext cx="2800227" cy="1696824"/>
+          </a:xfrm>
+          <a:prstGeom prst="roundRect">
+            <a:avLst>
+              <a:gd name="adj" fmla="val 5380"/>
+            </a:avLst>
+          </a:prstGeom>
+          <a:solidFill>
+            <a:schemeClr val="bg1"/>
+          </a:solidFill>
+          <a:ln w="9525">
+            <a:noFill/>
+          </a:ln>
+          <a:effectLst>
+            <a:outerShdw blurRad="63500" sx="102000" sy="102000" algn="ctr" rotWithShape="0">
+              <a:prstClr val="black">
+                <a:alpha val="15000"/>
+              </a:prstClr>
+            </a:outerShdw>
+          </a:effectLst>
+        </p:spPr>
+        <p:style>
+          <a:lnRef idx="2">
+            <a:schemeClr val="accent1">
+              <a:shade val="50000"/>
+            </a:schemeClr>
+          </a:lnRef>
+          <a:fillRef idx="1">
+            <a:schemeClr val="accent1"/>
+          </a:fillRef>
+          <a:effectRef idx="0">
+            <a:schemeClr val="accent1"/>
+          </a:effectRef>
+          <a:fontRef idx="minor">
+            <a:schemeClr val="lt1"/>
+          </a:fontRef>
+        </p:style>
+        <p:txBody>
+          <a:bodyPr rtlCol="0" anchor="ctr"/>
+          <a:lstStyle/>
+          <a:p>
+            <a:pPr algn="ctr"/>
+            <a:endParaRPr lang="en-US"/>
+          </a:p>
+        </p:txBody>
+      </p:sp>
+      <p:sp>
+        <p:nvSpPr>
+          <p:cNvPr id="15" name="Rounded Rectangle 14"/>
+          <p:cNvSpPr/>
+          <p:nvPr/>
+        </p:nvSpPr>
+        <p:spPr>
+          <a:xfrm>
+            <a:off x="2681166" y="2236433"/>
+            <a:ext cx="4297378" cy="1957245"/>
+          </a:xfrm>
+          <a:prstGeom prst="roundRect">
+            <a:avLst>
+              <a:gd name="adj" fmla="val 5380"/>
+            </a:avLst>
+          </a:prstGeom>
+          <a:solidFill>
+            <a:schemeClr val="bg1"/>
+          </a:solidFill>
+          <a:ln w="9525">
+            <a:noFill/>
+          </a:ln>
+          <a:effectLst>
+            <a:outerShdw blurRad="63500" sx="102000" sy="102000" algn="ctr" rotWithShape="0">
+              <a:prstClr val="black">
+                <a:alpha val="15000"/>
+              </a:prstClr>
+            </a:outerShdw>
+          </a:effectLst>
+        </p:spPr>
+        <p:style>
+          <a:lnRef idx="2">
+            <a:schemeClr val="accent1">
+              <a:shade val="50000"/>
+            </a:schemeClr>
+          </a:lnRef>
+          <a:fillRef idx="1">
+            <a:schemeClr val="accent1"/>
+          </a:fillRef>
+          <a:effectRef idx="0">
+            <a:schemeClr val="accent1"/>
+          </a:effectRef>
+          <a:fontRef idx="minor">
+            <a:schemeClr val="lt1"/>
+          </a:fontRef>
+        </p:style>
+        <p:txBody>
+          <a:bodyPr rtlCol="0" anchor="ctr"/>
+          <a:lstStyle/>
+          <a:p>
+            <a:pPr algn="ctr"/>
+            <a:endParaRPr lang="en-US"/>
+          </a:p>
+        </p:txBody>
+      </p:sp>
+      <p:sp>
+        <p:nvSpPr>
+          <p:cNvPr id="16" name="Rounded Rectangle 15"/>
+          <p:cNvSpPr/>
+          <p:nvPr/>
+        </p:nvSpPr>
+        <p:spPr>
+          <a:xfrm>
+            <a:off x="7273636" y="2236433"/>
+            <a:ext cx="4385455" cy="1957245"/>
+          </a:xfrm>
+          <a:prstGeom prst="roundRect">
+            <a:avLst>
+              <a:gd name="adj" fmla="val 5380"/>
+            </a:avLst>
+          </a:prstGeom>
+          <a:solidFill>
+            <a:schemeClr val="bg1"/>
+          </a:solidFill>
+          <a:ln w="9525">
+            <a:noFill/>
+          </a:ln>
+          <a:effectLst>
+            <a:outerShdw blurRad="63500" sx="102000" sy="102000" algn="ctr" rotWithShape="0">
+              <a:prstClr val="black">
+                <a:alpha val="15000"/>
+              </a:prstClr>
+            </a:outerShdw>
+          </a:effectLst>
+        </p:spPr>
+        <p:style>
+          <a:lnRef idx="2">
+            <a:schemeClr val="accent1">
+              <a:shade val="50000"/>
+            </a:schemeClr>
+          </a:lnRef>
+          <a:fillRef idx="1">
+            <a:schemeClr val="accent1"/>
+          </a:fillRef>
+          <a:effectRef idx="0">
+            <a:schemeClr val="accent1"/>
+          </a:effectRef>
+          <a:fontRef idx="minor">
+            <a:schemeClr val="lt1"/>
+          </a:fontRef>
+        </p:style>
+        <p:txBody>
+          <a:bodyPr rtlCol="0" anchor="ctr"/>
+          <a:lstStyle/>
+          <a:p>
+            <a:pPr algn="ctr"/>
+            <a:endParaRPr lang="en-US"/>
+          </a:p>
+        </p:txBody>
+      </p:sp>
+    </p:spTree>
+    <p:extLst>
+      <p:ext uri="{BB962C8B-B14F-4D97-AF65-F5344CB8AC3E}">
+        <p14:creationId xmlns:p14="http://schemas.microsoft.com/office/powerpoint/2010/main" val="1508829368"/>
+      </p:ext>
+    </p:extLst>
+  </p:cSld>
+  <p:clrMapOvr>
+    <a:masterClrMapping/>
+  </p:clrMapOvr>
+</p:sld>
+</file>
+
+<file path=ppt/slides/slide14.xml><?xml version="1.0" encoding="utf-8"?>
+<p:sld xmlns:a="http://schemas.openxmlformats.org/drawingml/2006/main" xmlns:r="http://schemas.openxmlformats.org/officeDocument/2006/relationships" xmlns:p="http://schemas.openxmlformats.org/presentationml/2006/main">
+  <p:cSld>
+    <p:bg>
+      <p:bgPr>
+        <a:gradFill>
+          <a:gsLst>
+            <a:gs pos="0">
+              <a:schemeClr val="bg1">
+                <a:lumMod val="85000"/>
+              </a:schemeClr>
+            </a:gs>
+            <a:gs pos="100000">
+              <a:schemeClr val="bg1">
+                <a:lumMod val="65000"/>
+              </a:schemeClr>
+            </a:gs>
+          </a:gsLst>
+          <a:lin ang="5400000" scaled="0"/>
+        </a:gradFill>
+        <a:effectLst/>
+      </p:bgPr>
+    </p:bg>
+    <p:spTree>
+      <p:nvGrpSpPr>
+        <p:cNvPr id="1" name=""/>
+        <p:cNvGrpSpPr/>
+        <p:nvPr/>
+      </p:nvGrpSpPr>
+      <p:grpSpPr>
+        <a:xfrm>
+          <a:off x="0" y="0"/>
+          <a:ext cx="0" cy="0"/>
+          <a:chOff x="0" y="0"/>
+          <a:chExt cx="0" cy="0"/>
+        </a:xfrm>
+      </p:grpSpPr>
+      <p:sp>
+        <p:nvSpPr>
+          <p:cNvPr id="4" name="Rectangle 3"/>
+          <p:cNvSpPr/>
+          <p:nvPr/>
+        </p:nvSpPr>
+        <p:spPr>
+          <a:xfrm>
+            <a:off x="0" y="0"/>
+            <a:ext cx="2546555" cy="6858000"/>
+          </a:xfrm>
+          <a:prstGeom prst="rect">
+            <a:avLst/>
+          </a:prstGeom>
+          <a:gradFill>
+            <a:gsLst>
+              <a:gs pos="0">
+                <a:schemeClr val="accent6">
+                  <a:lumMod val="50000"/>
+                </a:schemeClr>
+              </a:gs>
+              <a:gs pos="100000">
+                <a:schemeClr val="accent6">
+                  <a:lumMod val="75000"/>
+                </a:schemeClr>
+              </a:gs>
+            </a:gsLst>
+            <a:lin ang="5400000" scaled="0"/>
+          </a:gradFill>
+          <a:ln>
+            <a:noFill/>
+          </a:ln>
+          <a:effectLst>
+            <a:outerShdw blurRad="50800" dist="38100" dir="5400000" algn="t" rotWithShape="0">
+              <a:prstClr val="black">
+                <a:alpha val="40000"/>
+              </a:prstClr>
+            </a:outerShdw>
+          </a:effectLst>
+        </p:spPr>
+        <p:style>
+          <a:lnRef idx="2">
+            <a:schemeClr val="accent1">
+              <a:shade val="50000"/>
+            </a:schemeClr>
+          </a:lnRef>
+          <a:fillRef idx="1">
+            <a:schemeClr val="accent1"/>
+          </a:fillRef>
+          <a:effectRef idx="0">
+            <a:schemeClr val="accent1"/>
+          </a:effectRef>
+          <a:fontRef idx="minor">
+            <a:schemeClr val="lt1"/>
+          </a:fontRef>
+        </p:style>
+        <p:txBody>
+          <a:bodyPr rtlCol="0" anchor="ctr"/>
+          <a:lstStyle/>
+          <a:p>
+            <a:pPr algn="ctr"/>
+            <a:endParaRPr lang="en-US"/>
+          </a:p>
+        </p:txBody>
+      </p:sp>
+      <p:sp>
+        <p:nvSpPr>
+          <p:cNvPr id="5" name="Rounded Rectangle 4"/>
+          <p:cNvSpPr/>
+          <p:nvPr/>
+        </p:nvSpPr>
+        <p:spPr>
+          <a:xfrm>
+            <a:off x="2389238" y="344129"/>
+            <a:ext cx="9566787" cy="6213987"/>
+          </a:xfrm>
+          <a:prstGeom prst="roundRect">
+            <a:avLst>
+              <a:gd name="adj" fmla="val 1787"/>
+            </a:avLst>
+          </a:prstGeom>
           <a:gradFill>
             <a:gsLst>
               <a:gs pos="54000">
@@ -4874,430 +5707,6 @@
   <p:clrMapOvr>
     <a:masterClrMapping/>
   </p:clrMapOvr>
-  <p:timing>
-    <p:tnLst>
-      <p:par>
-        <p:cTn id="1" dur="indefinite" restart="never" nodeType="tmRoot"/>
-      </p:par>
-    </p:tnLst>
-  </p:timing>
-</p:sld>
-</file>
-
-<file path=ppt/slides/slide14.xml><?xml version="1.0" encoding="utf-8"?>
-<p:sld xmlns:a="http://schemas.openxmlformats.org/drawingml/2006/main" xmlns:r="http://schemas.openxmlformats.org/officeDocument/2006/relationships" xmlns:p="http://schemas.openxmlformats.org/presentationml/2006/main">
-  <p:cSld>
-    <p:bg>
-      <p:bgPr>
-        <a:gradFill flip="none" rotWithShape="1">
-          <a:gsLst>
-            <a:gs pos="0">
-              <a:srgbClr val="4E2955"/>
-            </a:gs>
-            <a:gs pos="100000">
-              <a:srgbClr val="181050"/>
-            </a:gs>
-          </a:gsLst>
-          <a:lin ang="5400000" scaled="0"/>
-          <a:tileRect/>
-        </a:gradFill>
-        <a:effectLst/>
-      </p:bgPr>
-    </p:bg>
-    <p:spTree>
-      <p:nvGrpSpPr>
-        <p:cNvPr id="1" name=""/>
-        <p:cNvGrpSpPr/>
-        <p:nvPr/>
-      </p:nvGrpSpPr>
-      <p:grpSpPr>
-        <a:xfrm>
-          <a:off x="0" y="0"/>
-          <a:ext cx="0" cy="0"/>
-          <a:chOff x="0" y="0"/>
-          <a:chExt cx="0" cy="0"/>
-        </a:xfrm>
-      </p:grpSpPr>
-      <p:sp>
-        <p:nvSpPr>
-          <p:cNvPr id="4" name="Rounded Rectangle 3"/>
-          <p:cNvSpPr/>
-          <p:nvPr/>
-        </p:nvSpPr>
-        <p:spPr>
-          <a:xfrm>
-            <a:off x="1258529" y="3814916"/>
-            <a:ext cx="4493341" cy="2576051"/>
-          </a:xfrm>
-          <a:prstGeom prst="roundRect">
-            <a:avLst/>
-          </a:prstGeom>
-          <a:gradFill>
-            <a:gsLst>
-              <a:gs pos="100000">
-                <a:srgbClr val="4E2955"/>
-              </a:gs>
-              <a:gs pos="0">
-                <a:srgbClr val="73418F"/>
-              </a:gs>
-            </a:gsLst>
-            <a:lin ang="8100000" scaled="0"/>
-          </a:gradFill>
-          <a:ln>
-            <a:noFill/>
-          </a:ln>
-          <a:effectLst>
-            <a:outerShdw blurRad="57785" dist="33020" dir="3180000" algn="ctr">
-              <a:srgbClr val="000000">
-                <a:alpha val="30000"/>
-              </a:srgbClr>
-            </a:outerShdw>
-          </a:effectLst>
-          <a:scene3d>
-            <a:camera prst="orthographicFront">
-              <a:rot lat="0" lon="0" rev="0"/>
-            </a:camera>
-            <a:lightRig rig="brightRoom" dir="t">
-              <a:rot lat="0" lon="0" rev="600000"/>
-            </a:lightRig>
-          </a:scene3d>
-          <a:sp3d prstMaterial="metal">
-            <a:bevelT w="38100" h="57150" prst="angle"/>
-          </a:sp3d>
-        </p:spPr>
-        <p:style>
-          <a:lnRef idx="2">
-            <a:schemeClr val="accent1">
-              <a:shade val="50000"/>
-            </a:schemeClr>
-          </a:lnRef>
-          <a:fillRef idx="1">
-            <a:schemeClr val="accent1"/>
-          </a:fillRef>
-          <a:effectRef idx="0">
-            <a:schemeClr val="accent1"/>
-          </a:effectRef>
-          <a:fontRef idx="minor">
-            <a:schemeClr val="lt1"/>
-          </a:fontRef>
-        </p:style>
-        <p:txBody>
-          <a:bodyPr rtlCol="0" anchor="ctr"/>
-          <a:lstStyle/>
-          <a:p>
-            <a:pPr algn="ctr"/>
-            <a:endParaRPr lang="en-US"/>
-          </a:p>
-        </p:txBody>
-      </p:sp>
-      <p:sp>
-        <p:nvSpPr>
-          <p:cNvPr id="5" name="Rounded Rectangle 4"/>
-          <p:cNvSpPr/>
-          <p:nvPr/>
-        </p:nvSpPr>
-        <p:spPr>
-          <a:xfrm>
-            <a:off x="6341807" y="3814915"/>
-            <a:ext cx="4537587" cy="2576051"/>
-          </a:xfrm>
-          <a:prstGeom prst="roundRect">
-            <a:avLst/>
-          </a:prstGeom>
-          <a:gradFill>
-            <a:gsLst>
-              <a:gs pos="100000">
-                <a:srgbClr val="4E2955"/>
-              </a:gs>
-              <a:gs pos="0">
-                <a:srgbClr val="73418F"/>
-              </a:gs>
-            </a:gsLst>
-            <a:lin ang="2700000" scaled="0"/>
-          </a:gradFill>
-          <a:ln>
-            <a:noFill/>
-          </a:ln>
-          <a:effectLst>
-            <a:outerShdw blurRad="57785" dist="33020" dir="3180000" algn="ctr">
-              <a:srgbClr val="000000">
-                <a:alpha val="30000"/>
-              </a:srgbClr>
-            </a:outerShdw>
-          </a:effectLst>
-          <a:scene3d>
-            <a:camera prst="orthographicFront">
-              <a:rot lat="0" lon="0" rev="0"/>
-            </a:camera>
-            <a:lightRig rig="brightRoom" dir="t">
-              <a:rot lat="0" lon="0" rev="600000"/>
-            </a:lightRig>
-          </a:scene3d>
-          <a:sp3d prstMaterial="metal">
-            <a:bevelT w="38100" h="57150" prst="angle"/>
-          </a:sp3d>
-        </p:spPr>
-        <p:style>
-          <a:lnRef idx="2">
-            <a:schemeClr val="accent1">
-              <a:shade val="50000"/>
-            </a:schemeClr>
-          </a:lnRef>
-          <a:fillRef idx="1">
-            <a:schemeClr val="accent1"/>
-          </a:fillRef>
-          <a:effectRef idx="0">
-            <a:schemeClr val="accent1"/>
-          </a:effectRef>
-          <a:fontRef idx="minor">
-            <a:schemeClr val="lt1"/>
-          </a:fontRef>
-        </p:style>
-        <p:txBody>
-          <a:bodyPr rtlCol="0" anchor="ctr"/>
-          <a:lstStyle/>
-          <a:p>
-            <a:pPr algn="ctr"/>
-            <a:endParaRPr lang="en-US"/>
-          </a:p>
-        </p:txBody>
-      </p:sp>
-      <p:sp>
-        <p:nvSpPr>
-          <p:cNvPr id="6" name="Rounded Rectangle 5"/>
-          <p:cNvSpPr/>
-          <p:nvPr/>
-        </p:nvSpPr>
-        <p:spPr>
-          <a:xfrm>
-            <a:off x="1258530" y="875070"/>
-            <a:ext cx="2821857" cy="2576051"/>
-          </a:xfrm>
-          <a:prstGeom prst="roundRect">
-            <a:avLst/>
-          </a:prstGeom>
-          <a:gradFill flip="none" rotWithShape="1">
-            <a:gsLst>
-              <a:gs pos="0">
-                <a:srgbClr val="4E2955"/>
-              </a:gs>
-              <a:gs pos="100000">
-                <a:srgbClr val="73418F"/>
-              </a:gs>
-            </a:gsLst>
-            <a:lin ang="2700000" scaled="0"/>
-            <a:tileRect/>
-          </a:gradFill>
-          <a:ln>
-            <a:noFill/>
-          </a:ln>
-          <a:effectLst>
-            <a:outerShdw blurRad="57785" dist="33020" dir="3180000" algn="ctr">
-              <a:srgbClr val="000000">
-                <a:alpha val="30000"/>
-              </a:srgbClr>
-            </a:outerShdw>
-          </a:effectLst>
-          <a:scene3d>
-            <a:camera prst="orthographicFront">
-              <a:rot lat="0" lon="0" rev="0"/>
-            </a:camera>
-            <a:lightRig rig="brightRoom" dir="t">
-              <a:rot lat="0" lon="0" rev="600000"/>
-            </a:lightRig>
-          </a:scene3d>
-          <a:sp3d prstMaterial="metal">
-            <a:bevelT w="38100" h="57150" prst="angle"/>
-          </a:sp3d>
-        </p:spPr>
-        <p:style>
-          <a:lnRef idx="2">
-            <a:schemeClr val="accent1">
-              <a:shade val="50000"/>
-            </a:schemeClr>
-          </a:lnRef>
-          <a:fillRef idx="1">
-            <a:schemeClr val="accent1"/>
-          </a:fillRef>
-          <a:effectRef idx="0">
-            <a:schemeClr val="accent1"/>
-          </a:effectRef>
-          <a:fontRef idx="minor">
-            <a:schemeClr val="lt1"/>
-          </a:fontRef>
-        </p:style>
-        <p:txBody>
-          <a:bodyPr rtlCol="0" anchor="ctr"/>
-          <a:lstStyle/>
-          <a:p>
-            <a:pPr algn="ctr"/>
-            <a:endParaRPr lang="en-US"/>
-          </a:p>
-        </p:txBody>
-      </p:sp>
-      <p:sp>
-        <p:nvSpPr>
-          <p:cNvPr id="8" name="Rounded Rectangle 7"/>
-          <p:cNvSpPr/>
-          <p:nvPr/>
-        </p:nvSpPr>
-        <p:spPr>
-          <a:xfrm>
-            <a:off x="4658033" y="875070"/>
-            <a:ext cx="2821857" cy="2576051"/>
-          </a:xfrm>
-          <a:prstGeom prst="roundRect">
-            <a:avLst/>
-          </a:prstGeom>
-          <a:gradFill flip="none" rotWithShape="1">
-            <a:gsLst>
-              <a:gs pos="0">
-                <a:srgbClr val="4E2955"/>
-              </a:gs>
-              <a:gs pos="100000">
-                <a:srgbClr val="73418F"/>
-              </a:gs>
-            </a:gsLst>
-            <a:lin ang="2700000" scaled="1"/>
-            <a:tileRect/>
-          </a:gradFill>
-          <a:ln>
-            <a:noFill/>
-          </a:ln>
-          <a:effectLst>
-            <a:outerShdw blurRad="57785" dist="33020" dir="3180000" algn="ctr">
-              <a:srgbClr val="000000">
-                <a:alpha val="30000"/>
-              </a:srgbClr>
-            </a:outerShdw>
-          </a:effectLst>
-          <a:scene3d>
-            <a:camera prst="orthographicFront">
-              <a:rot lat="0" lon="0" rev="0"/>
-            </a:camera>
-            <a:lightRig rig="brightRoom" dir="t">
-              <a:rot lat="0" lon="0" rev="600000"/>
-            </a:lightRig>
-          </a:scene3d>
-          <a:sp3d prstMaterial="metal">
-            <a:bevelT w="38100" h="57150" prst="angle"/>
-          </a:sp3d>
-        </p:spPr>
-        <p:style>
-          <a:lnRef idx="2">
-            <a:schemeClr val="accent1">
-              <a:shade val="50000"/>
-            </a:schemeClr>
-          </a:lnRef>
-          <a:fillRef idx="1">
-            <a:schemeClr val="accent1"/>
-          </a:fillRef>
-          <a:effectRef idx="0">
-            <a:schemeClr val="accent1"/>
-          </a:effectRef>
-          <a:fontRef idx="minor">
-            <a:schemeClr val="lt1"/>
-          </a:fontRef>
-        </p:style>
-        <p:txBody>
-          <a:bodyPr rtlCol="0" anchor="ctr"/>
-          <a:lstStyle/>
-          <a:p>
-            <a:pPr algn="ctr"/>
-            <a:endParaRPr lang="en-US"/>
-          </a:p>
-        </p:txBody>
-      </p:sp>
-      <p:sp>
-        <p:nvSpPr>
-          <p:cNvPr id="9" name="Rounded Rectangle 8"/>
-          <p:cNvSpPr/>
-          <p:nvPr/>
-        </p:nvSpPr>
-        <p:spPr>
-          <a:xfrm>
-            <a:off x="8057537" y="875070"/>
-            <a:ext cx="2821857" cy="2576051"/>
-          </a:xfrm>
-          <a:prstGeom prst="roundRect">
-            <a:avLst/>
-          </a:prstGeom>
-          <a:gradFill flip="none" rotWithShape="1">
-            <a:gsLst>
-              <a:gs pos="0">
-                <a:srgbClr val="4E2955"/>
-              </a:gs>
-              <a:gs pos="100000">
-                <a:srgbClr val="73418F"/>
-              </a:gs>
-            </a:gsLst>
-            <a:lin ang="8100000" scaled="0"/>
-            <a:tileRect/>
-          </a:gradFill>
-          <a:ln>
-            <a:noFill/>
-          </a:ln>
-          <a:effectLst>
-            <a:outerShdw blurRad="57785" dist="33020" dir="3180000" algn="ctr">
-              <a:srgbClr val="000000">
-                <a:alpha val="30000"/>
-              </a:srgbClr>
-            </a:outerShdw>
-          </a:effectLst>
-          <a:scene3d>
-            <a:camera prst="orthographicFront">
-              <a:rot lat="0" lon="0" rev="0"/>
-            </a:camera>
-            <a:lightRig rig="brightRoom" dir="t">
-              <a:rot lat="0" lon="0" rev="600000"/>
-            </a:lightRig>
-          </a:scene3d>
-          <a:sp3d prstMaterial="metal">
-            <a:bevelT w="38100" h="57150" prst="angle"/>
-          </a:sp3d>
-        </p:spPr>
-        <p:style>
-          <a:lnRef idx="2">
-            <a:schemeClr val="accent1">
-              <a:shade val="50000"/>
-            </a:schemeClr>
-          </a:lnRef>
-          <a:fillRef idx="1">
-            <a:schemeClr val="accent1"/>
-          </a:fillRef>
-          <a:effectRef idx="0">
-            <a:schemeClr val="accent1"/>
-          </a:effectRef>
-          <a:fontRef idx="minor">
-            <a:schemeClr val="lt1"/>
-          </a:fontRef>
-        </p:style>
-        <p:txBody>
-          <a:bodyPr rtlCol="0" anchor="ctr"/>
-          <a:lstStyle/>
-          <a:p>
-            <a:pPr algn="ctr"/>
-            <a:endParaRPr lang="en-US"/>
-          </a:p>
-        </p:txBody>
-      </p:sp>
-    </p:spTree>
-    <p:extLst>
-      <p:ext uri="{BB962C8B-B14F-4D97-AF65-F5344CB8AC3E}">
-        <p14:creationId xmlns:p14="http://schemas.microsoft.com/office/powerpoint/2010/main" val="2272508962"/>
-      </p:ext>
-    </p:extLst>
-  </p:cSld>
-  <p:clrMapOvr>
-    <a:masterClrMapping/>
-  </p:clrMapOvr>
-  <p:timing>
-    <p:tnLst>
-      <p:par>
-        <p:cTn id="1" dur="indefinite" restart="never" nodeType="tmRoot"/>
-      </p:par>
-    </p:tnLst>
-  </p:timing>
 </p:sld>
 </file>
 
@@ -5343,6 +5752,416 @@
         </p:nvSpPr>
         <p:spPr>
           <a:xfrm>
+            <a:off x="1258529" y="3814916"/>
+            <a:ext cx="4493341" cy="2576051"/>
+          </a:xfrm>
+          <a:prstGeom prst="roundRect">
+            <a:avLst/>
+          </a:prstGeom>
+          <a:gradFill>
+            <a:gsLst>
+              <a:gs pos="100000">
+                <a:srgbClr val="4E2955"/>
+              </a:gs>
+              <a:gs pos="0">
+                <a:srgbClr val="73418F"/>
+              </a:gs>
+            </a:gsLst>
+            <a:lin ang="8100000" scaled="0"/>
+          </a:gradFill>
+          <a:ln>
+            <a:noFill/>
+          </a:ln>
+          <a:effectLst>
+            <a:outerShdw blurRad="57785" dist="33020" dir="3180000" algn="ctr">
+              <a:srgbClr val="000000">
+                <a:alpha val="30000"/>
+              </a:srgbClr>
+            </a:outerShdw>
+          </a:effectLst>
+          <a:scene3d>
+            <a:camera prst="orthographicFront">
+              <a:rot lat="0" lon="0" rev="0"/>
+            </a:camera>
+            <a:lightRig rig="brightRoom" dir="t">
+              <a:rot lat="0" lon="0" rev="600000"/>
+            </a:lightRig>
+          </a:scene3d>
+          <a:sp3d prstMaterial="metal">
+            <a:bevelT w="38100" h="57150" prst="angle"/>
+          </a:sp3d>
+        </p:spPr>
+        <p:style>
+          <a:lnRef idx="2">
+            <a:schemeClr val="accent1">
+              <a:shade val="50000"/>
+            </a:schemeClr>
+          </a:lnRef>
+          <a:fillRef idx="1">
+            <a:schemeClr val="accent1"/>
+          </a:fillRef>
+          <a:effectRef idx="0">
+            <a:schemeClr val="accent1"/>
+          </a:effectRef>
+          <a:fontRef idx="minor">
+            <a:schemeClr val="lt1"/>
+          </a:fontRef>
+        </p:style>
+        <p:txBody>
+          <a:bodyPr rtlCol="0" anchor="ctr"/>
+          <a:lstStyle/>
+          <a:p>
+            <a:pPr algn="ctr"/>
+            <a:endParaRPr lang="en-US"/>
+          </a:p>
+        </p:txBody>
+      </p:sp>
+      <p:sp>
+        <p:nvSpPr>
+          <p:cNvPr id="5" name="Rounded Rectangle 4"/>
+          <p:cNvSpPr/>
+          <p:nvPr/>
+        </p:nvSpPr>
+        <p:spPr>
+          <a:xfrm>
+            <a:off x="6341807" y="3814915"/>
+            <a:ext cx="4537587" cy="2576051"/>
+          </a:xfrm>
+          <a:prstGeom prst="roundRect">
+            <a:avLst/>
+          </a:prstGeom>
+          <a:gradFill>
+            <a:gsLst>
+              <a:gs pos="100000">
+                <a:srgbClr val="4E2955"/>
+              </a:gs>
+              <a:gs pos="0">
+                <a:srgbClr val="73418F"/>
+              </a:gs>
+            </a:gsLst>
+            <a:lin ang="2700000" scaled="0"/>
+          </a:gradFill>
+          <a:ln>
+            <a:noFill/>
+          </a:ln>
+          <a:effectLst>
+            <a:outerShdw blurRad="57785" dist="33020" dir="3180000" algn="ctr">
+              <a:srgbClr val="000000">
+                <a:alpha val="30000"/>
+              </a:srgbClr>
+            </a:outerShdw>
+          </a:effectLst>
+          <a:scene3d>
+            <a:camera prst="orthographicFront">
+              <a:rot lat="0" lon="0" rev="0"/>
+            </a:camera>
+            <a:lightRig rig="brightRoom" dir="t">
+              <a:rot lat="0" lon="0" rev="600000"/>
+            </a:lightRig>
+          </a:scene3d>
+          <a:sp3d prstMaterial="metal">
+            <a:bevelT w="38100" h="57150" prst="angle"/>
+          </a:sp3d>
+        </p:spPr>
+        <p:style>
+          <a:lnRef idx="2">
+            <a:schemeClr val="accent1">
+              <a:shade val="50000"/>
+            </a:schemeClr>
+          </a:lnRef>
+          <a:fillRef idx="1">
+            <a:schemeClr val="accent1"/>
+          </a:fillRef>
+          <a:effectRef idx="0">
+            <a:schemeClr val="accent1"/>
+          </a:effectRef>
+          <a:fontRef idx="minor">
+            <a:schemeClr val="lt1"/>
+          </a:fontRef>
+        </p:style>
+        <p:txBody>
+          <a:bodyPr rtlCol="0" anchor="ctr"/>
+          <a:lstStyle/>
+          <a:p>
+            <a:pPr algn="ctr"/>
+            <a:endParaRPr lang="en-US"/>
+          </a:p>
+        </p:txBody>
+      </p:sp>
+      <p:sp>
+        <p:nvSpPr>
+          <p:cNvPr id="6" name="Rounded Rectangle 5"/>
+          <p:cNvSpPr/>
+          <p:nvPr/>
+        </p:nvSpPr>
+        <p:spPr>
+          <a:xfrm>
+            <a:off x="1258530" y="875070"/>
+            <a:ext cx="2821857" cy="2576051"/>
+          </a:xfrm>
+          <a:prstGeom prst="roundRect">
+            <a:avLst/>
+          </a:prstGeom>
+          <a:gradFill flip="none" rotWithShape="1">
+            <a:gsLst>
+              <a:gs pos="0">
+                <a:srgbClr val="4E2955"/>
+              </a:gs>
+              <a:gs pos="100000">
+                <a:srgbClr val="73418F"/>
+              </a:gs>
+            </a:gsLst>
+            <a:lin ang="2700000" scaled="0"/>
+            <a:tileRect/>
+          </a:gradFill>
+          <a:ln>
+            <a:noFill/>
+          </a:ln>
+          <a:effectLst>
+            <a:outerShdw blurRad="57785" dist="33020" dir="3180000" algn="ctr">
+              <a:srgbClr val="000000">
+                <a:alpha val="30000"/>
+              </a:srgbClr>
+            </a:outerShdw>
+          </a:effectLst>
+          <a:scene3d>
+            <a:camera prst="orthographicFront">
+              <a:rot lat="0" lon="0" rev="0"/>
+            </a:camera>
+            <a:lightRig rig="brightRoom" dir="t">
+              <a:rot lat="0" lon="0" rev="600000"/>
+            </a:lightRig>
+          </a:scene3d>
+          <a:sp3d prstMaterial="metal">
+            <a:bevelT w="38100" h="57150" prst="angle"/>
+          </a:sp3d>
+        </p:spPr>
+        <p:style>
+          <a:lnRef idx="2">
+            <a:schemeClr val="accent1">
+              <a:shade val="50000"/>
+            </a:schemeClr>
+          </a:lnRef>
+          <a:fillRef idx="1">
+            <a:schemeClr val="accent1"/>
+          </a:fillRef>
+          <a:effectRef idx="0">
+            <a:schemeClr val="accent1"/>
+          </a:effectRef>
+          <a:fontRef idx="minor">
+            <a:schemeClr val="lt1"/>
+          </a:fontRef>
+        </p:style>
+        <p:txBody>
+          <a:bodyPr rtlCol="0" anchor="ctr"/>
+          <a:lstStyle/>
+          <a:p>
+            <a:pPr algn="ctr"/>
+            <a:endParaRPr lang="en-US"/>
+          </a:p>
+        </p:txBody>
+      </p:sp>
+      <p:sp>
+        <p:nvSpPr>
+          <p:cNvPr id="8" name="Rounded Rectangle 7"/>
+          <p:cNvSpPr/>
+          <p:nvPr/>
+        </p:nvSpPr>
+        <p:spPr>
+          <a:xfrm>
+            <a:off x="4658033" y="875070"/>
+            <a:ext cx="2821857" cy="2576051"/>
+          </a:xfrm>
+          <a:prstGeom prst="roundRect">
+            <a:avLst/>
+          </a:prstGeom>
+          <a:gradFill flip="none" rotWithShape="1">
+            <a:gsLst>
+              <a:gs pos="0">
+                <a:srgbClr val="4E2955"/>
+              </a:gs>
+              <a:gs pos="100000">
+                <a:srgbClr val="73418F"/>
+              </a:gs>
+            </a:gsLst>
+            <a:lin ang="2700000" scaled="1"/>
+            <a:tileRect/>
+          </a:gradFill>
+          <a:ln>
+            <a:noFill/>
+          </a:ln>
+          <a:effectLst>
+            <a:outerShdw blurRad="57785" dist="33020" dir="3180000" algn="ctr">
+              <a:srgbClr val="000000">
+                <a:alpha val="30000"/>
+              </a:srgbClr>
+            </a:outerShdw>
+          </a:effectLst>
+          <a:scene3d>
+            <a:camera prst="orthographicFront">
+              <a:rot lat="0" lon="0" rev="0"/>
+            </a:camera>
+            <a:lightRig rig="brightRoom" dir="t">
+              <a:rot lat="0" lon="0" rev="600000"/>
+            </a:lightRig>
+          </a:scene3d>
+          <a:sp3d prstMaterial="metal">
+            <a:bevelT w="38100" h="57150" prst="angle"/>
+          </a:sp3d>
+        </p:spPr>
+        <p:style>
+          <a:lnRef idx="2">
+            <a:schemeClr val="accent1">
+              <a:shade val="50000"/>
+            </a:schemeClr>
+          </a:lnRef>
+          <a:fillRef idx="1">
+            <a:schemeClr val="accent1"/>
+          </a:fillRef>
+          <a:effectRef idx="0">
+            <a:schemeClr val="accent1"/>
+          </a:effectRef>
+          <a:fontRef idx="minor">
+            <a:schemeClr val="lt1"/>
+          </a:fontRef>
+        </p:style>
+        <p:txBody>
+          <a:bodyPr rtlCol="0" anchor="ctr"/>
+          <a:lstStyle/>
+          <a:p>
+            <a:pPr algn="ctr"/>
+            <a:endParaRPr lang="en-US"/>
+          </a:p>
+        </p:txBody>
+      </p:sp>
+      <p:sp>
+        <p:nvSpPr>
+          <p:cNvPr id="9" name="Rounded Rectangle 8"/>
+          <p:cNvSpPr/>
+          <p:nvPr/>
+        </p:nvSpPr>
+        <p:spPr>
+          <a:xfrm>
+            <a:off x="8057537" y="875070"/>
+            <a:ext cx="2821857" cy="2576051"/>
+          </a:xfrm>
+          <a:prstGeom prst="roundRect">
+            <a:avLst/>
+          </a:prstGeom>
+          <a:gradFill flip="none" rotWithShape="1">
+            <a:gsLst>
+              <a:gs pos="0">
+                <a:srgbClr val="4E2955"/>
+              </a:gs>
+              <a:gs pos="100000">
+                <a:srgbClr val="73418F"/>
+              </a:gs>
+            </a:gsLst>
+            <a:lin ang="8100000" scaled="0"/>
+            <a:tileRect/>
+          </a:gradFill>
+          <a:ln>
+            <a:noFill/>
+          </a:ln>
+          <a:effectLst>
+            <a:outerShdw blurRad="57785" dist="33020" dir="3180000" algn="ctr">
+              <a:srgbClr val="000000">
+                <a:alpha val="30000"/>
+              </a:srgbClr>
+            </a:outerShdw>
+          </a:effectLst>
+          <a:scene3d>
+            <a:camera prst="orthographicFront">
+              <a:rot lat="0" lon="0" rev="0"/>
+            </a:camera>
+            <a:lightRig rig="brightRoom" dir="t">
+              <a:rot lat="0" lon="0" rev="600000"/>
+            </a:lightRig>
+          </a:scene3d>
+          <a:sp3d prstMaterial="metal">
+            <a:bevelT w="38100" h="57150" prst="angle"/>
+          </a:sp3d>
+        </p:spPr>
+        <p:style>
+          <a:lnRef idx="2">
+            <a:schemeClr val="accent1">
+              <a:shade val="50000"/>
+            </a:schemeClr>
+          </a:lnRef>
+          <a:fillRef idx="1">
+            <a:schemeClr val="accent1"/>
+          </a:fillRef>
+          <a:effectRef idx="0">
+            <a:schemeClr val="accent1"/>
+          </a:effectRef>
+          <a:fontRef idx="minor">
+            <a:schemeClr val="lt1"/>
+          </a:fontRef>
+        </p:style>
+        <p:txBody>
+          <a:bodyPr rtlCol="0" anchor="ctr"/>
+          <a:lstStyle/>
+          <a:p>
+            <a:pPr algn="ctr"/>
+            <a:endParaRPr lang="en-US"/>
+          </a:p>
+        </p:txBody>
+      </p:sp>
+    </p:spTree>
+    <p:extLst>
+      <p:ext uri="{BB962C8B-B14F-4D97-AF65-F5344CB8AC3E}">
+        <p14:creationId xmlns:p14="http://schemas.microsoft.com/office/powerpoint/2010/main" val="2272508962"/>
+      </p:ext>
+    </p:extLst>
+  </p:cSld>
+  <p:clrMapOvr>
+    <a:masterClrMapping/>
+  </p:clrMapOvr>
+</p:sld>
+</file>
+
+<file path=ppt/slides/slide16.xml><?xml version="1.0" encoding="utf-8"?>
+<p:sld xmlns:a="http://schemas.openxmlformats.org/drawingml/2006/main" xmlns:r="http://schemas.openxmlformats.org/officeDocument/2006/relationships" xmlns:p="http://schemas.openxmlformats.org/presentationml/2006/main">
+  <p:cSld>
+    <p:bg>
+      <p:bgPr>
+        <a:gradFill flip="none" rotWithShape="1">
+          <a:gsLst>
+            <a:gs pos="0">
+              <a:srgbClr val="4E2955"/>
+            </a:gs>
+            <a:gs pos="100000">
+              <a:srgbClr val="181050"/>
+            </a:gs>
+          </a:gsLst>
+          <a:lin ang="5400000" scaled="0"/>
+          <a:tileRect/>
+        </a:gradFill>
+        <a:effectLst/>
+      </p:bgPr>
+    </p:bg>
+    <p:spTree>
+      <p:nvGrpSpPr>
+        <p:cNvPr id="1" name=""/>
+        <p:cNvGrpSpPr/>
+        <p:nvPr/>
+      </p:nvGrpSpPr>
+      <p:grpSpPr>
+        <a:xfrm>
+          <a:off x="0" y="0"/>
+          <a:ext cx="0" cy="0"/>
+          <a:chOff x="0" y="0"/>
+          <a:chExt cx="0" cy="0"/>
+        </a:xfrm>
+      </p:grpSpPr>
+      <p:sp>
+        <p:nvSpPr>
+          <p:cNvPr id="4" name="Rounded Rectangle 3"/>
+          <p:cNvSpPr/>
+          <p:nvPr/>
+        </p:nvSpPr>
+        <p:spPr>
+          <a:xfrm>
             <a:off x="1258529" y="865239"/>
             <a:ext cx="4493341" cy="2576051"/>
           </a:xfrm>
@@ -5708,17 +6527,123 @@
   <p:clrMapOvr>
     <a:masterClrMapping/>
   </p:clrMapOvr>
-  <p:timing>
-    <p:tnLst>
-      <p:par>
-        <p:cTn id="1" dur="indefinite" restart="never" nodeType="tmRoot"/>
-      </p:par>
-    </p:tnLst>
-  </p:timing>
 </p:sld>
 </file>
 
 <file path=ppt/slides/slide2.xml><?xml version="1.0" encoding="utf-8"?>
+<p:sld xmlns:a="http://schemas.openxmlformats.org/drawingml/2006/main" xmlns:r="http://schemas.openxmlformats.org/officeDocument/2006/relationships" xmlns:p="http://schemas.openxmlformats.org/presentationml/2006/main">
+  <p:cSld>
+    <p:bg>
+      <p:bgPr>
+        <a:gradFill>
+          <a:gsLst>
+            <a:gs pos="100000">
+              <a:schemeClr val="bg1">
+                <a:lumMod val="95000"/>
+              </a:schemeClr>
+            </a:gs>
+            <a:gs pos="0">
+              <a:schemeClr val="bg1"/>
+            </a:gs>
+          </a:gsLst>
+          <a:lin ang="5400000" scaled="0"/>
+        </a:gradFill>
+        <a:effectLst/>
+      </p:bgPr>
+    </p:bg>
+    <p:spTree>
+      <p:nvGrpSpPr>
+        <p:cNvPr id="1" name=""/>
+        <p:cNvGrpSpPr/>
+        <p:nvPr/>
+      </p:nvGrpSpPr>
+      <p:grpSpPr>
+        <a:xfrm>
+          <a:off x="0" y="0"/>
+          <a:ext cx="0" cy="0"/>
+          <a:chOff x="0" y="0"/>
+          <a:chExt cx="0" cy="0"/>
+        </a:xfrm>
+      </p:grpSpPr>
+      <p:sp>
+        <p:nvSpPr>
+          <p:cNvPr id="4" name="Rectangle 3"/>
+          <p:cNvSpPr/>
+          <p:nvPr/>
+        </p:nvSpPr>
+        <p:spPr>
+          <a:xfrm>
+            <a:off x="0" y="0"/>
+            <a:ext cx="12192000" cy="1208690"/>
+          </a:xfrm>
+          <a:prstGeom prst="rect">
+            <a:avLst/>
+          </a:prstGeom>
+          <a:gradFill flip="none" rotWithShape="1">
+            <a:gsLst>
+              <a:gs pos="0">
+                <a:schemeClr val="accent1">
+                  <a:lumMod val="50000"/>
+                  <a:shade val="30000"/>
+                  <a:satMod val="115000"/>
+                </a:schemeClr>
+              </a:gs>
+              <a:gs pos="50000">
+                <a:schemeClr val="accent1">
+                  <a:lumMod val="50000"/>
+                  <a:shade val="67500"/>
+                  <a:satMod val="115000"/>
+                </a:schemeClr>
+              </a:gs>
+              <a:gs pos="100000">
+                <a:schemeClr val="accent1">
+                  <a:lumMod val="50000"/>
+                  <a:shade val="100000"/>
+                  <a:satMod val="115000"/>
+                </a:schemeClr>
+              </a:gs>
+            </a:gsLst>
+            <a:lin ang="5400000" scaled="1"/>
+            <a:tileRect/>
+          </a:gradFill>
+        </p:spPr>
+        <p:style>
+          <a:lnRef idx="1">
+            <a:schemeClr val="accent1"/>
+          </a:lnRef>
+          <a:fillRef idx="3">
+            <a:schemeClr val="accent1"/>
+          </a:fillRef>
+          <a:effectRef idx="2">
+            <a:schemeClr val="accent1"/>
+          </a:effectRef>
+          <a:fontRef idx="minor">
+            <a:schemeClr val="lt1"/>
+          </a:fontRef>
+        </p:style>
+        <p:txBody>
+          <a:bodyPr rtlCol="0" anchor="ctr"/>
+          <a:lstStyle/>
+          <a:p>
+            <a:pPr algn="ctr"/>
+            <a:endParaRPr lang="en-US"/>
+          </a:p>
+        </p:txBody>
+      </p:sp>
+    </p:spTree>
+    <p:extLst>
+      <p:ext uri="{BB962C8B-B14F-4D97-AF65-F5344CB8AC3E}">
+        <p14:creationId xmlns:p14="http://schemas.microsoft.com/office/powerpoint/2010/main" val="1970515704"/>
+      </p:ext>
+    </p:extLst>
+  </p:cSld>
+  <p:clrMapOvr>
+    <a:masterClrMapping/>
+  </p:clrMapOvr>
+</p:sld>
+</file>
+
+<file path=ppt/slides/slide3.xml><?xml version="1.0" encoding="utf-8"?>
 <p:sld xmlns:a="http://schemas.openxmlformats.org/drawingml/2006/main" xmlns:r="http://schemas.openxmlformats.org/officeDocument/2006/relationships" xmlns:p="http://schemas.openxmlformats.org/presentationml/2006/main">
   <p:cSld>
     <p:spTree>
@@ -6069,17 +6994,10 @@
   <p:clrMapOvr>
     <a:masterClrMapping/>
   </p:clrMapOvr>
-  <p:timing>
-    <p:tnLst>
-      <p:par>
-        <p:cTn id="1" dur="indefinite" restart="never" nodeType="tmRoot"/>
-      </p:par>
-    </p:tnLst>
-  </p:timing>
 </p:sld>
 </file>
 
-<file path=ppt/slides/slide3.xml><?xml version="1.0" encoding="utf-8"?>
+<file path=ppt/slides/slide4.xml><?xml version="1.0" encoding="utf-8"?>
 <p:sld xmlns:a="http://schemas.openxmlformats.org/drawingml/2006/main" xmlns:r="http://schemas.openxmlformats.org/officeDocument/2006/relationships" xmlns:p="http://schemas.openxmlformats.org/presentationml/2006/main">
   <p:cSld>
     <p:spTree>
@@ -6324,17 +7242,10 @@
   <p:clrMapOvr>
     <a:masterClrMapping/>
   </p:clrMapOvr>
-  <p:timing>
-    <p:tnLst>
-      <p:par>
-        <p:cTn id="1" dur="indefinite" restart="never" nodeType="tmRoot"/>
-      </p:par>
-    </p:tnLst>
-  </p:timing>
 </p:sld>
 </file>
 
-<file path=ppt/slides/slide4.xml><?xml version="1.0" encoding="utf-8"?>
+<file path=ppt/slides/slide5.xml><?xml version="1.0" encoding="utf-8"?>
 <p:sld xmlns:a="http://schemas.openxmlformats.org/drawingml/2006/main" xmlns:r="http://schemas.openxmlformats.org/officeDocument/2006/relationships" xmlns:p="http://schemas.openxmlformats.org/presentationml/2006/main">
   <p:cSld>
     <p:bg>
@@ -6786,452 +7697,6 @@
   <p:clrMapOvr>
     <a:masterClrMapping/>
   </p:clrMapOvr>
-  <p:timing>
-    <p:tnLst>
-      <p:par>
-        <p:cTn id="1" dur="indefinite" restart="never" nodeType="tmRoot"/>
-      </p:par>
-    </p:tnLst>
-  </p:timing>
-</p:sld>
-</file>
-
-<file path=ppt/slides/slide5.xml><?xml version="1.0" encoding="utf-8"?>
-<p:sld xmlns:a="http://schemas.openxmlformats.org/drawingml/2006/main" xmlns:r="http://schemas.openxmlformats.org/officeDocument/2006/relationships" xmlns:p="http://schemas.openxmlformats.org/presentationml/2006/main">
-  <p:cSld>
-    <p:bg>
-      <p:bgPr>
-        <a:gradFill>
-          <a:gsLst>
-            <a:gs pos="0">
-              <a:schemeClr val="bg1"/>
-            </a:gs>
-            <a:gs pos="100000">
-              <a:schemeClr val="bg1">
-                <a:lumMod val="85000"/>
-              </a:schemeClr>
-            </a:gs>
-          </a:gsLst>
-          <a:lin ang="5400000" scaled="0"/>
-        </a:gradFill>
-        <a:effectLst/>
-      </p:bgPr>
-    </p:bg>
-    <p:spTree>
-      <p:nvGrpSpPr>
-        <p:cNvPr id="1" name=""/>
-        <p:cNvGrpSpPr/>
-        <p:nvPr/>
-      </p:nvGrpSpPr>
-      <p:grpSpPr>
-        <a:xfrm>
-          <a:off x="0" y="0"/>
-          <a:ext cx="0" cy="0"/>
-          <a:chOff x="0" y="0"/>
-          <a:chExt cx="0" cy="0"/>
-        </a:xfrm>
-      </p:grpSpPr>
-      <p:sp>
-        <p:nvSpPr>
-          <p:cNvPr id="4" name="Rectangle 3"/>
-          <p:cNvSpPr/>
-          <p:nvPr/>
-        </p:nvSpPr>
-        <p:spPr>
-          <a:xfrm>
-            <a:off x="0" y="0"/>
-            <a:ext cx="12192000" cy="2743200"/>
-          </a:xfrm>
-          <a:prstGeom prst="rect">
-            <a:avLst/>
-          </a:prstGeom>
-          <a:solidFill>
-            <a:schemeClr val="accent5">
-              <a:lumMod val="50000"/>
-            </a:schemeClr>
-          </a:solidFill>
-          <a:ln>
-            <a:noFill/>
-          </a:ln>
-          <a:effectLst>
-            <a:outerShdw blurRad="50800" dist="38100" dir="5400000" algn="t" rotWithShape="0">
-              <a:prstClr val="black">
-                <a:alpha val="40000"/>
-              </a:prstClr>
-            </a:outerShdw>
-          </a:effectLst>
-        </p:spPr>
-        <p:style>
-          <a:lnRef idx="2">
-            <a:schemeClr val="accent1">
-              <a:shade val="50000"/>
-            </a:schemeClr>
-          </a:lnRef>
-          <a:fillRef idx="1">
-            <a:schemeClr val="accent1"/>
-          </a:fillRef>
-          <a:effectRef idx="0">
-            <a:schemeClr val="accent1"/>
-          </a:effectRef>
-          <a:fontRef idx="minor">
-            <a:schemeClr val="lt1"/>
-          </a:fontRef>
-        </p:style>
-        <p:txBody>
-          <a:bodyPr rtlCol="0" anchor="ctr"/>
-          <a:lstStyle/>
-          <a:p>
-            <a:pPr algn="ctr"/>
-            <a:endParaRPr lang="en-US"/>
-          </a:p>
-        </p:txBody>
-      </p:sp>
-      <p:sp>
-        <p:nvSpPr>
-          <p:cNvPr id="5" name="Rounded Rectangle 4"/>
-          <p:cNvSpPr/>
-          <p:nvPr/>
-        </p:nvSpPr>
-        <p:spPr>
-          <a:xfrm>
-            <a:off x="314633" y="344129"/>
-            <a:ext cx="11572568" cy="6213987"/>
-          </a:xfrm>
-          <a:prstGeom prst="roundRect">
-            <a:avLst>
-              <a:gd name="adj" fmla="val 1787"/>
-            </a:avLst>
-          </a:prstGeom>
-          <a:solidFill>
-            <a:schemeClr val="bg1">
-              <a:lumMod val="95000"/>
-            </a:schemeClr>
-          </a:solidFill>
-          <a:ln w="19050">
-            <a:solidFill>
-              <a:schemeClr val="bg1">
-                <a:lumMod val="65000"/>
-              </a:schemeClr>
-            </a:solidFill>
-          </a:ln>
-        </p:spPr>
-        <p:style>
-          <a:lnRef idx="2">
-            <a:schemeClr val="accent1">
-              <a:shade val="50000"/>
-            </a:schemeClr>
-          </a:lnRef>
-          <a:fillRef idx="1">
-            <a:schemeClr val="accent1"/>
-          </a:fillRef>
-          <a:effectRef idx="0">
-            <a:schemeClr val="accent1"/>
-          </a:effectRef>
-          <a:fontRef idx="minor">
-            <a:schemeClr val="lt1"/>
-          </a:fontRef>
-        </p:style>
-        <p:txBody>
-          <a:bodyPr rtlCol="0" anchor="ctr"/>
-          <a:lstStyle/>
-          <a:p>
-            <a:pPr algn="ctr"/>
-            <a:endParaRPr lang="en-US"/>
-          </a:p>
-        </p:txBody>
-      </p:sp>
-      <p:sp>
-        <p:nvSpPr>
-          <p:cNvPr id="7" name="Rounded Rectangle 6"/>
-          <p:cNvSpPr/>
-          <p:nvPr/>
-        </p:nvSpPr>
-        <p:spPr>
-          <a:xfrm>
-            <a:off x="604684" y="1002889"/>
-            <a:ext cx="3475703" cy="2298291"/>
-          </a:xfrm>
-          <a:prstGeom prst="roundRect">
-            <a:avLst>
-              <a:gd name="adj" fmla="val 5380"/>
-            </a:avLst>
-          </a:prstGeom>
-          <a:solidFill>
-            <a:schemeClr val="bg1"/>
-          </a:solidFill>
-          <a:ln w="9525">
-            <a:noFill/>
-          </a:ln>
-          <a:effectLst>
-            <a:outerShdw blurRad="63500" sx="102000" sy="102000" algn="ctr" rotWithShape="0">
-              <a:prstClr val="black">
-                <a:alpha val="15000"/>
-              </a:prstClr>
-            </a:outerShdw>
-          </a:effectLst>
-        </p:spPr>
-        <p:style>
-          <a:lnRef idx="2">
-            <a:schemeClr val="accent1">
-              <a:shade val="50000"/>
-            </a:schemeClr>
-          </a:lnRef>
-          <a:fillRef idx="1">
-            <a:schemeClr val="accent1"/>
-          </a:fillRef>
-          <a:effectRef idx="0">
-            <a:schemeClr val="accent1"/>
-          </a:effectRef>
-          <a:fontRef idx="minor">
-            <a:schemeClr val="lt1"/>
-          </a:fontRef>
-        </p:style>
-        <p:txBody>
-          <a:bodyPr rtlCol="0" anchor="ctr"/>
-          <a:lstStyle/>
-          <a:p>
-            <a:pPr algn="ctr"/>
-            <a:endParaRPr lang="en-US"/>
-          </a:p>
-        </p:txBody>
-      </p:sp>
-      <p:sp>
-        <p:nvSpPr>
-          <p:cNvPr id="8" name="Rounded Rectangle 7"/>
-          <p:cNvSpPr/>
-          <p:nvPr/>
-        </p:nvSpPr>
-        <p:spPr>
-          <a:xfrm>
-            <a:off x="4348316" y="1002888"/>
-            <a:ext cx="3475703" cy="2298291"/>
-          </a:xfrm>
-          <a:prstGeom prst="roundRect">
-            <a:avLst>
-              <a:gd name="adj" fmla="val 5380"/>
-            </a:avLst>
-          </a:prstGeom>
-          <a:solidFill>
-            <a:schemeClr val="bg1"/>
-          </a:solidFill>
-          <a:ln w="9525">
-            <a:noFill/>
-          </a:ln>
-          <a:effectLst>
-            <a:outerShdw blurRad="63500" sx="102000" sy="102000" algn="ctr" rotWithShape="0">
-              <a:prstClr val="black">
-                <a:alpha val="15000"/>
-              </a:prstClr>
-            </a:outerShdw>
-          </a:effectLst>
-        </p:spPr>
-        <p:style>
-          <a:lnRef idx="2">
-            <a:schemeClr val="accent1">
-              <a:shade val="50000"/>
-            </a:schemeClr>
-          </a:lnRef>
-          <a:fillRef idx="1">
-            <a:schemeClr val="accent1"/>
-          </a:fillRef>
-          <a:effectRef idx="0">
-            <a:schemeClr val="accent1"/>
-          </a:effectRef>
-          <a:fontRef idx="minor">
-            <a:schemeClr val="lt1"/>
-          </a:fontRef>
-        </p:style>
-        <p:txBody>
-          <a:bodyPr rtlCol="0" anchor="ctr"/>
-          <a:lstStyle/>
-          <a:p>
-            <a:pPr algn="ctr"/>
-            <a:endParaRPr lang="en-US"/>
-          </a:p>
-        </p:txBody>
-      </p:sp>
-      <p:sp>
-        <p:nvSpPr>
-          <p:cNvPr id="9" name="Rounded Rectangle 8"/>
-          <p:cNvSpPr/>
-          <p:nvPr/>
-        </p:nvSpPr>
-        <p:spPr>
-          <a:xfrm>
-            <a:off x="8091949" y="1002889"/>
-            <a:ext cx="3475703" cy="2298291"/>
-          </a:xfrm>
-          <a:prstGeom prst="roundRect">
-            <a:avLst>
-              <a:gd name="adj" fmla="val 5380"/>
-            </a:avLst>
-          </a:prstGeom>
-          <a:solidFill>
-            <a:schemeClr val="bg1"/>
-          </a:solidFill>
-          <a:ln w="9525">
-            <a:noFill/>
-          </a:ln>
-          <a:effectLst>
-            <a:outerShdw blurRad="63500" sx="102000" sy="102000" algn="ctr" rotWithShape="0">
-              <a:prstClr val="black">
-                <a:alpha val="15000"/>
-              </a:prstClr>
-            </a:outerShdw>
-          </a:effectLst>
-        </p:spPr>
-        <p:style>
-          <a:lnRef idx="2">
-            <a:schemeClr val="accent1">
-              <a:shade val="50000"/>
-            </a:schemeClr>
-          </a:lnRef>
-          <a:fillRef idx="1">
-            <a:schemeClr val="accent1"/>
-          </a:fillRef>
-          <a:effectRef idx="0">
-            <a:schemeClr val="accent1"/>
-          </a:effectRef>
-          <a:fontRef idx="minor">
-            <a:schemeClr val="lt1"/>
-          </a:fontRef>
-        </p:style>
-        <p:txBody>
-          <a:bodyPr rtlCol="0" anchor="ctr"/>
-          <a:lstStyle/>
-          <a:p>
-            <a:pPr algn="ctr"/>
-            <a:endParaRPr lang="en-US"/>
-          </a:p>
-        </p:txBody>
-      </p:sp>
-      <p:sp>
-        <p:nvSpPr>
-          <p:cNvPr id="10" name="Rounded Rectangle 9"/>
-          <p:cNvSpPr/>
-          <p:nvPr/>
-        </p:nvSpPr>
-        <p:spPr>
-          <a:xfrm>
-            <a:off x="604684" y="3510116"/>
-            <a:ext cx="5334000" cy="2651022"/>
-          </a:xfrm>
-          <a:prstGeom prst="roundRect">
-            <a:avLst>
-              <a:gd name="adj" fmla="val 5380"/>
-            </a:avLst>
-          </a:prstGeom>
-          <a:solidFill>
-            <a:schemeClr val="bg1"/>
-          </a:solidFill>
-          <a:ln w="9525">
-            <a:noFill/>
-          </a:ln>
-          <a:effectLst>
-            <a:outerShdw blurRad="63500" sx="102000" sy="102000" algn="ctr" rotWithShape="0">
-              <a:prstClr val="black">
-                <a:alpha val="15000"/>
-              </a:prstClr>
-            </a:outerShdw>
-          </a:effectLst>
-        </p:spPr>
-        <p:style>
-          <a:lnRef idx="2">
-            <a:schemeClr val="accent1">
-              <a:shade val="50000"/>
-            </a:schemeClr>
-          </a:lnRef>
-          <a:fillRef idx="1">
-            <a:schemeClr val="accent1"/>
-          </a:fillRef>
-          <a:effectRef idx="0">
-            <a:schemeClr val="accent1"/>
-          </a:effectRef>
-          <a:fontRef idx="minor">
-            <a:schemeClr val="lt1"/>
-          </a:fontRef>
-        </p:style>
-        <p:txBody>
-          <a:bodyPr rtlCol="0" anchor="ctr"/>
-          <a:lstStyle/>
-          <a:p>
-            <a:pPr algn="ctr"/>
-            <a:endParaRPr lang="en-US"/>
-          </a:p>
-        </p:txBody>
-      </p:sp>
-      <p:sp>
-        <p:nvSpPr>
-          <p:cNvPr id="11" name="Rounded Rectangle 10"/>
-          <p:cNvSpPr/>
-          <p:nvPr/>
-        </p:nvSpPr>
-        <p:spPr>
-          <a:xfrm>
-            <a:off x="6228735" y="3510116"/>
-            <a:ext cx="5338917" cy="2651022"/>
-          </a:xfrm>
-          <a:prstGeom prst="roundRect">
-            <a:avLst>
-              <a:gd name="adj" fmla="val 5380"/>
-            </a:avLst>
-          </a:prstGeom>
-          <a:solidFill>
-            <a:schemeClr val="bg1"/>
-          </a:solidFill>
-          <a:ln w="9525">
-            <a:noFill/>
-          </a:ln>
-          <a:effectLst>
-            <a:outerShdw blurRad="63500" sx="102000" sy="102000" algn="ctr" rotWithShape="0">
-              <a:prstClr val="black">
-                <a:alpha val="15000"/>
-              </a:prstClr>
-            </a:outerShdw>
-          </a:effectLst>
-        </p:spPr>
-        <p:style>
-          <a:lnRef idx="2">
-            <a:schemeClr val="accent1">
-              <a:shade val="50000"/>
-            </a:schemeClr>
-          </a:lnRef>
-          <a:fillRef idx="1">
-            <a:schemeClr val="accent1"/>
-          </a:fillRef>
-          <a:effectRef idx="0">
-            <a:schemeClr val="accent1"/>
-          </a:effectRef>
-          <a:fontRef idx="minor">
-            <a:schemeClr val="lt1"/>
-          </a:fontRef>
-        </p:style>
-        <p:txBody>
-          <a:bodyPr rtlCol="0" anchor="ctr"/>
-          <a:lstStyle/>
-          <a:p>
-            <a:pPr algn="ctr"/>
-            <a:endParaRPr lang="en-US"/>
-          </a:p>
-        </p:txBody>
-      </p:sp>
-    </p:spTree>
-    <p:extLst>
-      <p:ext uri="{BB962C8B-B14F-4D97-AF65-F5344CB8AC3E}">
-        <p14:creationId xmlns:p14="http://schemas.microsoft.com/office/powerpoint/2010/main" val="1276986948"/>
-      </p:ext>
-    </p:extLst>
-  </p:cSld>
-  <p:clrMapOvr>
-    <a:masterClrMapping/>
-  </p:clrMapOvr>
-  <p:timing>
-    <p:tnLst>
-      <p:par>
-        <p:cTn id="1" dur="indefinite" restart="never" nodeType="tmRoot"/>
-      </p:par>
-    </p:tnLst>
-  </p:timing>
 </p:sld>
 </file>
 
@@ -7387,6 +7852,438 @@
         </p:nvSpPr>
         <p:spPr>
           <a:xfrm>
+            <a:off x="604684" y="1002889"/>
+            <a:ext cx="3475703" cy="2298291"/>
+          </a:xfrm>
+          <a:prstGeom prst="roundRect">
+            <a:avLst>
+              <a:gd name="adj" fmla="val 5380"/>
+            </a:avLst>
+          </a:prstGeom>
+          <a:solidFill>
+            <a:schemeClr val="bg1"/>
+          </a:solidFill>
+          <a:ln w="9525">
+            <a:noFill/>
+          </a:ln>
+          <a:effectLst>
+            <a:outerShdw blurRad="63500" sx="102000" sy="102000" algn="ctr" rotWithShape="0">
+              <a:prstClr val="black">
+                <a:alpha val="15000"/>
+              </a:prstClr>
+            </a:outerShdw>
+          </a:effectLst>
+        </p:spPr>
+        <p:style>
+          <a:lnRef idx="2">
+            <a:schemeClr val="accent1">
+              <a:shade val="50000"/>
+            </a:schemeClr>
+          </a:lnRef>
+          <a:fillRef idx="1">
+            <a:schemeClr val="accent1"/>
+          </a:fillRef>
+          <a:effectRef idx="0">
+            <a:schemeClr val="accent1"/>
+          </a:effectRef>
+          <a:fontRef idx="minor">
+            <a:schemeClr val="lt1"/>
+          </a:fontRef>
+        </p:style>
+        <p:txBody>
+          <a:bodyPr rtlCol="0" anchor="ctr"/>
+          <a:lstStyle/>
+          <a:p>
+            <a:pPr algn="ctr"/>
+            <a:endParaRPr lang="en-US"/>
+          </a:p>
+        </p:txBody>
+      </p:sp>
+      <p:sp>
+        <p:nvSpPr>
+          <p:cNvPr id="8" name="Rounded Rectangle 7"/>
+          <p:cNvSpPr/>
+          <p:nvPr/>
+        </p:nvSpPr>
+        <p:spPr>
+          <a:xfrm>
+            <a:off x="4348316" y="1002888"/>
+            <a:ext cx="3475703" cy="2298291"/>
+          </a:xfrm>
+          <a:prstGeom prst="roundRect">
+            <a:avLst>
+              <a:gd name="adj" fmla="val 5380"/>
+            </a:avLst>
+          </a:prstGeom>
+          <a:solidFill>
+            <a:schemeClr val="bg1"/>
+          </a:solidFill>
+          <a:ln w="9525">
+            <a:noFill/>
+          </a:ln>
+          <a:effectLst>
+            <a:outerShdw blurRad="63500" sx="102000" sy="102000" algn="ctr" rotWithShape="0">
+              <a:prstClr val="black">
+                <a:alpha val="15000"/>
+              </a:prstClr>
+            </a:outerShdw>
+          </a:effectLst>
+        </p:spPr>
+        <p:style>
+          <a:lnRef idx="2">
+            <a:schemeClr val="accent1">
+              <a:shade val="50000"/>
+            </a:schemeClr>
+          </a:lnRef>
+          <a:fillRef idx="1">
+            <a:schemeClr val="accent1"/>
+          </a:fillRef>
+          <a:effectRef idx="0">
+            <a:schemeClr val="accent1"/>
+          </a:effectRef>
+          <a:fontRef idx="minor">
+            <a:schemeClr val="lt1"/>
+          </a:fontRef>
+        </p:style>
+        <p:txBody>
+          <a:bodyPr rtlCol="0" anchor="ctr"/>
+          <a:lstStyle/>
+          <a:p>
+            <a:pPr algn="ctr"/>
+            <a:endParaRPr lang="en-US"/>
+          </a:p>
+        </p:txBody>
+      </p:sp>
+      <p:sp>
+        <p:nvSpPr>
+          <p:cNvPr id="9" name="Rounded Rectangle 8"/>
+          <p:cNvSpPr/>
+          <p:nvPr/>
+        </p:nvSpPr>
+        <p:spPr>
+          <a:xfrm>
+            <a:off x="8091949" y="1002889"/>
+            <a:ext cx="3475703" cy="2298291"/>
+          </a:xfrm>
+          <a:prstGeom prst="roundRect">
+            <a:avLst>
+              <a:gd name="adj" fmla="val 5380"/>
+            </a:avLst>
+          </a:prstGeom>
+          <a:solidFill>
+            <a:schemeClr val="bg1"/>
+          </a:solidFill>
+          <a:ln w="9525">
+            <a:noFill/>
+          </a:ln>
+          <a:effectLst>
+            <a:outerShdw blurRad="63500" sx="102000" sy="102000" algn="ctr" rotWithShape="0">
+              <a:prstClr val="black">
+                <a:alpha val="15000"/>
+              </a:prstClr>
+            </a:outerShdw>
+          </a:effectLst>
+        </p:spPr>
+        <p:style>
+          <a:lnRef idx="2">
+            <a:schemeClr val="accent1">
+              <a:shade val="50000"/>
+            </a:schemeClr>
+          </a:lnRef>
+          <a:fillRef idx="1">
+            <a:schemeClr val="accent1"/>
+          </a:fillRef>
+          <a:effectRef idx="0">
+            <a:schemeClr val="accent1"/>
+          </a:effectRef>
+          <a:fontRef idx="minor">
+            <a:schemeClr val="lt1"/>
+          </a:fontRef>
+        </p:style>
+        <p:txBody>
+          <a:bodyPr rtlCol="0" anchor="ctr"/>
+          <a:lstStyle/>
+          <a:p>
+            <a:pPr algn="ctr"/>
+            <a:endParaRPr lang="en-US"/>
+          </a:p>
+        </p:txBody>
+      </p:sp>
+      <p:sp>
+        <p:nvSpPr>
+          <p:cNvPr id="10" name="Rounded Rectangle 9"/>
+          <p:cNvSpPr/>
+          <p:nvPr/>
+        </p:nvSpPr>
+        <p:spPr>
+          <a:xfrm>
+            <a:off x="604684" y="3510116"/>
+            <a:ext cx="5334000" cy="2651022"/>
+          </a:xfrm>
+          <a:prstGeom prst="roundRect">
+            <a:avLst>
+              <a:gd name="adj" fmla="val 5380"/>
+            </a:avLst>
+          </a:prstGeom>
+          <a:solidFill>
+            <a:schemeClr val="bg1"/>
+          </a:solidFill>
+          <a:ln w="9525">
+            <a:noFill/>
+          </a:ln>
+          <a:effectLst>
+            <a:outerShdw blurRad="63500" sx="102000" sy="102000" algn="ctr" rotWithShape="0">
+              <a:prstClr val="black">
+                <a:alpha val="15000"/>
+              </a:prstClr>
+            </a:outerShdw>
+          </a:effectLst>
+        </p:spPr>
+        <p:style>
+          <a:lnRef idx="2">
+            <a:schemeClr val="accent1">
+              <a:shade val="50000"/>
+            </a:schemeClr>
+          </a:lnRef>
+          <a:fillRef idx="1">
+            <a:schemeClr val="accent1"/>
+          </a:fillRef>
+          <a:effectRef idx="0">
+            <a:schemeClr val="accent1"/>
+          </a:effectRef>
+          <a:fontRef idx="minor">
+            <a:schemeClr val="lt1"/>
+          </a:fontRef>
+        </p:style>
+        <p:txBody>
+          <a:bodyPr rtlCol="0" anchor="ctr"/>
+          <a:lstStyle/>
+          <a:p>
+            <a:pPr algn="ctr"/>
+            <a:endParaRPr lang="en-US"/>
+          </a:p>
+        </p:txBody>
+      </p:sp>
+      <p:sp>
+        <p:nvSpPr>
+          <p:cNvPr id="11" name="Rounded Rectangle 10"/>
+          <p:cNvSpPr/>
+          <p:nvPr/>
+        </p:nvSpPr>
+        <p:spPr>
+          <a:xfrm>
+            <a:off x="6228735" y="3510116"/>
+            <a:ext cx="5338917" cy="2651022"/>
+          </a:xfrm>
+          <a:prstGeom prst="roundRect">
+            <a:avLst>
+              <a:gd name="adj" fmla="val 5380"/>
+            </a:avLst>
+          </a:prstGeom>
+          <a:solidFill>
+            <a:schemeClr val="bg1"/>
+          </a:solidFill>
+          <a:ln w="9525">
+            <a:noFill/>
+          </a:ln>
+          <a:effectLst>
+            <a:outerShdw blurRad="63500" sx="102000" sy="102000" algn="ctr" rotWithShape="0">
+              <a:prstClr val="black">
+                <a:alpha val="15000"/>
+              </a:prstClr>
+            </a:outerShdw>
+          </a:effectLst>
+        </p:spPr>
+        <p:style>
+          <a:lnRef idx="2">
+            <a:schemeClr val="accent1">
+              <a:shade val="50000"/>
+            </a:schemeClr>
+          </a:lnRef>
+          <a:fillRef idx="1">
+            <a:schemeClr val="accent1"/>
+          </a:fillRef>
+          <a:effectRef idx="0">
+            <a:schemeClr val="accent1"/>
+          </a:effectRef>
+          <a:fontRef idx="minor">
+            <a:schemeClr val="lt1"/>
+          </a:fontRef>
+        </p:style>
+        <p:txBody>
+          <a:bodyPr rtlCol="0" anchor="ctr"/>
+          <a:lstStyle/>
+          <a:p>
+            <a:pPr algn="ctr"/>
+            <a:endParaRPr lang="en-US"/>
+          </a:p>
+        </p:txBody>
+      </p:sp>
+    </p:spTree>
+    <p:extLst>
+      <p:ext uri="{BB962C8B-B14F-4D97-AF65-F5344CB8AC3E}">
+        <p14:creationId xmlns:p14="http://schemas.microsoft.com/office/powerpoint/2010/main" val="1276986948"/>
+      </p:ext>
+    </p:extLst>
+  </p:cSld>
+  <p:clrMapOvr>
+    <a:masterClrMapping/>
+  </p:clrMapOvr>
+</p:sld>
+</file>
+
+<file path=ppt/slides/slide7.xml><?xml version="1.0" encoding="utf-8"?>
+<p:sld xmlns:a="http://schemas.openxmlformats.org/drawingml/2006/main" xmlns:r="http://schemas.openxmlformats.org/officeDocument/2006/relationships" xmlns:p="http://schemas.openxmlformats.org/presentationml/2006/main">
+  <p:cSld>
+    <p:bg>
+      <p:bgPr>
+        <a:gradFill>
+          <a:gsLst>
+            <a:gs pos="0">
+              <a:schemeClr val="bg1"/>
+            </a:gs>
+            <a:gs pos="100000">
+              <a:schemeClr val="bg1">
+                <a:lumMod val="85000"/>
+              </a:schemeClr>
+            </a:gs>
+          </a:gsLst>
+          <a:lin ang="5400000" scaled="0"/>
+        </a:gradFill>
+        <a:effectLst/>
+      </p:bgPr>
+    </p:bg>
+    <p:spTree>
+      <p:nvGrpSpPr>
+        <p:cNvPr id="1" name=""/>
+        <p:cNvGrpSpPr/>
+        <p:nvPr/>
+      </p:nvGrpSpPr>
+      <p:grpSpPr>
+        <a:xfrm>
+          <a:off x="0" y="0"/>
+          <a:ext cx="0" cy="0"/>
+          <a:chOff x="0" y="0"/>
+          <a:chExt cx="0" cy="0"/>
+        </a:xfrm>
+      </p:grpSpPr>
+      <p:sp>
+        <p:nvSpPr>
+          <p:cNvPr id="4" name="Rectangle 3"/>
+          <p:cNvSpPr/>
+          <p:nvPr/>
+        </p:nvSpPr>
+        <p:spPr>
+          <a:xfrm>
+            <a:off x="0" y="0"/>
+            <a:ext cx="12192000" cy="2743200"/>
+          </a:xfrm>
+          <a:prstGeom prst="rect">
+            <a:avLst/>
+          </a:prstGeom>
+          <a:solidFill>
+            <a:schemeClr val="accent5">
+              <a:lumMod val="50000"/>
+            </a:schemeClr>
+          </a:solidFill>
+          <a:ln>
+            <a:noFill/>
+          </a:ln>
+          <a:effectLst>
+            <a:outerShdw blurRad="50800" dist="38100" dir="5400000" algn="t" rotWithShape="0">
+              <a:prstClr val="black">
+                <a:alpha val="40000"/>
+              </a:prstClr>
+            </a:outerShdw>
+          </a:effectLst>
+        </p:spPr>
+        <p:style>
+          <a:lnRef idx="2">
+            <a:schemeClr val="accent1">
+              <a:shade val="50000"/>
+            </a:schemeClr>
+          </a:lnRef>
+          <a:fillRef idx="1">
+            <a:schemeClr val="accent1"/>
+          </a:fillRef>
+          <a:effectRef idx="0">
+            <a:schemeClr val="accent1"/>
+          </a:effectRef>
+          <a:fontRef idx="minor">
+            <a:schemeClr val="lt1"/>
+          </a:fontRef>
+        </p:style>
+        <p:txBody>
+          <a:bodyPr rtlCol="0" anchor="ctr"/>
+          <a:lstStyle/>
+          <a:p>
+            <a:pPr algn="ctr"/>
+            <a:endParaRPr lang="en-US"/>
+          </a:p>
+        </p:txBody>
+      </p:sp>
+      <p:sp>
+        <p:nvSpPr>
+          <p:cNvPr id="5" name="Rounded Rectangle 4"/>
+          <p:cNvSpPr/>
+          <p:nvPr/>
+        </p:nvSpPr>
+        <p:spPr>
+          <a:xfrm>
+            <a:off x="314633" y="344129"/>
+            <a:ext cx="11572568" cy="6213987"/>
+          </a:xfrm>
+          <a:prstGeom prst="roundRect">
+            <a:avLst>
+              <a:gd name="adj" fmla="val 1787"/>
+            </a:avLst>
+          </a:prstGeom>
+          <a:solidFill>
+            <a:schemeClr val="bg1">
+              <a:lumMod val="95000"/>
+            </a:schemeClr>
+          </a:solidFill>
+          <a:ln w="19050">
+            <a:solidFill>
+              <a:schemeClr val="bg1">
+                <a:lumMod val="65000"/>
+              </a:schemeClr>
+            </a:solidFill>
+          </a:ln>
+        </p:spPr>
+        <p:style>
+          <a:lnRef idx="2">
+            <a:schemeClr val="accent1">
+              <a:shade val="50000"/>
+            </a:schemeClr>
+          </a:lnRef>
+          <a:fillRef idx="1">
+            <a:schemeClr val="accent1"/>
+          </a:fillRef>
+          <a:effectRef idx="0">
+            <a:schemeClr val="accent1"/>
+          </a:effectRef>
+          <a:fontRef idx="minor">
+            <a:schemeClr val="lt1"/>
+          </a:fontRef>
+        </p:style>
+        <p:txBody>
+          <a:bodyPr rtlCol="0" anchor="ctr"/>
+          <a:lstStyle/>
+          <a:p>
+            <a:pPr algn="ctr"/>
+            <a:endParaRPr lang="en-US"/>
+          </a:p>
+        </p:txBody>
+      </p:sp>
+      <p:sp>
+        <p:nvSpPr>
+          <p:cNvPr id="7" name="Rounded Rectangle 6"/>
+          <p:cNvSpPr/>
+          <p:nvPr/>
+        </p:nvSpPr>
+        <p:spPr>
+          <a:xfrm>
             <a:off x="604684" y="1562792"/>
             <a:ext cx="3475703" cy="1272875"/>
           </a:xfrm>
@@ -7609,17 +8506,10 @@
   <p:clrMapOvr>
     <a:masterClrMapping/>
   </p:clrMapOvr>
-  <p:timing>
-    <p:tnLst>
-      <p:par>
-        <p:cTn id="1" dur="indefinite" restart="never" nodeType="tmRoot"/>
-      </p:par>
-    </p:tnLst>
-  </p:timing>
 </p:sld>
 </file>
 
-<file path=ppt/slides/slide7.xml><?xml version="1.0" encoding="utf-8"?>
+<file path=ppt/slides/slide8.xml><?xml version="1.0" encoding="utf-8"?>
 <p:sld xmlns:a="http://schemas.openxmlformats.org/drawingml/2006/main" xmlns:r="http://schemas.openxmlformats.org/officeDocument/2006/relationships" xmlns:p="http://schemas.openxmlformats.org/presentationml/2006/main">
   <p:cSld>
     <p:bg>
@@ -8076,17 +8966,10 @@
   <p:clrMapOvr>
     <a:masterClrMapping/>
   </p:clrMapOvr>
-  <p:timing>
-    <p:tnLst>
-      <p:par>
-        <p:cTn id="1" dur="indefinite" restart="never" nodeType="tmRoot"/>
-      </p:par>
-    </p:tnLst>
-  </p:timing>
 </p:sld>
 </file>
 
-<file path=ppt/slides/slide8.xml><?xml version="1.0" encoding="utf-8"?>
+<file path=ppt/slides/slide9.xml><?xml version="1.0" encoding="utf-8"?>
 <p:sld xmlns:a="http://schemas.openxmlformats.org/drawingml/2006/main" xmlns:r="http://schemas.openxmlformats.org/officeDocument/2006/relationships" xmlns:p="http://schemas.openxmlformats.org/presentationml/2006/main">
   <p:cSld>
     <p:bg>
@@ -8543,485 +9426,11 @@
   <p:clrMapOvr>
     <a:masterClrMapping/>
   </p:clrMapOvr>
-  <p:timing>
-    <p:tnLst>
-      <p:par>
-        <p:cTn id="1" dur="indefinite" restart="never" nodeType="tmRoot"/>
-      </p:par>
-    </p:tnLst>
-  </p:timing>
-</p:sld>
-</file>
-
-<file path=ppt/slides/slide9.xml><?xml version="1.0" encoding="utf-8"?>
-<p:sld xmlns:a="http://schemas.openxmlformats.org/drawingml/2006/main" xmlns:r="http://schemas.openxmlformats.org/officeDocument/2006/relationships" xmlns:p="http://schemas.openxmlformats.org/presentationml/2006/main">
-  <p:cSld>
-    <p:bg>
-      <p:bgPr>
-        <a:gradFill>
-          <a:gsLst>
-            <a:gs pos="100000">
-              <a:schemeClr val="accent1">
-                <a:lumMod val="20000"/>
-                <a:lumOff val="80000"/>
-              </a:schemeClr>
-            </a:gs>
-            <a:gs pos="0">
-              <a:schemeClr val="accent1">
-                <a:lumMod val="20000"/>
-                <a:lumOff val="80000"/>
-              </a:schemeClr>
-            </a:gs>
-          </a:gsLst>
-          <a:lin ang="5400000" scaled="0"/>
-        </a:gradFill>
-        <a:effectLst/>
-      </p:bgPr>
-    </p:bg>
-    <p:spTree>
-      <p:nvGrpSpPr>
-        <p:cNvPr id="1" name=""/>
-        <p:cNvGrpSpPr/>
-        <p:nvPr/>
-      </p:nvGrpSpPr>
-      <p:grpSpPr>
-        <a:xfrm>
-          <a:off x="0" y="0"/>
-          <a:ext cx="0" cy="0"/>
-          <a:chOff x="0" y="0"/>
-          <a:chExt cx="0" cy="0"/>
-        </a:xfrm>
-      </p:grpSpPr>
-      <p:sp>
-        <p:nvSpPr>
-          <p:cNvPr id="2" name="Right Triangle 1"/>
-          <p:cNvSpPr/>
-          <p:nvPr/>
-        </p:nvSpPr>
-        <p:spPr>
-          <a:xfrm rot="9644380">
-            <a:off x="-3413628" y="-2023368"/>
-            <a:ext cx="18104378" cy="11379632"/>
-          </a:xfrm>
-          <a:prstGeom prst="rtTriangle">
-            <a:avLst/>
-          </a:prstGeom>
-          <a:gradFill flip="none" rotWithShape="1">
-            <a:gsLst>
-              <a:gs pos="0">
-                <a:schemeClr val="accent5">
-                  <a:lumMod val="89000"/>
-                </a:schemeClr>
-              </a:gs>
-              <a:gs pos="23000">
-                <a:schemeClr val="accent5">
-                  <a:lumMod val="89000"/>
-                </a:schemeClr>
-              </a:gs>
-              <a:gs pos="69000">
-                <a:schemeClr val="accent5">
-                  <a:lumMod val="75000"/>
-                </a:schemeClr>
-              </a:gs>
-              <a:gs pos="97000">
-                <a:schemeClr val="accent5">
-                  <a:lumMod val="70000"/>
-                </a:schemeClr>
-              </a:gs>
-            </a:gsLst>
-            <a:path path="circle">
-              <a:fillToRect l="50000" t="50000" r="50000" b="50000"/>
-            </a:path>
-            <a:tileRect/>
-          </a:gradFill>
-        </p:spPr>
-        <p:style>
-          <a:lnRef idx="2">
-            <a:schemeClr val="accent1">
-              <a:shade val="50000"/>
-            </a:schemeClr>
-          </a:lnRef>
-          <a:fillRef idx="1">
-            <a:schemeClr val="accent1"/>
-          </a:fillRef>
-          <a:effectRef idx="0">
-            <a:schemeClr val="accent1"/>
-          </a:effectRef>
-          <a:fontRef idx="minor">
-            <a:schemeClr val="lt1"/>
-          </a:fontRef>
-        </p:style>
-        <p:txBody>
-          <a:bodyPr rtlCol="0" anchor="ctr"/>
-          <a:lstStyle/>
-          <a:p>
-            <a:pPr algn="ctr"/>
-            <a:endParaRPr lang="en-US"/>
-          </a:p>
-        </p:txBody>
-      </p:sp>
-      <p:sp>
-        <p:nvSpPr>
-          <p:cNvPr id="5" name="Rounded Rectangle 4"/>
-          <p:cNvSpPr/>
-          <p:nvPr/>
-        </p:nvSpPr>
-        <p:spPr>
-          <a:xfrm>
-            <a:off x="314633" y="1140542"/>
-            <a:ext cx="11572568" cy="5417574"/>
-          </a:xfrm>
-          <a:prstGeom prst="roundRect">
-            <a:avLst>
-              <a:gd name="adj" fmla="val 1787"/>
-            </a:avLst>
-          </a:prstGeom>
-          <a:solidFill>
-            <a:schemeClr val="bg1">
-              <a:alpha val="90000"/>
-            </a:schemeClr>
-          </a:solidFill>
-          <a:ln w="19050">
-            <a:solidFill>
-              <a:schemeClr val="bg1">
-                <a:lumMod val="65000"/>
-              </a:schemeClr>
-            </a:solidFill>
-          </a:ln>
-        </p:spPr>
-        <p:style>
-          <a:lnRef idx="2">
-            <a:schemeClr val="accent1">
-              <a:shade val="50000"/>
-            </a:schemeClr>
-          </a:lnRef>
-          <a:fillRef idx="1">
-            <a:schemeClr val="accent1"/>
-          </a:fillRef>
-          <a:effectRef idx="0">
-            <a:schemeClr val="accent1"/>
-          </a:effectRef>
-          <a:fontRef idx="minor">
-            <a:schemeClr val="lt1"/>
-          </a:fontRef>
-        </p:style>
-        <p:txBody>
-          <a:bodyPr rtlCol="0" anchor="ctr"/>
-          <a:lstStyle/>
-          <a:p>
-            <a:pPr algn="ctr"/>
-            <a:endParaRPr lang="en-US"/>
-          </a:p>
-        </p:txBody>
-      </p:sp>
-      <p:sp>
-        <p:nvSpPr>
-          <p:cNvPr id="7" name="Rounded Rectangle 6"/>
-          <p:cNvSpPr/>
-          <p:nvPr/>
-        </p:nvSpPr>
-        <p:spPr>
-          <a:xfrm>
-            <a:off x="604684" y="1562792"/>
-            <a:ext cx="3475703" cy="1272875"/>
-          </a:xfrm>
-          <a:prstGeom prst="roundRect">
-            <a:avLst>
-              <a:gd name="adj" fmla="val 0"/>
-            </a:avLst>
-          </a:prstGeom>
-          <a:gradFill flip="none" rotWithShape="1">
-            <a:gsLst>
-              <a:gs pos="0">
-                <a:srgbClr val="4780FF">
-                  <a:shade val="30000"/>
-                  <a:satMod val="115000"/>
-                </a:srgbClr>
-              </a:gs>
-              <a:gs pos="50000">
-                <a:srgbClr val="4780FF">
-                  <a:shade val="67500"/>
-                  <a:satMod val="115000"/>
-                </a:srgbClr>
-              </a:gs>
-              <a:gs pos="100000">
-                <a:srgbClr val="4780FF">
-                  <a:shade val="100000"/>
-                  <a:satMod val="115000"/>
-                </a:srgbClr>
-              </a:gs>
-            </a:gsLst>
-            <a:lin ang="18900000" scaled="1"/>
-            <a:tileRect/>
-          </a:gradFill>
-          <a:ln w="9525">
-            <a:noFill/>
-          </a:ln>
-          <a:effectLst>
-            <a:outerShdw blurRad="63500" sx="102000" sy="102000" algn="ctr" rotWithShape="0">
-              <a:prstClr val="black">
-                <a:alpha val="15000"/>
-              </a:prstClr>
-            </a:outerShdw>
-          </a:effectLst>
-        </p:spPr>
-        <p:style>
-          <a:lnRef idx="2">
-            <a:schemeClr val="accent1">
-              <a:shade val="50000"/>
-            </a:schemeClr>
-          </a:lnRef>
-          <a:fillRef idx="1">
-            <a:schemeClr val="accent1"/>
-          </a:fillRef>
-          <a:effectRef idx="0">
-            <a:schemeClr val="accent1"/>
-          </a:effectRef>
-          <a:fontRef idx="minor">
-            <a:schemeClr val="lt1"/>
-          </a:fontRef>
-        </p:style>
-        <p:txBody>
-          <a:bodyPr rtlCol="0" anchor="ctr"/>
-          <a:lstStyle/>
-          <a:p>
-            <a:pPr algn="ctr"/>
-            <a:endParaRPr lang="en-US"/>
-          </a:p>
-        </p:txBody>
-      </p:sp>
-      <p:sp>
-        <p:nvSpPr>
-          <p:cNvPr id="8" name="Rounded Rectangle 7"/>
-          <p:cNvSpPr/>
-          <p:nvPr/>
-        </p:nvSpPr>
-        <p:spPr>
-          <a:xfrm>
-            <a:off x="4348316" y="1562792"/>
-            <a:ext cx="3475703" cy="1272874"/>
-          </a:xfrm>
-          <a:prstGeom prst="roundRect">
-            <a:avLst>
-              <a:gd name="adj" fmla="val 0"/>
-            </a:avLst>
-          </a:prstGeom>
-          <a:gradFill flip="none" rotWithShape="1">
-            <a:gsLst>
-              <a:gs pos="0">
-                <a:srgbClr val="0070C0">
-                  <a:shade val="30000"/>
-                  <a:satMod val="115000"/>
-                </a:srgbClr>
-              </a:gs>
-              <a:gs pos="50000">
-                <a:srgbClr val="0070C0">
-                  <a:shade val="67500"/>
-                  <a:satMod val="115000"/>
-                </a:srgbClr>
-              </a:gs>
-              <a:gs pos="100000">
-                <a:srgbClr val="0070C0">
-                  <a:shade val="100000"/>
-                  <a:satMod val="115000"/>
-                </a:srgbClr>
-              </a:gs>
-            </a:gsLst>
-            <a:lin ang="18900000" scaled="1"/>
-            <a:tileRect/>
-          </a:gradFill>
-          <a:ln w="9525">
-            <a:noFill/>
-          </a:ln>
-          <a:effectLst>
-            <a:outerShdw blurRad="63500" sx="102000" sy="102000" algn="ctr" rotWithShape="0">
-              <a:prstClr val="black">
-                <a:alpha val="15000"/>
-              </a:prstClr>
-            </a:outerShdw>
-          </a:effectLst>
-        </p:spPr>
-        <p:style>
-          <a:lnRef idx="2">
-            <a:schemeClr val="accent1">
-              <a:shade val="50000"/>
-            </a:schemeClr>
-          </a:lnRef>
-          <a:fillRef idx="1">
-            <a:schemeClr val="accent1"/>
-          </a:fillRef>
-          <a:effectRef idx="0">
-            <a:schemeClr val="accent1"/>
-          </a:effectRef>
-          <a:fontRef idx="minor">
-            <a:schemeClr val="lt1"/>
-          </a:fontRef>
-        </p:style>
-        <p:txBody>
-          <a:bodyPr rtlCol="0" anchor="ctr"/>
-          <a:lstStyle/>
-          <a:p>
-            <a:pPr algn="ctr"/>
-            <a:endParaRPr lang="en-US"/>
-          </a:p>
-        </p:txBody>
-      </p:sp>
-      <p:sp>
-        <p:nvSpPr>
-          <p:cNvPr id="9" name="Rounded Rectangle 8"/>
-          <p:cNvSpPr/>
-          <p:nvPr/>
-        </p:nvSpPr>
-        <p:spPr>
-          <a:xfrm>
-            <a:off x="8091949" y="1562792"/>
-            <a:ext cx="3475703" cy="1272875"/>
-          </a:xfrm>
-          <a:prstGeom prst="roundRect">
-            <a:avLst>
-              <a:gd name="adj" fmla="val 0"/>
-            </a:avLst>
-          </a:prstGeom>
-          <a:gradFill flip="none" rotWithShape="1">
-            <a:gsLst>
-              <a:gs pos="0">
-                <a:schemeClr val="accent5">
-                  <a:lumMod val="75000"/>
-                  <a:shade val="30000"/>
-                  <a:satMod val="115000"/>
-                </a:schemeClr>
-              </a:gs>
-              <a:gs pos="50000">
-                <a:schemeClr val="accent5">
-                  <a:lumMod val="75000"/>
-                  <a:shade val="67500"/>
-                  <a:satMod val="115000"/>
-                </a:schemeClr>
-              </a:gs>
-              <a:gs pos="100000">
-                <a:schemeClr val="accent5">
-                  <a:lumMod val="75000"/>
-                  <a:shade val="100000"/>
-                  <a:satMod val="115000"/>
-                </a:schemeClr>
-              </a:gs>
-            </a:gsLst>
-            <a:lin ang="18900000" scaled="1"/>
-            <a:tileRect/>
-          </a:gradFill>
-          <a:ln w="9525">
-            <a:noFill/>
-          </a:ln>
-          <a:effectLst>
-            <a:outerShdw blurRad="63500" sx="102000" sy="102000" algn="ctr" rotWithShape="0">
-              <a:prstClr val="black">
-                <a:alpha val="15000"/>
-              </a:prstClr>
-            </a:outerShdw>
-          </a:effectLst>
-        </p:spPr>
-        <p:style>
-          <a:lnRef idx="2">
-            <a:schemeClr val="accent1">
-              <a:shade val="50000"/>
-            </a:schemeClr>
-          </a:lnRef>
-          <a:fillRef idx="1">
-            <a:schemeClr val="accent1"/>
-          </a:fillRef>
-          <a:effectRef idx="0">
-            <a:schemeClr val="accent1"/>
-          </a:effectRef>
-          <a:fontRef idx="minor">
-            <a:schemeClr val="lt1"/>
-          </a:fontRef>
-        </p:style>
-        <p:txBody>
-          <a:bodyPr rtlCol="0" anchor="ctr"/>
-          <a:lstStyle/>
-          <a:p>
-            <a:pPr algn="ctr"/>
-            <a:endParaRPr lang="en-US"/>
-          </a:p>
-        </p:txBody>
-      </p:sp>
-      <p:sp>
-        <p:nvSpPr>
-          <p:cNvPr id="10" name="Rounded Rectangle 9"/>
-          <p:cNvSpPr/>
-          <p:nvPr/>
-        </p:nvSpPr>
-        <p:spPr>
-          <a:xfrm>
-            <a:off x="604684" y="3087329"/>
-            <a:ext cx="10962968" cy="3073809"/>
-          </a:xfrm>
-          <a:prstGeom prst="roundRect">
-            <a:avLst>
-              <a:gd name="adj" fmla="val 0"/>
-            </a:avLst>
-          </a:prstGeom>
-          <a:solidFill>
-            <a:schemeClr val="bg1"/>
-          </a:solidFill>
-          <a:ln w="9525">
-            <a:noFill/>
-          </a:ln>
-          <a:effectLst>
-            <a:outerShdw blurRad="50800" dist="38100" dir="5400000" sx="101000" sy="101000" algn="t" rotWithShape="0">
-              <a:prstClr val="black">
-                <a:alpha val="10000"/>
-              </a:prstClr>
-            </a:outerShdw>
-          </a:effectLst>
-        </p:spPr>
-        <p:style>
-          <a:lnRef idx="2">
-            <a:schemeClr val="accent1">
-              <a:shade val="50000"/>
-            </a:schemeClr>
-          </a:lnRef>
-          <a:fillRef idx="1">
-            <a:schemeClr val="accent1"/>
-          </a:fillRef>
-          <a:effectRef idx="0">
-            <a:schemeClr val="accent1"/>
-          </a:effectRef>
-          <a:fontRef idx="minor">
-            <a:schemeClr val="lt1"/>
-          </a:fontRef>
-        </p:style>
-        <p:txBody>
-          <a:bodyPr rtlCol="0" anchor="ctr"/>
-          <a:lstStyle/>
-          <a:p>
-            <a:pPr algn="ctr"/>
-            <a:endParaRPr lang="en-US"/>
-          </a:p>
-        </p:txBody>
-      </p:sp>
-    </p:spTree>
-    <p:extLst>
-      <p:ext uri="{BB962C8B-B14F-4D97-AF65-F5344CB8AC3E}">
-        <p14:creationId xmlns:p14="http://schemas.microsoft.com/office/powerpoint/2010/main" val="2472428678"/>
-      </p:ext>
-    </p:extLst>
-  </p:cSld>
-  <p:clrMapOvr>
-    <a:masterClrMapping/>
-  </p:clrMapOvr>
-  <p:timing>
-    <p:tnLst>
-      <p:par>
-        <p:cTn id="1" dur="indefinite" restart="never" nodeType="tmRoot"/>
-      </p:par>
-    </p:tnLst>
-  </p:timing>
 </p:sld>
 </file>
 
 <file path=ppt/theme/theme1.xml><?xml version="1.0" encoding="utf-8"?>
-<a:theme xmlns:a="http://schemas.openxmlformats.org/drawingml/2006/main" name="Office Theme">
+<a:theme xmlns:a="http://schemas.openxmlformats.org/drawingml/2006/main" name="Tema de Office">
   <a:themeElements>
     <a:clrScheme name="Office">
       <a:dk1>
@@ -9031,39 +9440,39 @@
         <a:sysClr val="window" lastClr="FFFFFF"/>
       </a:lt1>
       <a:dk2>
-        <a:srgbClr val="44546A"/>
+        <a:srgbClr val="0E2841"/>
       </a:dk2>
       <a:lt2>
-        <a:srgbClr val="E7E6E6"/>
+        <a:srgbClr val="E8E8E8"/>
       </a:lt2>
       <a:accent1>
-        <a:srgbClr val="5B9BD5"/>
+        <a:srgbClr val="156082"/>
       </a:accent1>
       <a:accent2>
-        <a:srgbClr val="ED7D31"/>
+        <a:srgbClr val="E97132"/>
       </a:accent2>
       <a:accent3>
-        <a:srgbClr val="A5A5A5"/>
+        <a:srgbClr val="196B24"/>
       </a:accent3>
       <a:accent4>
-        <a:srgbClr val="FFC000"/>
+        <a:srgbClr val="0F9ED5"/>
       </a:accent4>
       <a:accent5>
-        <a:srgbClr val="4472C4"/>
+        <a:srgbClr val="A02B93"/>
       </a:accent5>
       <a:accent6>
-        <a:srgbClr val="70AD47"/>
+        <a:srgbClr val="4EA72E"/>
       </a:accent6>
       <a:hlink>
-        <a:srgbClr val="0563C1"/>
+        <a:srgbClr val="467886"/>
       </a:hlink>
       <a:folHlink>
-        <a:srgbClr val="954F72"/>
+        <a:srgbClr val="96607D"/>
       </a:folHlink>
     </a:clrScheme>
     <a:fontScheme name="Office">
       <a:majorFont>
-        <a:latin typeface="Calibri Light" panose="020F0302020204030204"/>
+        <a:latin typeface="Aptos Display" panose="02110004020202020204"/>
         <a:ea typeface=""/>
         <a:cs typeface=""/>
         <a:font script="Jpan" typeface="游ゴシック Light"/>
@@ -9096,9 +9505,26 @@
         <a:font script="Viet" typeface="Times New Roman"/>
         <a:font script="Uigh" typeface="Microsoft Uighur"/>
         <a:font script="Geor" typeface="Sylfaen"/>
+        <a:font script="Armn" typeface="Arial"/>
+        <a:font script="Bugi" typeface="Leelawadee UI"/>
+        <a:font script="Bopo" typeface="Microsoft JhengHei"/>
+        <a:font script="Java" typeface="Javanese Text"/>
+        <a:font script="Lisu" typeface="Segoe UI"/>
+        <a:font script="Mymr" typeface="Myanmar Text"/>
+        <a:font script="Nkoo" typeface="Ebrima"/>
+        <a:font script="Olck" typeface="Nirmala UI"/>
+        <a:font script="Osma" typeface="Ebrima"/>
+        <a:font script="Phag" typeface="Phagspa"/>
+        <a:font script="Syrn" typeface="Estrangelo Edessa"/>
+        <a:font script="Syrj" typeface="Estrangelo Edessa"/>
+        <a:font script="Syre" typeface="Estrangelo Edessa"/>
+        <a:font script="Sora" typeface="Nirmala UI"/>
+        <a:font script="Tale" typeface="Microsoft Tai Le"/>
+        <a:font script="Talu" typeface="Microsoft New Tai Lue"/>
+        <a:font script="Tfng" typeface="Ebrima"/>
       </a:majorFont>
       <a:minorFont>
-        <a:latin typeface="Calibri" panose="020F0502020204030204"/>
+        <a:latin typeface="Aptos" panose="02110004020202020204"/>
         <a:ea typeface=""/>
         <a:cs typeface=""/>
         <a:font script="Jpan" typeface="游ゴシック"/>
@@ -9131,6 +9557,23 @@
         <a:font script="Viet" typeface="Arial"/>
         <a:font script="Uigh" typeface="Microsoft Uighur"/>
         <a:font script="Geor" typeface="Sylfaen"/>
+        <a:font script="Armn" typeface="Arial"/>
+        <a:font script="Bugi" typeface="Leelawadee UI"/>
+        <a:font script="Bopo" typeface="Microsoft JhengHei"/>
+        <a:font script="Java" typeface="Javanese Text"/>
+        <a:font script="Lisu" typeface="Segoe UI"/>
+        <a:font script="Mymr" typeface="Myanmar Text"/>
+        <a:font script="Nkoo" typeface="Ebrima"/>
+        <a:font script="Olck" typeface="Nirmala UI"/>
+        <a:font script="Osma" typeface="Ebrima"/>
+        <a:font script="Phag" typeface="Phagspa"/>
+        <a:font script="Syrn" typeface="Estrangelo Edessa"/>
+        <a:font script="Syrj" typeface="Estrangelo Edessa"/>
+        <a:font script="Syre" typeface="Estrangelo Edessa"/>
+        <a:font script="Sora" typeface="Nirmala UI"/>
+        <a:font script="Tale" typeface="Microsoft Tai Le"/>
+        <a:font script="Talu" typeface="Microsoft New Tai Lue"/>
+        <a:font script="Tfng" typeface="Ebrima"/>
       </a:minorFont>
     </a:fontScheme>
     <a:fmtScheme name="Office">
@@ -9192,13 +9635,6 @@
         </a:gradFill>
       </a:fillStyleLst>
       <a:lnStyleLst>
-        <a:ln w="6350" cap="flat" cmpd="sng" algn="ctr">
-          <a:solidFill>
-            <a:schemeClr val="phClr"/>
-          </a:solidFill>
-          <a:prstDash val="solid"/>
-          <a:miter lim="800000"/>
-        </a:ln>
         <a:ln w="12700" cap="flat" cmpd="sng" algn="ctr">
           <a:solidFill>
             <a:schemeClr val="phClr"/>
@@ -9207,6 +9643,13 @@
           <a:miter lim="800000"/>
         </a:ln>
         <a:ln w="19050" cap="flat" cmpd="sng" algn="ctr">
+          <a:solidFill>
+            <a:schemeClr val="phClr"/>
+          </a:solidFill>
+          <a:prstDash val="solid"/>
+          <a:miter lim="800000"/>
+        </a:ln>
+        <a:ln w="25400" cap="flat" cmpd="sng" algn="ctr">
           <a:solidFill>
             <a:schemeClr val="phClr"/>
           </a:solidFill>
@@ -9271,11 +9714,31 @@
       </a:bgFillStyleLst>
     </a:fmtScheme>
   </a:themeElements>
-  <a:objectDefaults/>
+  <a:objectDefaults>
+    <a:lnDef>
+      <a:spPr/>
+      <a:bodyPr/>
+      <a:lstStyle/>
+      <a:style>
+        <a:lnRef idx="2">
+          <a:schemeClr val="accent1"/>
+        </a:lnRef>
+        <a:fillRef idx="0">
+          <a:schemeClr val="accent1"/>
+        </a:fillRef>
+        <a:effectRef idx="1">
+          <a:schemeClr val="accent1"/>
+        </a:effectRef>
+        <a:fontRef idx="minor">
+          <a:schemeClr val="tx1"/>
+        </a:fontRef>
+      </a:style>
+    </a:lnDef>
+  </a:objectDefaults>
   <a:extraClrSchemeLst/>
   <a:extLst>
     <a:ext uri="{05A4C25C-085E-4340-85A3-A5531E510DB2}">
-      <thm15:themeFamily xmlns:thm15="http://schemas.microsoft.com/office/thememl/2012/main" name="Office Theme" id="{62F939B6-93AF-4DB8-9C6B-D6C7DFDC589F}" vid="{4A3C46E8-61CC-4603-A589-7422A47A8E4A}"/>
+      <thm15:themeFamily xmlns:thm15="http://schemas.microsoft.com/office/thememl/2012/main" name="Office Theme" id="{2E142A2C-CD16-42D6-873A-C26D2A0506FA}" vid="{1BDDFF52-6CD6-40A5-AB3C-68EB2F1E4D0A}"/>
     </a:ext>
   </a:extLst>
 </a:theme>
